--- a/IUEA_Teaching_Plan/decks/CML3113_Week12_Mining_Petroleum.pptx
+++ b/IUEA_Teaching_Plan/decks/CML3113_Week12_Mining_Petroleum.pptx
@@ -43,14 +43,14 @@
     <p:sldId xmlns:ns0="http://schemas.openxmlformats.org/officeDocument/2006/relationships" id="327" ns0:id="rId77"/>
     <p:sldId xmlns:ns0="http://schemas.openxmlformats.org/officeDocument/2006/relationships" id="328" ns0:id="rId78"/>
     <p:sldId xmlns:ns0="http://schemas.openxmlformats.org/officeDocument/2006/relationships" id="329" ns0:id="rId79"/>
+    <p:sldId xmlns:ns0="http://schemas.openxmlformats.org/officeDocument/2006/relationships" id="331" ns0:id="rId51"/>
     <p:sldId xmlns:r="http://schemas.openxmlformats.org/officeDocument/2006/relationships" id="311" r:id="Raaa3b8e592774bda"/>
     <p:sldId xmlns:r="http://schemas.openxmlformats.org/officeDocument/2006/relationships" id="312" r:id="R3c0a5fb453d34f3c"/>
     <p:sldId xmlns:r="http://schemas.openxmlformats.org/officeDocument/2006/relationships" id="313" r:id="R52f4e59b09844a0f"/>
     <p:sldId xmlns:r="http://schemas.openxmlformats.org/officeDocument/2006/relationships" id="314" r:id="R4b467395f2284ae8"/>
-    <p:sldId xmlns:r="http://schemas.openxmlformats.org/officeDocument/2006/relationships" id="315" r:id="Rcc2b8bb17aa14979"/>
     <p:sldId xmlns:r="http://schemas.openxmlformats.org/officeDocument/2006/relationships" id="316" r:id="R3d88246621174bcf"/>
     <p:sldId xmlns:ns0="http://schemas.openxmlformats.org/officeDocument/2006/relationships" id="330" ns0:id="rId80"/>
-    <p:sldId xmlns:r="http://schemas.openxmlformats.org/officeDocument/2006/relationships" id="317" r:id="Rf8beb6affd204721"/>
+    <p:sldId xmlns:ns0="http://schemas.openxmlformats.org/officeDocument/2006/relationships" id="332" ns0:id="rId52"/>
     <p:sldId xmlns:r="http://schemas.openxmlformats.org/officeDocument/2006/relationships" id="318" r:id="Rbd3e20e8d7f94545"/>
     <p:sldId xmlns:r="http://schemas.openxmlformats.org/officeDocument/2006/relationships" id="319" r:id="R43ebc7b376ad4740"/>
   </p:sldIdLst>
@@ -2873,7 +2873,7 @@
 </file>
 
 <file path=ppt/notesSlides/notesSlide36.xml><?xml version="1.0" encoding="utf-8"?>
-<p:notes xmlns:p="http://schemas.openxmlformats.org/presentationml/2006/main">
+<p:notes xmlns:a="http://schemas.openxmlformats.org/drawingml/2006/main" xmlns:p="http://schemas.openxmlformats.org/presentationml/2006/main" xmlns:r="http://schemas.openxmlformats.org/officeDocument/2006/relationships">
   <p:cSld>
     <p:spTree>
       <p:nvGrpSpPr>
@@ -2882,16 +2882,21 @@
         <p:nvPr/>
       </p:nvGrpSpPr>
       <p:grpSpPr>
-        <a:xfrm xmlns:a="http://schemas.openxmlformats.org/drawingml/2006/main"/>
+        <a:xfrm>
+          <a:off x="0" y="0"/>
+          <a:ext cx="0" cy="0"/>
+          <a:chOff x="0" y="0"/>
+          <a:chExt cx="0" cy="0"/>
+        </a:xfrm>
       </p:grpSpPr>
       <p:sp>
         <p:nvSpPr>
           <p:cNvPr id="2" name="Slide Image Placeholder 1"/>
           <p:cNvSpPr>
-            <a:spLocks xmlns:a="http://schemas.openxmlformats.org/drawingml/2006/main" noGrp="1"/>
+            <a:spLocks noGrp="1"/>
           </p:cNvSpPr>
           <p:nvPr>
-            <p:ph type="sldImg" idx="0"/>
+            <p:ph type="sldImg" idx="2"/>
           </p:nvPr>
         </p:nvSpPr>
         <p:spPr/>
@@ -2900,37 +2905,31 @@
         <p:nvSpPr>
           <p:cNvPr id="3" name="Notes Placeholder 2"/>
           <p:cNvSpPr>
-            <a:spLocks xmlns:a="http://schemas.openxmlformats.org/drawingml/2006/main" noGrp="1"/>
+            <a:spLocks noGrp="1"/>
           </p:cNvSpPr>
           <p:nvPr>
-            <p:ph type="body" idx="1"/>
+            <p:ph type="body" idx="3" sz="quarter"/>
           </p:nvPr>
         </p:nvSpPr>
         <p:spPr/>
         <p:txBody>
-          <a:bodyPr xmlns:a="http://schemas.openxmlformats.org/drawingml/2006/main"/>
-          <a:lstStyle xmlns:a="http://schemas.openxmlformats.org/drawingml/2006/main"/>
-          <a:p xmlns:a="http://schemas.openxmlformats.org/drawingml/2006/main">
-            <a:r>
-              <a:t>This slide gives your own task for the week. We are investigating crusher energy demand.</a:t>
-            </a:r>
-          </a:p>
-          <a:p xmlns:a="http://schemas.openxmlformats.org/drawingml/2006/main"/>
-          <a:p xmlns:a="http://schemas.openxmlformats.org/drawingml/2006/main">
-            <a:r>
-              <a:t>The unit of the target is kWh/t. Use that unit whenever you write about errors and results.</a:t>
-            </a:r>
-          </a:p>
-          <a:p xmlns:a="http://schemas.openxmlformats.org/drawingml/2006/main"/>
-          <a:p xmlns:a="http://schemas.openxmlformats.org/drawingml/2006/main">
-            <a:r>
-              <a:t>The records are synthetic teaching data. They are made for learning and are not measurements that could be used to run real equipment.</a:t>
-            </a:r>
-          </a:p>
-          <a:p xmlns:a="http://schemas.openxmlformats.org/drawingml/2006/main"/>
-          <a:p xmlns:a="http://schemas.openxmlformats.org/drawingml/2006/main">
-            <a:r>
-              <a:t>Each record is one operating observation. A column such as equipment underscore id can repeat, because one machine appears in many observations. Record underscore id identifies each single observation, and the target column holds the known answer that the model learns to predict.</a:t>
+          <a:bodyPr/>
+          <a:lstStyle/>
+          <a:p>
+            <a:r>
+              <a:t>This week's tasks are part B of the Block 2 assignment pack, worth twenty marks. They are built around select_model and regression_errors.</a:t>
+            </a:r>
+          </a:p>
+          <a:p/>
+          <a:p>
+            <a:r>
+              <a:t>This is the last part, so the whole pack is due by Thursday 10 December at 23:59 Kampala time. In a moment we show where each part is submitted.</a:t>
+            </a:r>
+          </a:p>
+          <a:p/>
+          <a:p>
+            <a:r>
+              <a:t>There is no quiz today. The Block 2 quiz opens after the Week 13 class.</a:t>
             </a:r>
           </a:p>
         </p:txBody>
@@ -2939,23 +2938,18 @@
         <p:nvSpPr>
           <p:cNvPr id="4" name="Slide Number Placeholder 3"/>
           <p:cNvSpPr>
-            <a:spLocks xmlns:a="http://schemas.openxmlformats.org/drawingml/2006/main" noGrp="1"/>
+            <a:spLocks noGrp="1"/>
           </p:cNvSpPr>
           <p:nvPr>
-            <p:ph type="sldNum" idx="5"/>
+            <p:ph type="sldNum" idx="5" sz="quarter"/>
           </p:nvPr>
         </p:nvSpPr>
         <p:spPr/>
-        <p:txBody>
-          <a:bodyPr xmlns:a="http://schemas.openxmlformats.org/drawingml/2006/main"/>
-          <a:lstStyle xmlns:a="http://schemas.openxmlformats.org/drawingml/2006/main"/>
-          <a:p xmlns:a="http://schemas.openxmlformats.org/drawingml/2006/main"/>
-        </p:txBody>
       </p:sp>
     </p:spTree>
   </p:cSld>
   <p:clrMapOvr>
-    <a:masterClrMapping xmlns:a="http://schemas.openxmlformats.org/drawingml/2006/main"/>
+    <a:masterClrMapping/>
   </p:clrMapOvr>
 </p:notes>
 </file>
@@ -3000,25 +2994,25 @@
           <a:lstStyle xmlns:a="http://schemas.openxmlformats.org/drawingml/2006/main"/>
           <a:p xmlns:a="http://schemas.openxmlformats.org/drawingml/2006/main">
             <a:r>
-              <a:t>The first required function is select underscore model. It takes three inputs. Candidates is a table with columns name, validation underscore mae and latency underscore ms. Max underscore mae is the error limit, and max underscore ms is the speed limit.</a:t>
+              <a:t>This slide gives your own task for the week. We are investigating crusher energy demand.</a:t>
             </a:r>
           </a:p>
           <a:p xmlns:a="http://schemas.openxmlformats.org/drawingml/2006/main"/>
           <a:p xmlns:a="http://schemas.openxmlformats.org/drawingml/2006/main">
             <a:r>
-              <a:t>Inside, the function keeps the rows that meet both limits, and the comparison is inclusive, so a value equal to the limit passes. Among those, it picks the one with the smallest validation underscore mae. If errors tie, the smaller latency underscore ms wins. If that ties too, the alphabetically first name wins.</a:t>
+              <a:t>The unit of the target is kWh/t. Use that unit whenever you write about errors and results.</a:t>
             </a:r>
           </a:p>
           <a:p xmlns:a="http://schemas.openxmlformats.org/drawingml/2006/main"/>
           <a:p xmlns:a="http://schemas.openxmlformats.org/drawingml/2006/main">
             <a:r>
-              <a:t>The function returns the chosen name, or None when no candidate qualifies.</a:t>
+              <a:t>The records are synthetic teaching data. They are made for learning and are not measurements that could be used to run real equipment.</a:t>
             </a:r>
           </a:p>
           <a:p xmlns:a="http://schemas.openxmlformats.org/drawingml/2006/main"/>
           <a:p xmlns:a="http://schemas.openxmlformats.org/drawingml/2006/main">
             <a:r>
-              <a:t>It works only with validation scores. Test scores are never used to select. Keep the function name and the output exactly as written, and check the types and units against your issued brief.</a:t>
+              <a:t>Each record is one operating observation. A column such as equipment underscore id can repeat, because one machine appears in many observations. Record underscore id identifies each single observation, and the target column holds the known answer that the model learns to predict.</a:t>
             </a:r>
           </a:p>
         </p:txBody>
@@ -3088,19 +3082,25 @@
           <a:lstStyle xmlns:a="http://schemas.openxmlformats.org/drawingml/2006/main"/>
           <a:p xmlns:a="http://schemas.openxmlformats.org/drawingml/2006/main">
             <a:r>
-              <a:t>The second required function is regression underscore errors. It takes two inputs. Actual holds the true values of crusher energy demand, and predicted holds what the model said for the same observations. They must line up, so the first actual value pairs with the first predicted value, and so on.</a:t>
+              <a:t>The first required function is select underscore model. It takes three inputs. Candidates is a table with columns name, validation underscore mae and latency underscore ms. Max underscore mae is the error limit, and max underscore ms is the speed limit.</a:t>
             </a:r>
           </a:p>
           <a:p xmlns:a="http://schemas.openxmlformats.org/drawingml/2006/main"/>
           <a:p xmlns:a="http://schemas.openxmlformats.org/drawingml/2006/main">
             <a:r>
-              <a:t>The function returns two numbers. MAE is the mean absolute error, the average size of the mistakes. RMSE is the root mean squared error, which punishes large mistakes more heavily. Both are measured in kWh/t, as in Week 8.</a:t>
+              <a:t>Inside, the function keeps the rows that meet both limits, and the comparison is inclusive, so a value equal to the limit passes. Among those, it picks the one with the smallest validation underscore mae. If errors tie, the smaller latency underscore ms wins. If that ties too, the alphabetically first name wins.</a:t>
             </a:r>
           </a:p>
           <a:p xmlns:a="http://schemas.openxmlformats.org/drawingml/2006/main"/>
           <a:p xmlns:a="http://schemas.openxmlformats.org/drawingml/2006/main">
             <a:r>
-              <a:t>Both must be calculated over the same paired observations. Give the results with full precision and do not round them. Keep the exact names, mae and rmse, because the grader looks for them.</a:t>
+              <a:t>The function returns the chosen name, or None when no candidate qualifies.</a:t>
+            </a:r>
+          </a:p>
+          <a:p xmlns:a="http://schemas.openxmlformats.org/drawingml/2006/main"/>
+          <a:p xmlns:a="http://schemas.openxmlformats.org/drawingml/2006/main">
+            <a:r>
+              <a:t>It works only with validation scores. Test scores are never used to select. Keep the function name and the output exactly as written, and check the types and units against your issued brief.</a:t>
             </a:r>
           </a:p>
         </p:txBody>
@@ -3170,25 +3170,19 @@
           <a:lstStyle xmlns:a="http://schemas.openxmlformats.org/drawingml/2006/main"/>
           <a:p xmlns:a="http://schemas.openxmlformats.org/drawingml/2006/main">
             <a:r>
-              <a:t>Your notebook holds more than code. It also holds your written reasoning.</a:t>
+              <a:t>The second required function is regression underscore errors. It takes two inputs. Actual holds the true values of crusher energy demand, and predicted holds what the model said for the same observations. They must line up, so the first actual value pairs with the first predicted value, and so on.</a:t>
             </a:r>
           </a:p>
           <a:p xmlns:a="http://schemas.openxmlformats.org/drawingml/2006/main"/>
           <a:p xmlns:a="http://schemas.openxmlformats.org/drawingml/2006/main">
             <a:r>
-              <a:t>Find the cell headed My written evidence. In that cell you explain the supplied scenario in your own words. Copying the prompts or the code comments does not count, because we want to read what you understood.</a:t>
+              <a:t>The function returns two numbers. MAE is the mean absolute error, the average size of the mistakes. RMSE is the root mean squared error, which punishes large mistakes more heavily. Both are measured in kWh/t, as in Week 8.</a:t>
             </a:r>
           </a:p>
           <a:p xmlns:a="http://schemas.openxmlformats.org/drawingml/2006/main"/>
           <a:p xmlns:a="http://schemas.openxmlformats.org/drawingml/2006/main">
             <a:r>
-              <a:t>Your explanation should state the target units, give your reasons for the choice you made, and name the limitations of the result. A limitation might be the small data size, or the fact that the data is synthetic.</a:t>
-            </a:r>
-          </a:p>
-          <a:p xmlns:a="http://schemas.openxmlformats.org/drawingml/2006/main"/>
-          <a:p xmlns:a="http://schemas.openxmlformats.org/drawingml/2006/main">
-            <a:r>
-              <a:t>Then you submit one complete notebook that contains both your code and your written evidence.</a:t>
+              <a:t>Both must be calculated over the same paired observations. Give the results with full precision and do not round them. Keep the exact names, mae and rmse, because the grader looks for them.</a:t>
             </a:r>
           </a:p>
         </p:txBody>
@@ -3340,25 +3334,25 @@
           <a:lstStyle xmlns:a="http://schemas.openxmlformats.org/drawingml/2006/main"/>
           <a:p xmlns:a="http://schemas.openxmlformats.org/drawingml/2006/main">
             <a:r>
-              <a:t>This slide covers the submission for this week's assignment. Check the opening time and the deadline on the slide, and plan your work around them.</a:t>
+              <a:t>Your notebook holds more than code. It also holds your written reasoning.</a:t>
             </a:r>
           </a:p>
           <a:p xmlns:a="http://schemas.openxmlformats.org/drawingml/2006/main"/>
           <a:p xmlns:a="http://schemas.openxmlformats.org/drawingml/2006/main">
             <a:r>
-              <a:t>Open the form from the link and look at the form title before uploading. Enter your full Student Registration Number exactly as it is registered.</a:t>
+              <a:t>Find the cell headed My written evidence. In that cell you explain the supplied scenario in your own words. Copying the prompts or the code comments does not count, because we want to read what you understood.</a:t>
             </a:r>
           </a:p>
           <a:p xmlns:a="http://schemas.openxmlformats.org/drawingml/2006/main"/>
           <a:p xmlns:a="http://schemas.openxmlformats.org/drawingml/2006/main">
             <a:r>
-              <a:t>Upload your single completed notebook file. Wait until the file name appears, then press Submit.</a:t>
+              <a:t>Your explanation should state the target units, give your reasons for the choice you made, and name the limitations of the result. A limitation might be the small data size, or the fact that the data is synthetic.</a:t>
             </a:r>
           </a:p>
           <a:p xmlns:a="http://schemas.openxmlformats.org/drawingml/2006/main"/>
           <a:p xmlns:a="http://schemas.openxmlformats.org/drawingml/2006/main">
             <a:r>
-              <a:t>Keep the files you submitted and the confirmation you receive. A file saved only in Drive or GitHub has not been submitted until you complete the form.</a:t>
+              <a:t>The code and the written evidence for this part go in one complete notebook, and that notebook goes into the Block 2 pack.</a:t>
             </a:r>
           </a:p>
         </p:txBody>
@@ -3547,7 +3541,7 @@
 </file>
 
 <file path=ppt/notesSlides/notesSlide43.xml><?xml version="1.0" encoding="utf-8"?>
-<p:notes xmlns:p="http://schemas.openxmlformats.org/presentationml/2006/main">
+<p:notes xmlns:a="http://schemas.openxmlformats.org/drawingml/2006/main" xmlns:p="http://schemas.openxmlformats.org/presentationml/2006/main" xmlns:r="http://schemas.openxmlformats.org/officeDocument/2006/relationships">
   <p:cSld>
     <p:spTree>
       <p:nvGrpSpPr>
@@ -3556,16 +3550,21 @@
         <p:nvPr/>
       </p:nvGrpSpPr>
       <p:grpSpPr>
-        <a:xfrm xmlns:a="http://schemas.openxmlformats.org/drawingml/2006/main"/>
+        <a:xfrm>
+          <a:off x="0" y="0"/>
+          <a:ext cx="0" cy="0"/>
+          <a:chOff x="0" y="0"/>
+          <a:chExt cx="0" cy="0"/>
+        </a:xfrm>
       </p:grpSpPr>
       <p:sp>
         <p:nvSpPr>
           <p:cNvPr id="2" name="Slide Image Placeholder 1"/>
           <p:cNvSpPr>
-            <a:spLocks xmlns:a="http://schemas.openxmlformats.org/drawingml/2006/main" noGrp="1"/>
+            <a:spLocks noGrp="1"/>
           </p:cNvSpPr>
           <p:nvPr>
-            <p:ph type="sldImg" idx="0"/>
+            <p:ph type="sldImg" idx="2"/>
           </p:nvPr>
         </p:nvSpPr>
         <p:spPr/>
@@ -3574,31 +3573,31 @@
         <p:nvSpPr>
           <p:cNvPr id="3" name="Notes Placeholder 2"/>
           <p:cNvSpPr>
-            <a:spLocks xmlns:a="http://schemas.openxmlformats.org/drawingml/2006/main" noGrp="1"/>
+            <a:spLocks noGrp="1"/>
           </p:cNvSpPr>
           <p:nvPr>
-            <p:ph type="body" idx="1"/>
+            <p:ph type="body" idx="3" sz="quarter"/>
           </p:nvPr>
         </p:nvSpPr>
         <p:spPr/>
         <p:txBody>
-          <a:bodyPr xmlns:a="http://schemas.openxmlformats.org/drawingml/2006/main"/>
-          <a:lstStyle xmlns:a="http://schemas.openxmlformats.org/drawingml/2006/main"/>
-          <a:p xmlns:a="http://schemas.openxmlformats.org/drawingml/2006/main">
-            <a:r>
-              <a:t>The Week 12 quiz is taken individually. It opens when the lecturer activates it, and once activated it stays open for 24 hours.</a:t>
-            </a:r>
-          </a:p>
-          <a:p xmlns:a="http://schemas.openxmlformats.org/drawingml/2006/main"/>
-          <a:p xmlns:a="http://schemas.openxmlformats.org/drawingml/2006/main">
-            <a:r>
-              <a:t>Use the link on the slide to reach the quiz form. Sign in with your registered account, and enter your Student Registration Number in the form.</a:t>
-            </a:r>
-          </a:p>
-          <a:p xmlns:a="http://schemas.openxmlformats.org/drawingml/2006/main"/>
-          <a:p xmlns:a="http://schemas.openxmlformats.org/drawingml/2006/main">
-            <a:r>
-              <a:t>Check the closing time that is announced after activation, so you do not miss it. The quiz may take only a few minutes to answer, but the form stays available for the whole 24 hours.</a:t>
+          <a:bodyPr/>
+          <a:lstStyle/>
+          <a:p>
+            <a:r>
+              <a:t>This slide is where the Block 2 assignment pack goes in. It has 2 parts, one notebook for each, and each part has its own form.</a:t>
+            </a:r>
+          </a:p>
+          <a:p/>
+          <a:p>
+            <a:r>
+              <a:t>Open the form for each part in turn, enter your full Student Registration Number, and upload that part's notebook. Do not wait for the last minute, because the pack closes Thursday 10 December at 23:59 Kampala time, and all parts close together.</a:t>
+            </a:r>
+          </a:p>
+          <a:p/>
+          <a:p>
+            <a:r>
+              <a:t>A part that is not submitted scores zero for that part. The block marks are never dropped, so each part counts.</a:t>
             </a:r>
           </a:p>
         </p:txBody>
@@ -3607,23 +3606,18 @@
         <p:nvSpPr>
           <p:cNvPr id="4" name="Slide Number Placeholder 3"/>
           <p:cNvSpPr>
-            <a:spLocks xmlns:a="http://schemas.openxmlformats.org/drawingml/2006/main" noGrp="1"/>
+            <a:spLocks noGrp="1"/>
           </p:cNvSpPr>
           <p:nvPr>
-            <p:ph type="sldNum" idx="5"/>
+            <p:ph type="sldNum" idx="5" sz="quarter"/>
           </p:nvPr>
         </p:nvSpPr>
         <p:spPr/>
-        <p:txBody>
-          <a:bodyPr xmlns:a="http://schemas.openxmlformats.org/drawingml/2006/main"/>
-          <a:lstStyle xmlns:a="http://schemas.openxmlformats.org/drawingml/2006/main"/>
-          <a:p xmlns:a="http://schemas.openxmlformats.org/drawingml/2006/main"/>
-        </p:txBody>
       </p:sp>
     </p:spTree>
   </p:cSld>
   <p:clrMapOvr>
-    <a:masterClrMapping xmlns:a="http://schemas.openxmlformats.org/drawingml/2006/main"/>
+    <a:masterClrMapping/>
   </p:clrMapOvr>
 </p:notes>
 </file>
@@ -3756,19 +3750,13 @@
           <a:lstStyle xmlns:a="http://schemas.openxmlformats.org/drawingml/2006/main"/>
           <a:p xmlns:a="http://schemas.openxmlformats.org/drawingml/2006/main">
             <a:r>
-              <a:t>This video is optional and is meant for revision after class. It comes from StatQuest with Josh Starmer and is called Machine Learning Fundamentals, Cross Validation.</a:t>
+              <a:t>This optional video is for revision after class. It is a short StatQuest explanation of bias and variance, the two ways a model can go wrong. A model that is too simple misses the pattern, and a model that is too flexible chases noise.</a:t>
             </a:r>
           </a:p>
           <a:p xmlns:a="http://schemas.openxmlformats.org/drawingml/2006/main"/>
           <a:p xmlns:a="http://schemas.openxmlformats.org/drawingml/2006/main">
             <a:r>
-              <a:t>Watch the opening, up to the four minute mark. Use the link on the slide.</a:t>
-            </a:r>
-          </a:p>
-          <a:p xmlns:a="http://schemas.openxmlformats.org/drawingml/2006/main"/>
-          <a:p xmlns:a="http://schemas.openxmlformats.org/drawingml/2006/main">
-            <a:r>
-              <a:t>While you watch, keep one question in mind. Why do we evaluate a model on observations that were not used to fit that particular model? Try to answer it in your own words after the video ends.</a:t>
+              <a:t>Before you watch, hold one question in mind: what goes wrong with a model that is too simple, and with one that is too flexible? Then watch the opening four minutes and answer it in your own words. The video supports revision of the Week 10 and Week 12 ideas, and watching it is optional.</a:t>
             </a:r>
           </a:p>
         </p:txBody>
@@ -14174,6 +14162,7 @@
           </a:p>
           <a:p xmlns:a="http://schemas.openxmlformats.org/drawingml/2006/main">
             <a:r>
+              <a:rPr/>
               <a:t/>
             </a:r>
           </a:p>
@@ -14202,6 +14191,7 @@
           </a:p>
           <a:p xmlns:a="http://schemas.openxmlformats.org/drawingml/2006/main">
             <a:r>
+              <a:rPr/>
               <a:t/>
             </a:r>
           </a:p>
@@ -23269,7 +23259,7 @@
                 <a:ea typeface="Calibri"/>
                 <a:cs typeface="Calibri"/>
               </a:rPr>
-              <a:t>eligible_models: candidates satisfying both stated limits.</a:t>
+              <a:t>Run the cell and read the output below it.</a:t>
             </a:r>
           </a:p>
         </p:txBody>
@@ -24319,6 +24309,7 @@
           </a:p>
           <a:p xmlns:a="http://schemas.openxmlformats.org/drawingml/2006/main">
             <a:r>
+              <a:rPr/>
               <a:t/>
             </a:r>
           </a:p>
@@ -26279,6 +26270,7 @@
           </a:p>
           <a:p xmlns:a="http://schemas.openxmlformats.org/drawingml/2006/main">
             <a:r>
+              <a:rPr/>
               <a:t/>
             </a:r>
           </a:p>
@@ -31609,6 +31601,339 @@
 </file>
 
 <file path=ppt/slides/slide36.xml><?xml version="1.0" encoding="utf-8"?>
+<p:sld xmlns:a="http://schemas.openxmlformats.org/drawingml/2006/main" xmlns:p="http://schemas.openxmlformats.org/presentationml/2006/main" xmlns:r="http://schemas.openxmlformats.org/officeDocument/2006/relationships">
+  <p:cSld>
+    <p:spTree>
+      <p:nvGrpSpPr>
+        <p:cNvPr id="1" name=""/>
+        <p:cNvGrpSpPr/>
+        <p:nvPr/>
+      </p:nvGrpSpPr>
+      <p:grpSpPr/>
+      <p:sp>
+        <p:nvSpPr>
+          <p:cNvPr id="2" name="Rectangle 1"/>
+          <p:cNvSpPr/>
+          <p:nvPr/>
+        </p:nvSpPr>
+        <p:spPr>
+          <a:xfrm>
+            <a:off x="0" y="0"/>
+            <a:ext cx="12192000" cy="1397000"/>
+          </a:xfrm>
+          <a:prstGeom prst="rect">
+            <a:avLst/>
+          </a:prstGeom>
+          <a:solidFill>
+            <a:srgbClr val="1C3144"/>
+          </a:solidFill>
+          <a:ln>
+            <a:noFill/>
+          </a:ln>
+          <a:effectLst/>
+        </p:spPr>
+        <p:style>
+          <a:lnRef idx="1">
+            <a:schemeClr val="accent1"/>
+          </a:lnRef>
+          <a:fillRef idx="3">
+            <a:schemeClr val="accent1"/>
+          </a:fillRef>
+          <a:effectRef idx="2">
+            <a:schemeClr val="accent1"/>
+          </a:effectRef>
+          <a:fontRef idx="minor">
+            <a:schemeClr val="lt1"/>
+          </a:fontRef>
+        </p:style>
+        <p:txBody>
+          <a:bodyPr rtlCol="0" anchor="ctr"/>
+          <a:lstStyle/>
+          <a:p>
+            <a:pPr algn="ctr"/>
+          </a:p>
+        </p:txBody>
+      </p:sp>
+      <p:sp>
+        <p:nvSpPr>
+          <p:cNvPr id="3" name="TextBox 2"/>
+          <p:cNvSpPr txBox="1"/>
+          <p:nvPr/>
+        </p:nvSpPr>
+        <p:spPr>
+          <a:xfrm>
+            <a:off x="584200" y="177800"/>
+            <a:ext cx="11049000" cy="279400"/>
+          </a:xfrm>
+          <a:prstGeom prst="rect">
+            <a:avLst/>
+          </a:prstGeom>
+          <a:noFill/>
+        </p:spPr>
+        <p:txBody>
+          <a:bodyPr wrap="square">
+            <a:spAutoFit/>
+          </a:bodyPr>
+          <a:lstStyle/>
+          <a:p>
+            <a:pPr>
+              <a:spcAft>
+                <a:spcPts val="0"/>
+              </a:spcAft>
+            </a:pPr>
+            <a:r>
+              <a:rPr sz="1500" b="1">
+                <a:solidFill>
+                  <a:srgbClr val="E4572E"/>
+                </a:solidFill>
+                <a:latin typeface="Calibri"/>
+              </a:rPr>
+              <a:t>ASSESSMENT</a:t>
+            </a:r>
+          </a:p>
+        </p:txBody>
+      </p:sp>
+      <p:sp>
+        <p:nvSpPr>
+          <p:cNvPr id="4" name="TextBox 3"/>
+          <p:cNvSpPr txBox="1"/>
+          <p:nvPr/>
+        </p:nvSpPr>
+        <p:spPr>
+          <a:xfrm>
+            <a:off x="584200" y="520700"/>
+            <a:ext cx="11049000" cy="812800"/>
+          </a:xfrm>
+          <a:prstGeom prst="rect">
+            <a:avLst/>
+          </a:prstGeom>
+          <a:noFill/>
+        </p:spPr>
+        <p:txBody>
+          <a:bodyPr wrap="square">
+            <a:spAutoFit/>
+          </a:bodyPr>
+          <a:lstStyle/>
+          <a:p>
+            <a:pPr>
+              <a:spcAft>
+                <a:spcPts val="0"/>
+              </a:spcAft>
+            </a:pPr>
+            <a:r>
+              <a:rPr sz="3150" b="1">
+                <a:solidFill>
+                  <a:srgbClr val="FFFFFF"/>
+                </a:solidFill>
+                <a:latin typeface="Calibri"/>
+              </a:rPr>
+              <a:t>Block 2, part B: this week's tasks</a:t>
+            </a:r>
+          </a:p>
+        </p:txBody>
+      </p:sp>
+      <p:sp>
+        <p:nvSpPr>
+          <p:cNvPr id="5" name="Rectangle 4"/>
+          <p:cNvSpPr/>
+          <p:nvPr/>
+        </p:nvSpPr>
+        <p:spPr>
+          <a:xfrm>
+            <a:off x="584200" y="1752600"/>
+            <a:ext cx="4470400" cy="4203700"/>
+          </a:xfrm>
+          <a:prstGeom prst="rect">
+            <a:avLst/>
+          </a:prstGeom>
+          <a:solidFill>
+            <a:srgbClr val="2E7D6F"/>
+          </a:solidFill>
+          <a:ln>
+            <a:noFill/>
+          </a:ln>
+          <a:effectLst/>
+        </p:spPr>
+        <p:style>
+          <a:lnRef idx="1">
+            <a:schemeClr val="accent1"/>
+          </a:lnRef>
+          <a:fillRef idx="3">
+            <a:schemeClr val="accent1"/>
+          </a:fillRef>
+          <a:effectRef idx="2">
+            <a:schemeClr val="accent1"/>
+          </a:effectRef>
+          <a:fontRef idx="minor">
+            <a:schemeClr val="lt1"/>
+          </a:fontRef>
+        </p:style>
+        <p:txBody>
+          <a:bodyPr rtlCol="0" anchor="ctr"/>
+          <a:lstStyle/>
+          <a:p>
+            <a:pPr algn="ctr"/>
+          </a:p>
+        </p:txBody>
+      </p:sp>
+      <p:sp>
+        <p:nvSpPr>
+          <p:cNvPr id="6" name="TextBox 5"/>
+          <p:cNvSpPr txBox="1"/>
+          <p:nvPr/>
+        </p:nvSpPr>
+        <p:spPr>
+          <a:xfrm>
+            <a:off x="863600" y="2032000"/>
+            <a:ext cx="3911600" cy="3683000"/>
+          </a:xfrm>
+          <a:prstGeom prst="rect">
+            <a:avLst/>
+          </a:prstGeom>
+          <a:noFill/>
+        </p:spPr>
+        <p:txBody>
+          <a:bodyPr wrap="square">
+            <a:spAutoFit/>
+          </a:bodyPr>
+          <a:lstStyle/>
+          <a:p>
+            <a:pPr>
+              <a:spcAft>
+                <a:spcPts val="0"/>
+              </a:spcAft>
+            </a:pPr>
+            <a:r>
+              <a:rPr sz="2600" b="1">
+                <a:solidFill>
+                  <a:srgbClr val="FFFFFF"/>
+                </a:solidFill>
+                <a:latin typeface="Calibri"/>
+              </a:rPr>
+              <a:t>Part B of 2. 20 marks.</a:t>
+            </a:r>
+          </a:p>
+        </p:txBody>
+      </p:sp>
+      <p:sp>
+        <p:nvSpPr>
+          <p:cNvPr id="7" name="TextBox 6"/>
+          <p:cNvSpPr txBox="1"/>
+          <p:nvPr/>
+        </p:nvSpPr>
+        <p:spPr>
+          <a:xfrm>
+            <a:off x="5435600" y="1905000"/>
+            <a:ext cx="5969000" cy="3937000"/>
+          </a:xfrm>
+          <a:prstGeom prst="rect">
+            <a:avLst/>
+          </a:prstGeom>
+          <a:noFill/>
+        </p:spPr>
+        <p:txBody>
+          <a:bodyPr wrap="square">
+            <a:spAutoFit/>
+          </a:bodyPr>
+          <a:lstStyle/>
+          <a:p>
+            <a:pPr>
+              <a:spcAft>
+                <a:spcPts val="900"/>
+              </a:spcAft>
+            </a:pPr>
+            <a:r>
+              <a:rPr sz="2200" b="0">
+                <a:solidFill>
+                  <a:srgbClr val="1C3144"/>
+                </a:solidFill>
+                <a:latin typeface="Calibri"/>
+              </a:rPr>
+              <a:t>Today's tasks are part B of the Block 2 pack, worth 20 of its 40 marks. They use select_model and regression_errors.</a:t>
+            </a:r>
+          </a:p>
+          <a:p>
+            <a:pPr>
+              <a:spcAft>
+                <a:spcPts val="900"/>
+              </a:spcAft>
+            </a:pPr>
+            <a:r>
+              <a:rPr sz="2200" b="0">
+                <a:solidFill>
+                  <a:srgbClr val="1C3144"/>
+                </a:solidFill>
+                <a:latin typeface="Calibri"/>
+              </a:rPr>
+              <a:t>The pack closes Thursday 10 December 2026, 23:59 Kampala time.</a:t>
+            </a:r>
+          </a:p>
+          <a:p>
+            <a:pPr>
+              <a:spcAft>
+                <a:spcPts val="900"/>
+              </a:spcAft>
+            </a:pPr>
+            <a:r>
+              <a:rPr sz="2200" b="0">
+                <a:solidFill>
+                  <a:srgbClr val="1C3144"/>
+                </a:solidFill>
+                <a:latin typeface="Calibri"/>
+              </a:rPr>
+              <a:t>There is no quiz after today's class. The Block 2 quiz comes after the Week 13 class.</a:t>
+            </a:r>
+          </a:p>
+        </p:txBody>
+      </p:sp>
+      <p:sp>
+        <p:nvSpPr>
+          <p:cNvPr id="8" name="TextBox 7"/>
+          <p:cNvSpPr txBox="1"/>
+          <p:nvPr/>
+        </p:nvSpPr>
+        <p:spPr>
+          <a:xfrm>
+            <a:off x="584200" y="6524625"/>
+            <a:ext cx="10807700" cy="215900"/>
+          </a:xfrm>
+          <a:prstGeom prst="rect">
+            <a:avLst/>
+          </a:prstGeom>
+          <a:noFill/>
+        </p:spPr>
+        <p:txBody>
+          <a:bodyPr wrap="square">
+            <a:spAutoFit/>
+          </a:bodyPr>
+          <a:lstStyle/>
+          <a:p>
+            <a:pPr>
+              <a:spcAft>
+                <a:spcPts val="0"/>
+              </a:spcAft>
+            </a:pPr>
+            <a:r>
+              <a:rPr sz="1200" b="0">
+                <a:solidFill>
+                  <a:srgbClr val="6B7A8A"/>
+                </a:solidFill>
+                <a:latin typeface="Calibri"/>
+              </a:rPr>
+              <a:t>CML3113   Week 12   36</a:t>
+            </a:r>
+          </a:p>
+        </p:txBody>
+      </p:sp>
+    </p:spTree>
+  </p:cSld>
+  <p:clrMapOvr>
+    <a:masterClrMapping/>
+  </p:clrMapOvr>
+</p:sld>
+</file>
+
+<file path=ppt/slides/slide37.xml><?xml version="1.0" encoding="utf-8"?>
 <p:sld xmlns:p="http://schemas.openxmlformats.org/presentationml/2006/main">
   <p:cSld>
     <p:bg>
@@ -31814,7 +32139,7 @@
                 <a:ea typeface="Calibri"/>
                 <a:cs typeface="Calibri"/>
               </a:rPr>
-              <a:t>WHAT TO DO</a:t>
+              <a:t>BLOCK 2, PART B</a:t>
             </a:r>
           </a:p>
         </p:txBody>
@@ -33394,7 +33719,7 @@
                 <a:ea typeface="Calibri"/>
                 <a:cs typeface="Calibri"/>
               </a:rPr>
-              <a:t>CML3113   Week 12   36</a:t>
+              <a:t>CML3113   Week 12   37</a:t>
             </a:r>
           </a:p>
         </p:txBody>
@@ -33409,7 +33734,7 @@
 </p:sld>
 </file>
 
-<file path=ppt/slides/slide37.xml><?xml version="1.0" encoding="utf-8"?>
+<file path=ppt/slides/slide38.xml><?xml version="1.0" encoding="utf-8"?>
 <p:sld xmlns:p="http://schemas.openxmlformats.org/presentationml/2006/main">
   <p:cSld>
     <p:bg>
@@ -33615,7 +33940,7 @@
                 <a:ea typeface="Calibri"/>
                 <a:cs typeface="Calibri"/>
               </a:rPr>
-              <a:t>YOUR REQUIRED TASK</a:t>
+              <a:t>BLOCK 2, PART B</a:t>
             </a:r>
           </a:p>
         </p:txBody>
@@ -33970,6 +34295,7 @@
           </a:p>
           <a:p xmlns:a="http://schemas.openxmlformats.org/drawingml/2006/main">
             <a:r>
+              <a:rPr/>
               <a:t/>
             </a:r>
           </a:p>
@@ -33998,6 +34324,7 @@
           </a:p>
           <a:p xmlns:a="http://schemas.openxmlformats.org/drawingml/2006/main">
             <a:r>
+              <a:rPr/>
               <a:t/>
             </a:r>
           </a:p>
@@ -34026,6 +34353,7 @@
           </a:p>
           <a:p xmlns:a="http://schemas.openxmlformats.org/drawingml/2006/main">
             <a:r>
+              <a:rPr/>
               <a:t/>
             </a:r>
           </a:p>
@@ -34399,7 +34727,7 @@
                 <a:ea typeface="Calibri"/>
                 <a:cs typeface="Calibri"/>
               </a:rPr>
-              <a:t>CML3113   Week 12   37</a:t>
+              <a:t>CML3113   Week 12   38</a:t>
             </a:r>
           </a:p>
         </p:txBody>
@@ -34414,7 +34742,7 @@
 </p:sld>
 </file>
 
-<file path=ppt/slides/slide38.xml><?xml version="1.0" encoding="utf-8"?>
+<file path=ppt/slides/slide39.xml><?xml version="1.0" encoding="utf-8"?>
 <p:sld xmlns:p="http://schemas.openxmlformats.org/presentationml/2006/main">
   <p:cSld>
     <p:bg>
@@ -34620,7 +34948,7 @@
                 <a:ea typeface="Calibri"/>
                 <a:cs typeface="Calibri"/>
               </a:rPr>
-              <a:t>YOUR REQUIRED TASK</a:t>
+              <a:t>BLOCK 2, PART B</a:t>
             </a:r>
           </a:p>
         </p:txBody>
@@ -35320,7 +35648,7 @@
                 <a:ea typeface="Calibri"/>
                 <a:cs typeface="Calibri"/>
               </a:rPr>
-              <a:t>CML3113   Week 12   38</a:t>
+              <a:t>CML3113   Week 12   39</a:t>
             </a:r>
           </a:p>
         </p:txBody>
@@ -35329,1807 +35657,6 @@
     <p:extLst>
       <p:ext uri="{BB962C8B-B14F-4D97-AF65-F5344CB8AC3E}">
         <p14:creationId xmlns:p14="http://schemas.microsoft.com/office/powerpoint/2010/main" val="1955997395"/>
-      </p:ext>
-    </p:extLst>
-  </p:cSld>
-</p:sld>
-</file>
-
-<file path=ppt/slides/slide39.xml><?xml version="1.0" encoding="utf-8"?>
-<p:sld xmlns:p="http://schemas.openxmlformats.org/presentationml/2006/main">
-  <p:cSld>
-    <p:bg>
-      <p:bgPr>
-        <a:solidFill xmlns:a="http://schemas.openxmlformats.org/drawingml/2006/main">
-          <a:srgbClr val="FFFFFF"/>
-        </a:solidFill>
-      </p:bgPr>
-    </p:bg>
-    <p:spTree>
-      <p:nvGrpSpPr>
-        <p:cNvPr id="1" name=""/>
-        <p:cNvGrpSpPr/>
-        <p:nvPr/>
-      </p:nvGrpSpPr>
-      <p:grpSpPr>
-        <a:xfrm xmlns:a="http://schemas.openxmlformats.org/drawingml/2006/main"/>
-      </p:grpSpPr>
-      <p:sp>
-        <p:nvSpPr>
-          <p:cNvPr id="13" name="">
-            <a:extLst xmlns:a="http://schemas.openxmlformats.org/drawingml/2006/main">
-              <a:ext uri="{FF2B5EF4-FFF2-40B4-BE49-F238E27FC236}">
-                <a16:creationId xmlns:a16="http://schemas.microsoft.com/office/drawing/2014/main" id="{3CD2D650-56CF-4E61-81E1-B2BDF1CD5600}"/>
-              </a:ext>
-            </a:extLst>
-          </p:cNvPr>
-          <p:cNvSpPr>
-            <a:spLocks xmlns:a="http://schemas.openxmlformats.org/drawingml/2006/main" noGrp="1"/>
-          </p:cNvSpPr>
-          <p:nvPr/>
-        </p:nvSpPr>
-        <p:spPr>
-          <a:xfrm xmlns:a="http://schemas.openxmlformats.org/drawingml/2006/main">
-            <a:off x="0" y="0"/>
-            <a:ext cx="12191695" cy="1390650"/>
-          </a:xfrm>
-          <a:prstGeom xmlns:a="http://schemas.openxmlformats.org/drawingml/2006/main" prst="rect">
-            <a:avLst/>
-          </a:prstGeom>
-          <a:solidFill xmlns:a="http://schemas.openxmlformats.org/drawingml/2006/main">
-            <a:srgbClr val="1C3144"/>
-          </a:solidFill>
-          <a:ln xmlns:a="http://schemas.openxmlformats.org/drawingml/2006/main" w="0">
-            <a:noFill/>
-          </a:ln>
-        </p:spPr>
-        <p:txBody xmlns:a="http://schemas.openxmlformats.org/drawingml/2006/main">
-          <a:bodyPr/>
-          <a:p/>
-        </p:txBody>
-      </p:sp>
-      <p:sp>
-        <p:nvSpPr>
-          <p:cNvPr id="2" name="">
-            <a:extLst xmlns:a="http://schemas.openxmlformats.org/drawingml/2006/main">
-              <a:ext uri="{FF2B5EF4-FFF2-40B4-BE49-F238E27FC236}">
-                <a16:creationId xmlns:a16="http://schemas.microsoft.com/office/drawing/2014/main" id="{A0DAE063-73E5-43B9-B150-62CC79E642D3}"/>
-              </a:ext>
-            </a:extLst>
-          </p:cNvPr>
-          <p:cNvSpPr>
-            <a:spLocks xmlns:a="http://schemas.openxmlformats.org/drawingml/2006/main" noGrp="1"/>
-          </p:cNvSpPr>
-          <p:nvPr/>
-        </p:nvSpPr>
-        <p:spPr>
-          <a:xfrm xmlns:a="http://schemas.openxmlformats.org/drawingml/2006/main">
-            <a:off x="590550" y="180975"/>
-            <a:ext cx="11049000" cy="285750"/>
-          </a:xfrm>
-          <a:prstGeom xmlns:a="http://schemas.openxmlformats.org/drawingml/2006/main" prst="rect">
-            <a:avLst/>
-          </a:prstGeom>
-          <a:noFill xmlns:a="http://schemas.openxmlformats.org/drawingml/2006/main"/>
-          <a:ln xmlns:a="http://schemas.openxmlformats.org/drawingml/2006/main" w="0">
-            <a:noFill/>
-          </a:ln>
-        </p:spPr>
-        <p:txBody>
-          <a:bodyPr xmlns:a="http://schemas.openxmlformats.org/drawingml/2006/main">
-            <a:noAutofit/>
-          </a:bodyPr>
-          <a:lstStyle xmlns:a="http://schemas.openxmlformats.org/drawingml/2006/main">
-            <a:defPPr>
-              <a:defRPr sz="1500" b="1">
-                <a:solidFill>
-                  <a:srgbClr val="E4572E"/>
-                </a:solidFill>
-                <a:latin typeface="Calibri"/>
-                <a:ea typeface="Calibri"/>
-                <a:cs typeface="Calibri"/>
-              </a:defRPr>
-            </a:defPPr>
-            <a:lvl1pPr>
-              <a:defRPr sz="1500" b="1">
-                <a:solidFill>
-                  <a:srgbClr val="E4572E"/>
-                </a:solidFill>
-                <a:latin typeface="Calibri"/>
-                <a:ea typeface="Calibri"/>
-                <a:cs typeface="Calibri"/>
-              </a:defRPr>
-            </a:lvl1pPr>
-            <a:lvl2pPr>
-              <a:defRPr sz="1500" b="1">
-                <a:solidFill>
-                  <a:srgbClr val="E4572E"/>
-                </a:solidFill>
-                <a:latin typeface="Calibri"/>
-                <a:ea typeface="Calibri"/>
-                <a:cs typeface="Calibri"/>
-              </a:defRPr>
-            </a:lvl2pPr>
-            <a:lvl3pPr>
-              <a:defRPr sz="1500" b="1">
-                <a:solidFill>
-                  <a:srgbClr val="E4572E"/>
-                </a:solidFill>
-                <a:latin typeface="Calibri"/>
-                <a:ea typeface="Calibri"/>
-                <a:cs typeface="Calibri"/>
-              </a:defRPr>
-            </a:lvl3pPr>
-            <a:lvl4pPr>
-              <a:defRPr sz="1500" b="1">
-                <a:solidFill>
-                  <a:srgbClr val="E4572E"/>
-                </a:solidFill>
-                <a:latin typeface="Calibri"/>
-                <a:ea typeface="Calibri"/>
-                <a:cs typeface="Calibri"/>
-              </a:defRPr>
-            </a:lvl4pPr>
-            <a:lvl5pPr>
-              <a:defRPr sz="1500" b="1">
-                <a:solidFill>
-                  <a:srgbClr val="E4572E"/>
-                </a:solidFill>
-                <a:latin typeface="Calibri"/>
-                <a:ea typeface="Calibri"/>
-                <a:cs typeface="Calibri"/>
-              </a:defRPr>
-            </a:lvl5pPr>
-            <a:lvl6pPr>
-              <a:defRPr sz="1500" b="1">
-                <a:solidFill>
-                  <a:srgbClr val="E4572E"/>
-                </a:solidFill>
-                <a:latin typeface="Calibri"/>
-                <a:ea typeface="Calibri"/>
-                <a:cs typeface="Calibri"/>
-              </a:defRPr>
-            </a:lvl6pPr>
-            <a:lvl7pPr>
-              <a:defRPr sz="1500" b="1">
-                <a:solidFill>
-                  <a:srgbClr val="E4572E"/>
-                </a:solidFill>
-                <a:latin typeface="Calibri"/>
-                <a:ea typeface="Calibri"/>
-                <a:cs typeface="Calibri"/>
-              </a:defRPr>
-            </a:lvl7pPr>
-            <a:lvl8pPr>
-              <a:defRPr sz="1500" b="1">
-                <a:solidFill>
-                  <a:srgbClr val="E4572E"/>
-                </a:solidFill>
-                <a:latin typeface="Calibri"/>
-                <a:ea typeface="Calibri"/>
-                <a:cs typeface="Calibri"/>
-              </a:defRPr>
-            </a:lvl8pPr>
-            <a:lvl9pPr>
-              <a:defRPr sz="1500" b="1">
-                <a:solidFill>
-                  <a:srgbClr val="E4572E"/>
-                </a:solidFill>
-                <a:latin typeface="Calibri"/>
-                <a:ea typeface="Calibri"/>
-                <a:cs typeface="Calibri"/>
-              </a:defRPr>
-            </a:lvl9pPr>
-          </a:lstStyle>
-          <a:p xmlns:a="http://schemas.openxmlformats.org/drawingml/2006/main">
-            <a:pPr>
-              <a:defRPr sz="1500" b="1">
-                <a:solidFill>
-                  <a:srgbClr val="E4572E"/>
-                </a:solidFill>
-                <a:latin typeface="Calibri"/>
-                <a:ea typeface="Calibri"/>
-                <a:cs typeface="Calibri"/>
-              </a:defRPr>
-            </a:pPr>
-            <a:r>
-              <a:rPr sz="1500" b="1">
-                <a:solidFill>
-                  <a:srgbClr val="E4572E"/>
-                </a:solidFill>
-                <a:latin typeface="Calibri"/>
-                <a:ea typeface="Calibri"/>
-                <a:cs typeface="Calibri"/>
-              </a:rPr>
-              <a:t>WHAT TO DO</a:t>
-            </a:r>
-          </a:p>
-        </p:txBody>
-      </p:sp>
-      <p:sp>
-        <p:nvSpPr>
-          <p:cNvPr id="3" name="">
-            <a:extLst xmlns:a="http://schemas.openxmlformats.org/drawingml/2006/main">
-              <a:ext uri="{FF2B5EF4-FFF2-40B4-BE49-F238E27FC236}">
-                <a16:creationId xmlns:a16="http://schemas.microsoft.com/office/drawing/2014/main" id="{1C2168A9-5142-42CC-83DA-5BBC0E6610E3}"/>
-              </a:ext>
-            </a:extLst>
-          </p:cNvPr>
-          <p:cNvSpPr>
-            <a:spLocks xmlns:a="http://schemas.openxmlformats.org/drawingml/2006/main" noGrp="1"/>
-          </p:cNvSpPr>
-          <p:nvPr/>
-        </p:nvSpPr>
-        <p:spPr>
-          <a:xfrm xmlns:a="http://schemas.openxmlformats.org/drawingml/2006/main">
-            <a:off x="590550" y="523875"/>
-            <a:ext cx="11049000" cy="809625"/>
-          </a:xfrm>
-          <a:prstGeom xmlns:a="http://schemas.openxmlformats.org/drawingml/2006/main" prst="rect">
-            <a:avLst/>
-          </a:prstGeom>
-          <a:noFill xmlns:a="http://schemas.openxmlformats.org/drawingml/2006/main"/>
-          <a:ln xmlns:a="http://schemas.openxmlformats.org/drawingml/2006/main" w="0">
-            <a:noFill/>
-          </a:ln>
-        </p:spPr>
-        <p:txBody>
-          <a:bodyPr xmlns:a="http://schemas.openxmlformats.org/drawingml/2006/main">
-            <a:noAutofit/>
-          </a:bodyPr>
-          <a:lstStyle xmlns:a="http://schemas.openxmlformats.org/drawingml/2006/main">
-            <a:defPPr>
-              <a:defRPr sz="3150" b="1">
-                <a:solidFill>
-                  <a:srgbClr val="FFFFFF"/>
-                </a:solidFill>
-                <a:latin typeface="Calibri"/>
-                <a:ea typeface="Calibri"/>
-                <a:cs typeface="Calibri"/>
-              </a:defRPr>
-            </a:defPPr>
-            <a:lvl1pPr>
-              <a:defRPr sz="3150" b="1">
-                <a:solidFill>
-                  <a:srgbClr val="FFFFFF"/>
-                </a:solidFill>
-                <a:latin typeface="Calibri"/>
-                <a:ea typeface="Calibri"/>
-                <a:cs typeface="Calibri"/>
-              </a:defRPr>
-            </a:lvl1pPr>
-            <a:lvl2pPr>
-              <a:defRPr sz="3150" b="1">
-                <a:solidFill>
-                  <a:srgbClr val="FFFFFF"/>
-                </a:solidFill>
-                <a:latin typeface="Calibri"/>
-                <a:ea typeface="Calibri"/>
-                <a:cs typeface="Calibri"/>
-              </a:defRPr>
-            </a:lvl2pPr>
-            <a:lvl3pPr>
-              <a:defRPr sz="3150" b="1">
-                <a:solidFill>
-                  <a:srgbClr val="FFFFFF"/>
-                </a:solidFill>
-                <a:latin typeface="Calibri"/>
-                <a:ea typeface="Calibri"/>
-                <a:cs typeface="Calibri"/>
-              </a:defRPr>
-            </a:lvl3pPr>
-            <a:lvl4pPr>
-              <a:defRPr sz="3150" b="1">
-                <a:solidFill>
-                  <a:srgbClr val="FFFFFF"/>
-                </a:solidFill>
-                <a:latin typeface="Calibri"/>
-                <a:ea typeface="Calibri"/>
-                <a:cs typeface="Calibri"/>
-              </a:defRPr>
-            </a:lvl4pPr>
-            <a:lvl5pPr>
-              <a:defRPr sz="3150" b="1">
-                <a:solidFill>
-                  <a:srgbClr val="FFFFFF"/>
-                </a:solidFill>
-                <a:latin typeface="Calibri"/>
-                <a:ea typeface="Calibri"/>
-                <a:cs typeface="Calibri"/>
-              </a:defRPr>
-            </a:lvl5pPr>
-            <a:lvl6pPr>
-              <a:defRPr sz="3150" b="1">
-                <a:solidFill>
-                  <a:srgbClr val="FFFFFF"/>
-                </a:solidFill>
-                <a:latin typeface="Calibri"/>
-                <a:ea typeface="Calibri"/>
-                <a:cs typeface="Calibri"/>
-              </a:defRPr>
-            </a:lvl6pPr>
-            <a:lvl7pPr>
-              <a:defRPr sz="3150" b="1">
-                <a:solidFill>
-                  <a:srgbClr val="FFFFFF"/>
-                </a:solidFill>
-                <a:latin typeface="Calibri"/>
-                <a:ea typeface="Calibri"/>
-                <a:cs typeface="Calibri"/>
-              </a:defRPr>
-            </a:lvl7pPr>
-            <a:lvl8pPr>
-              <a:defRPr sz="3150" b="1">
-                <a:solidFill>
-                  <a:srgbClr val="FFFFFF"/>
-                </a:solidFill>
-                <a:latin typeface="Calibri"/>
-                <a:ea typeface="Calibri"/>
-                <a:cs typeface="Calibri"/>
-              </a:defRPr>
-            </a:lvl8pPr>
-            <a:lvl9pPr>
-              <a:defRPr sz="3150" b="1">
-                <a:solidFill>
-                  <a:srgbClr val="FFFFFF"/>
-                </a:solidFill>
-                <a:latin typeface="Calibri"/>
-                <a:ea typeface="Calibri"/>
-                <a:cs typeface="Calibri"/>
-              </a:defRPr>
-            </a:lvl9pPr>
-          </a:lstStyle>
-          <a:p xmlns:a="http://schemas.openxmlformats.org/drawingml/2006/main">
-            <a:pPr>
-              <a:defRPr sz="3150" b="1">
-                <a:solidFill>
-                  <a:srgbClr val="FFFFFF"/>
-                </a:solidFill>
-                <a:latin typeface="Calibri"/>
-                <a:ea typeface="Calibri"/>
-                <a:cs typeface="Calibri"/>
-              </a:defRPr>
-            </a:pPr>
-            <a:r>
-              <a:rPr sz="3150" b="1">
-                <a:solidFill>
-                  <a:srgbClr val="FFFFFF"/>
-                </a:solidFill>
-                <a:latin typeface="Calibri"/>
-                <a:ea typeface="Calibri"/>
-                <a:cs typeface="Calibri"/>
-              </a:rPr>
-              <a:t>Written evidence</a:t>
-            </a:r>
-          </a:p>
-        </p:txBody>
-      </p:sp>
-      <p:sp>
-        <p:nvSpPr>
-          <p:cNvPr id="4" name="">
-            <a:extLst xmlns:a="http://schemas.openxmlformats.org/drawingml/2006/main">
-              <a:ext uri="{FF2B5EF4-FFF2-40B4-BE49-F238E27FC236}">
-                <a16:creationId xmlns:a16="http://schemas.microsoft.com/office/drawing/2014/main" id="{D39E5032-C017-48CC-84CB-E88601B4593E}"/>
-              </a:ext>
-            </a:extLst>
-          </p:cNvPr>
-          <p:cNvSpPr>
-            <a:spLocks xmlns:a="http://schemas.openxmlformats.org/drawingml/2006/main" noGrp="1"/>
-          </p:cNvSpPr>
-          <p:nvPr/>
-        </p:nvSpPr>
-        <p:spPr>
-          <a:xfrm xmlns:a="http://schemas.openxmlformats.org/drawingml/2006/main">
-            <a:off x="590550" y="1781175"/>
-            <a:ext cx="619125" cy="571500"/>
-          </a:xfrm>
-          <a:prstGeom xmlns:a="http://schemas.openxmlformats.org/drawingml/2006/main" prst="rect">
-            <a:avLst/>
-          </a:prstGeom>
-          <a:noFill xmlns:a="http://schemas.openxmlformats.org/drawingml/2006/main"/>
-          <a:ln xmlns:a="http://schemas.openxmlformats.org/drawingml/2006/main" w="0">
-            <a:noFill/>
-          </a:ln>
-        </p:spPr>
-        <p:txBody>
-          <a:bodyPr xmlns:a="http://schemas.openxmlformats.org/drawingml/2006/main">
-            <a:noAutofit/>
-          </a:bodyPr>
-          <a:lstStyle xmlns:a="http://schemas.openxmlformats.org/drawingml/2006/main">
-            <a:defPPr>
-              <a:defRPr sz="2550" b="1">
-                <a:solidFill>
-                  <a:srgbClr val="E4572E"/>
-                </a:solidFill>
-                <a:latin typeface="Calibri"/>
-                <a:ea typeface="Calibri"/>
-                <a:cs typeface="Calibri"/>
-              </a:defRPr>
-            </a:defPPr>
-            <a:lvl1pPr>
-              <a:defRPr sz="2550" b="1">
-                <a:solidFill>
-                  <a:srgbClr val="E4572E"/>
-                </a:solidFill>
-                <a:latin typeface="Calibri"/>
-                <a:ea typeface="Calibri"/>
-                <a:cs typeface="Calibri"/>
-              </a:defRPr>
-            </a:lvl1pPr>
-            <a:lvl2pPr>
-              <a:defRPr sz="2550" b="1">
-                <a:solidFill>
-                  <a:srgbClr val="E4572E"/>
-                </a:solidFill>
-                <a:latin typeface="Calibri"/>
-                <a:ea typeface="Calibri"/>
-                <a:cs typeface="Calibri"/>
-              </a:defRPr>
-            </a:lvl2pPr>
-            <a:lvl3pPr>
-              <a:defRPr sz="2550" b="1">
-                <a:solidFill>
-                  <a:srgbClr val="E4572E"/>
-                </a:solidFill>
-                <a:latin typeface="Calibri"/>
-                <a:ea typeface="Calibri"/>
-                <a:cs typeface="Calibri"/>
-              </a:defRPr>
-            </a:lvl3pPr>
-            <a:lvl4pPr>
-              <a:defRPr sz="2550" b="1">
-                <a:solidFill>
-                  <a:srgbClr val="E4572E"/>
-                </a:solidFill>
-                <a:latin typeface="Calibri"/>
-                <a:ea typeface="Calibri"/>
-                <a:cs typeface="Calibri"/>
-              </a:defRPr>
-            </a:lvl4pPr>
-            <a:lvl5pPr>
-              <a:defRPr sz="2550" b="1">
-                <a:solidFill>
-                  <a:srgbClr val="E4572E"/>
-                </a:solidFill>
-                <a:latin typeface="Calibri"/>
-                <a:ea typeface="Calibri"/>
-                <a:cs typeface="Calibri"/>
-              </a:defRPr>
-            </a:lvl5pPr>
-            <a:lvl6pPr>
-              <a:defRPr sz="2550" b="1">
-                <a:solidFill>
-                  <a:srgbClr val="E4572E"/>
-                </a:solidFill>
-                <a:latin typeface="Calibri"/>
-                <a:ea typeface="Calibri"/>
-                <a:cs typeface="Calibri"/>
-              </a:defRPr>
-            </a:lvl6pPr>
-            <a:lvl7pPr>
-              <a:defRPr sz="2550" b="1">
-                <a:solidFill>
-                  <a:srgbClr val="E4572E"/>
-                </a:solidFill>
-                <a:latin typeface="Calibri"/>
-                <a:ea typeface="Calibri"/>
-                <a:cs typeface="Calibri"/>
-              </a:defRPr>
-            </a:lvl7pPr>
-            <a:lvl8pPr>
-              <a:defRPr sz="2550" b="1">
-                <a:solidFill>
-                  <a:srgbClr val="E4572E"/>
-                </a:solidFill>
-                <a:latin typeface="Calibri"/>
-                <a:ea typeface="Calibri"/>
-                <a:cs typeface="Calibri"/>
-              </a:defRPr>
-            </a:lvl8pPr>
-            <a:lvl9pPr>
-              <a:defRPr sz="2550" b="1">
-                <a:solidFill>
-                  <a:srgbClr val="E4572E"/>
-                </a:solidFill>
-                <a:latin typeface="Calibri"/>
-                <a:ea typeface="Calibri"/>
-                <a:cs typeface="Calibri"/>
-              </a:defRPr>
-            </a:lvl9pPr>
-          </a:lstStyle>
-          <a:p xmlns:a="http://schemas.openxmlformats.org/drawingml/2006/main">
-            <a:pPr>
-              <a:defRPr sz="2550" b="1">
-                <a:solidFill>
-                  <a:srgbClr val="E4572E"/>
-                </a:solidFill>
-                <a:latin typeface="Calibri"/>
-                <a:ea typeface="Calibri"/>
-                <a:cs typeface="Calibri"/>
-              </a:defRPr>
-            </a:pPr>
-            <a:r>
-              <a:rPr sz="2550" b="1">
-                <a:solidFill>
-                  <a:srgbClr val="E4572E"/>
-                </a:solidFill>
-                <a:latin typeface="Calibri"/>
-                <a:ea typeface="Calibri"/>
-                <a:cs typeface="Calibri"/>
-              </a:rPr>
-              <a:t>01</a:t>
-            </a:r>
-          </a:p>
-        </p:txBody>
-      </p:sp>
-      <p:sp>
-        <p:nvSpPr>
-          <p:cNvPr id="5" name="">
-            <a:extLst xmlns:a="http://schemas.openxmlformats.org/drawingml/2006/main">
-              <a:ext uri="{FF2B5EF4-FFF2-40B4-BE49-F238E27FC236}">
-                <a16:creationId xmlns:a16="http://schemas.microsoft.com/office/drawing/2014/main" id="{A0CC917D-B04B-4E13-A7F5-3F1744E4BC10}"/>
-              </a:ext>
-            </a:extLst>
-          </p:cNvPr>
-          <p:cNvSpPr>
-            <a:spLocks xmlns:a="http://schemas.openxmlformats.org/drawingml/2006/main" noGrp="1"/>
-          </p:cNvSpPr>
-          <p:nvPr/>
-        </p:nvSpPr>
-        <p:spPr>
-          <a:xfrm xmlns:a="http://schemas.openxmlformats.org/drawingml/2006/main">
-            <a:off x="1381125" y="1781175"/>
-            <a:ext cx="10096500" cy="992981"/>
-          </a:xfrm>
-          <a:prstGeom xmlns:a="http://schemas.openxmlformats.org/drawingml/2006/main" prst="rect">
-            <a:avLst/>
-          </a:prstGeom>
-          <a:noFill xmlns:a="http://schemas.openxmlformats.org/drawingml/2006/main"/>
-          <a:ln xmlns:a="http://schemas.openxmlformats.org/drawingml/2006/main" w="0">
-            <a:noFill/>
-          </a:ln>
-        </p:spPr>
-        <p:txBody>
-          <a:bodyPr xmlns:a="http://schemas.openxmlformats.org/drawingml/2006/main">
-            <a:noAutofit/>
-          </a:bodyPr>
-          <a:lstStyle xmlns:a="http://schemas.openxmlformats.org/drawingml/2006/main">
-            <a:defPPr>
-              <a:defRPr sz="2250" b="0">
-                <a:solidFill>
-                  <a:srgbClr val="1C3144"/>
-                </a:solidFill>
-                <a:latin typeface="Calibri"/>
-                <a:ea typeface="Calibri"/>
-                <a:cs typeface="Calibri"/>
-              </a:defRPr>
-            </a:defPPr>
-            <a:lvl1pPr>
-              <a:defRPr sz="2250" b="0">
-                <a:solidFill>
-                  <a:srgbClr val="1C3144"/>
-                </a:solidFill>
-                <a:latin typeface="Calibri"/>
-                <a:ea typeface="Calibri"/>
-                <a:cs typeface="Calibri"/>
-              </a:defRPr>
-            </a:lvl1pPr>
-            <a:lvl2pPr>
-              <a:defRPr sz="2250" b="0">
-                <a:solidFill>
-                  <a:srgbClr val="1C3144"/>
-                </a:solidFill>
-                <a:latin typeface="Calibri"/>
-                <a:ea typeface="Calibri"/>
-                <a:cs typeface="Calibri"/>
-              </a:defRPr>
-            </a:lvl2pPr>
-            <a:lvl3pPr>
-              <a:defRPr sz="2250" b="0">
-                <a:solidFill>
-                  <a:srgbClr val="1C3144"/>
-                </a:solidFill>
-                <a:latin typeface="Calibri"/>
-                <a:ea typeface="Calibri"/>
-                <a:cs typeface="Calibri"/>
-              </a:defRPr>
-            </a:lvl3pPr>
-            <a:lvl4pPr>
-              <a:defRPr sz="2250" b="0">
-                <a:solidFill>
-                  <a:srgbClr val="1C3144"/>
-                </a:solidFill>
-                <a:latin typeface="Calibri"/>
-                <a:ea typeface="Calibri"/>
-                <a:cs typeface="Calibri"/>
-              </a:defRPr>
-            </a:lvl4pPr>
-            <a:lvl5pPr>
-              <a:defRPr sz="2250" b="0">
-                <a:solidFill>
-                  <a:srgbClr val="1C3144"/>
-                </a:solidFill>
-                <a:latin typeface="Calibri"/>
-                <a:ea typeface="Calibri"/>
-                <a:cs typeface="Calibri"/>
-              </a:defRPr>
-            </a:lvl5pPr>
-            <a:lvl6pPr>
-              <a:defRPr sz="2250" b="0">
-                <a:solidFill>
-                  <a:srgbClr val="1C3144"/>
-                </a:solidFill>
-                <a:latin typeface="Calibri"/>
-                <a:ea typeface="Calibri"/>
-                <a:cs typeface="Calibri"/>
-              </a:defRPr>
-            </a:lvl6pPr>
-            <a:lvl7pPr>
-              <a:defRPr sz="2250" b="0">
-                <a:solidFill>
-                  <a:srgbClr val="1C3144"/>
-                </a:solidFill>
-                <a:latin typeface="Calibri"/>
-                <a:ea typeface="Calibri"/>
-                <a:cs typeface="Calibri"/>
-              </a:defRPr>
-            </a:lvl7pPr>
-            <a:lvl8pPr>
-              <a:defRPr sz="2250" b="0">
-                <a:solidFill>
-                  <a:srgbClr val="1C3144"/>
-                </a:solidFill>
-                <a:latin typeface="Calibri"/>
-                <a:ea typeface="Calibri"/>
-                <a:cs typeface="Calibri"/>
-              </a:defRPr>
-            </a:lvl8pPr>
-            <a:lvl9pPr>
-              <a:defRPr sz="2250" b="0">
-                <a:solidFill>
-                  <a:srgbClr val="1C3144"/>
-                </a:solidFill>
-                <a:latin typeface="Calibri"/>
-                <a:ea typeface="Calibri"/>
-                <a:cs typeface="Calibri"/>
-              </a:defRPr>
-            </a:lvl9pPr>
-          </a:lstStyle>
-          <a:p xmlns:a="http://schemas.openxmlformats.org/drawingml/2006/main">
-            <a:pPr>
-              <a:defRPr sz="2250" b="0">
-                <a:solidFill>
-                  <a:srgbClr val="1C3144"/>
-                </a:solidFill>
-                <a:latin typeface="Calibri"/>
-                <a:ea typeface="Calibri"/>
-                <a:cs typeface="Calibri"/>
-              </a:defRPr>
-            </a:pPr>
-            <a:r>
-              <a:rPr sz="2250" b="0">
-                <a:solidFill>
-                  <a:srgbClr val="1C3144"/>
-                </a:solidFill>
-                <a:latin typeface="Calibri"/>
-                <a:ea typeface="Calibri"/>
-                <a:cs typeface="Calibri"/>
-              </a:rPr>
-              <a:t>Use the cell headed “My written evidence”.</a:t>
-            </a:r>
-          </a:p>
-        </p:txBody>
-      </p:sp>
-      <p:sp>
-        <p:nvSpPr>
-          <p:cNvPr id="6" name="">
-            <a:extLst xmlns:a="http://schemas.openxmlformats.org/drawingml/2006/main">
-              <a:ext uri="{FF2B5EF4-FFF2-40B4-BE49-F238E27FC236}">
-                <a16:creationId xmlns:a16="http://schemas.microsoft.com/office/drawing/2014/main" id="{3A9110C9-B024-4B92-8BEA-F34ED2FF0657}"/>
-              </a:ext>
-            </a:extLst>
-          </p:cNvPr>
-          <p:cNvSpPr>
-            <a:spLocks xmlns:a="http://schemas.openxmlformats.org/drawingml/2006/main" noGrp="1"/>
-          </p:cNvSpPr>
-          <p:nvPr/>
-        </p:nvSpPr>
-        <p:spPr>
-          <a:xfrm xmlns:a="http://schemas.openxmlformats.org/drawingml/2006/main">
-            <a:off x="590550" y="2850356"/>
-            <a:ext cx="619125" cy="571500"/>
-          </a:xfrm>
-          <a:prstGeom xmlns:a="http://schemas.openxmlformats.org/drawingml/2006/main" prst="rect">
-            <a:avLst/>
-          </a:prstGeom>
-          <a:noFill xmlns:a="http://schemas.openxmlformats.org/drawingml/2006/main"/>
-          <a:ln xmlns:a="http://schemas.openxmlformats.org/drawingml/2006/main" w="0">
-            <a:noFill/>
-          </a:ln>
-        </p:spPr>
-        <p:txBody>
-          <a:bodyPr xmlns:a="http://schemas.openxmlformats.org/drawingml/2006/main">
-            <a:noAutofit/>
-          </a:bodyPr>
-          <a:lstStyle xmlns:a="http://schemas.openxmlformats.org/drawingml/2006/main">
-            <a:defPPr>
-              <a:defRPr sz="2550" b="1">
-                <a:solidFill>
-                  <a:srgbClr val="E4572E"/>
-                </a:solidFill>
-                <a:latin typeface="Calibri"/>
-                <a:ea typeface="Calibri"/>
-                <a:cs typeface="Calibri"/>
-              </a:defRPr>
-            </a:defPPr>
-            <a:lvl1pPr>
-              <a:defRPr sz="2550" b="1">
-                <a:solidFill>
-                  <a:srgbClr val="E4572E"/>
-                </a:solidFill>
-                <a:latin typeface="Calibri"/>
-                <a:ea typeface="Calibri"/>
-                <a:cs typeface="Calibri"/>
-              </a:defRPr>
-            </a:lvl1pPr>
-            <a:lvl2pPr>
-              <a:defRPr sz="2550" b="1">
-                <a:solidFill>
-                  <a:srgbClr val="E4572E"/>
-                </a:solidFill>
-                <a:latin typeface="Calibri"/>
-                <a:ea typeface="Calibri"/>
-                <a:cs typeface="Calibri"/>
-              </a:defRPr>
-            </a:lvl2pPr>
-            <a:lvl3pPr>
-              <a:defRPr sz="2550" b="1">
-                <a:solidFill>
-                  <a:srgbClr val="E4572E"/>
-                </a:solidFill>
-                <a:latin typeface="Calibri"/>
-                <a:ea typeface="Calibri"/>
-                <a:cs typeface="Calibri"/>
-              </a:defRPr>
-            </a:lvl3pPr>
-            <a:lvl4pPr>
-              <a:defRPr sz="2550" b="1">
-                <a:solidFill>
-                  <a:srgbClr val="E4572E"/>
-                </a:solidFill>
-                <a:latin typeface="Calibri"/>
-                <a:ea typeface="Calibri"/>
-                <a:cs typeface="Calibri"/>
-              </a:defRPr>
-            </a:lvl4pPr>
-            <a:lvl5pPr>
-              <a:defRPr sz="2550" b="1">
-                <a:solidFill>
-                  <a:srgbClr val="E4572E"/>
-                </a:solidFill>
-                <a:latin typeface="Calibri"/>
-                <a:ea typeface="Calibri"/>
-                <a:cs typeface="Calibri"/>
-              </a:defRPr>
-            </a:lvl5pPr>
-            <a:lvl6pPr>
-              <a:defRPr sz="2550" b="1">
-                <a:solidFill>
-                  <a:srgbClr val="E4572E"/>
-                </a:solidFill>
-                <a:latin typeface="Calibri"/>
-                <a:ea typeface="Calibri"/>
-                <a:cs typeface="Calibri"/>
-              </a:defRPr>
-            </a:lvl6pPr>
-            <a:lvl7pPr>
-              <a:defRPr sz="2550" b="1">
-                <a:solidFill>
-                  <a:srgbClr val="E4572E"/>
-                </a:solidFill>
-                <a:latin typeface="Calibri"/>
-                <a:ea typeface="Calibri"/>
-                <a:cs typeface="Calibri"/>
-              </a:defRPr>
-            </a:lvl7pPr>
-            <a:lvl8pPr>
-              <a:defRPr sz="2550" b="1">
-                <a:solidFill>
-                  <a:srgbClr val="E4572E"/>
-                </a:solidFill>
-                <a:latin typeface="Calibri"/>
-                <a:ea typeface="Calibri"/>
-                <a:cs typeface="Calibri"/>
-              </a:defRPr>
-            </a:lvl8pPr>
-            <a:lvl9pPr>
-              <a:defRPr sz="2550" b="1">
-                <a:solidFill>
-                  <a:srgbClr val="E4572E"/>
-                </a:solidFill>
-                <a:latin typeface="Calibri"/>
-                <a:ea typeface="Calibri"/>
-                <a:cs typeface="Calibri"/>
-              </a:defRPr>
-            </a:lvl9pPr>
-          </a:lstStyle>
-          <a:p xmlns:a="http://schemas.openxmlformats.org/drawingml/2006/main">
-            <a:pPr>
-              <a:defRPr sz="2550" b="1">
-                <a:solidFill>
-                  <a:srgbClr val="E4572E"/>
-                </a:solidFill>
-                <a:latin typeface="Calibri"/>
-                <a:ea typeface="Calibri"/>
-                <a:cs typeface="Calibri"/>
-              </a:defRPr>
-            </a:pPr>
-            <a:r>
-              <a:rPr sz="2550" b="1">
-                <a:solidFill>
-                  <a:srgbClr val="E4572E"/>
-                </a:solidFill>
-                <a:latin typeface="Calibri"/>
-                <a:ea typeface="Calibri"/>
-                <a:cs typeface="Calibri"/>
-              </a:rPr>
-              <a:t>02</a:t>
-            </a:r>
-          </a:p>
-        </p:txBody>
-      </p:sp>
-      <p:sp>
-        <p:nvSpPr>
-          <p:cNvPr id="7" name="">
-            <a:extLst xmlns:a="http://schemas.openxmlformats.org/drawingml/2006/main">
-              <a:ext uri="{FF2B5EF4-FFF2-40B4-BE49-F238E27FC236}">
-                <a16:creationId xmlns:a16="http://schemas.microsoft.com/office/drawing/2014/main" id="{249585C6-5793-415A-BC36-C01AF92E8F0E}"/>
-              </a:ext>
-            </a:extLst>
-          </p:cNvPr>
-          <p:cNvSpPr>
-            <a:spLocks xmlns:a="http://schemas.openxmlformats.org/drawingml/2006/main" noGrp="1"/>
-          </p:cNvSpPr>
-          <p:nvPr/>
-        </p:nvSpPr>
-        <p:spPr>
-          <a:xfrm xmlns:a="http://schemas.openxmlformats.org/drawingml/2006/main">
-            <a:off x="1381125" y="2850356"/>
-            <a:ext cx="10096500" cy="992981"/>
-          </a:xfrm>
-          <a:prstGeom xmlns:a="http://schemas.openxmlformats.org/drawingml/2006/main" prst="rect">
-            <a:avLst/>
-          </a:prstGeom>
-          <a:noFill xmlns:a="http://schemas.openxmlformats.org/drawingml/2006/main"/>
-          <a:ln xmlns:a="http://schemas.openxmlformats.org/drawingml/2006/main" w="0">
-            <a:noFill/>
-          </a:ln>
-        </p:spPr>
-        <p:txBody>
-          <a:bodyPr xmlns:a="http://schemas.openxmlformats.org/drawingml/2006/main">
-            <a:noAutofit/>
-          </a:bodyPr>
-          <a:lstStyle xmlns:a="http://schemas.openxmlformats.org/drawingml/2006/main">
-            <a:defPPr>
-              <a:defRPr sz="2250" b="0">
-                <a:solidFill>
-                  <a:srgbClr val="1C3144"/>
-                </a:solidFill>
-                <a:latin typeface="Calibri"/>
-                <a:ea typeface="Calibri"/>
-                <a:cs typeface="Calibri"/>
-              </a:defRPr>
-            </a:defPPr>
-            <a:lvl1pPr>
-              <a:defRPr sz="2250" b="0">
-                <a:solidFill>
-                  <a:srgbClr val="1C3144"/>
-                </a:solidFill>
-                <a:latin typeface="Calibri"/>
-                <a:ea typeface="Calibri"/>
-                <a:cs typeface="Calibri"/>
-              </a:defRPr>
-            </a:lvl1pPr>
-            <a:lvl2pPr>
-              <a:defRPr sz="2250" b="0">
-                <a:solidFill>
-                  <a:srgbClr val="1C3144"/>
-                </a:solidFill>
-                <a:latin typeface="Calibri"/>
-                <a:ea typeface="Calibri"/>
-                <a:cs typeface="Calibri"/>
-              </a:defRPr>
-            </a:lvl2pPr>
-            <a:lvl3pPr>
-              <a:defRPr sz="2250" b="0">
-                <a:solidFill>
-                  <a:srgbClr val="1C3144"/>
-                </a:solidFill>
-                <a:latin typeface="Calibri"/>
-                <a:ea typeface="Calibri"/>
-                <a:cs typeface="Calibri"/>
-              </a:defRPr>
-            </a:lvl3pPr>
-            <a:lvl4pPr>
-              <a:defRPr sz="2250" b="0">
-                <a:solidFill>
-                  <a:srgbClr val="1C3144"/>
-                </a:solidFill>
-                <a:latin typeface="Calibri"/>
-                <a:ea typeface="Calibri"/>
-                <a:cs typeface="Calibri"/>
-              </a:defRPr>
-            </a:lvl4pPr>
-            <a:lvl5pPr>
-              <a:defRPr sz="2250" b="0">
-                <a:solidFill>
-                  <a:srgbClr val="1C3144"/>
-                </a:solidFill>
-                <a:latin typeface="Calibri"/>
-                <a:ea typeface="Calibri"/>
-                <a:cs typeface="Calibri"/>
-              </a:defRPr>
-            </a:lvl5pPr>
-            <a:lvl6pPr>
-              <a:defRPr sz="2250" b="0">
-                <a:solidFill>
-                  <a:srgbClr val="1C3144"/>
-                </a:solidFill>
-                <a:latin typeface="Calibri"/>
-                <a:ea typeface="Calibri"/>
-                <a:cs typeface="Calibri"/>
-              </a:defRPr>
-            </a:lvl6pPr>
-            <a:lvl7pPr>
-              <a:defRPr sz="2250" b="0">
-                <a:solidFill>
-                  <a:srgbClr val="1C3144"/>
-                </a:solidFill>
-                <a:latin typeface="Calibri"/>
-                <a:ea typeface="Calibri"/>
-                <a:cs typeface="Calibri"/>
-              </a:defRPr>
-            </a:lvl7pPr>
-            <a:lvl8pPr>
-              <a:defRPr sz="2250" b="0">
-                <a:solidFill>
-                  <a:srgbClr val="1C3144"/>
-                </a:solidFill>
-                <a:latin typeface="Calibri"/>
-                <a:ea typeface="Calibri"/>
-                <a:cs typeface="Calibri"/>
-              </a:defRPr>
-            </a:lvl8pPr>
-            <a:lvl9pPr>
-              <a:defRPr sz="2250" b="0">
-                <a:solidFill>
-                  <a:srgbClr val="1C3144"/>
-                </a:solidFill>
-                <a:latin typeface="Calibri"/>
-                <a:ea typeface="Calibri"/>
-                <a:cs typeface="Calibri"/>
-              </a:defRPr>
-            </a:lvl9pPr>
-          </a:lstStyle>
-          <a:p xmlns:a="http://schemas.openxmlformats.org/drawingml/2006/main">
-            <a:pPr>
-              <a:defRPr sz="2250" b="0">
-                <a:solidFill>
-                  <a:srgbClr val="1C3144"/>
-                </a:solidFill>
-                <a:latin typeface="Calibri"/>
-                <a:ea typeface="Calibri"/>
-                <a:cs typeface="Calibri"/>
-              </a:defRPr>
-            </a:pPr>
-            <a:r>
-              <a:rPr sz="2250" b="0">
-                <a:solidFill>
-                  <a:srgbClr val="1C3144"/>
-                </a:solidFill>
-                <a:latin typeface="Calibri"/>
-                <a:ea typeface="Calibri"/>
-                <a:cs typeface="Calibri"/>
-              </a:rPr>
-              <a:t>Explain the supplied scenario in your own words.</a:t>
-            </a:r>
-          </a:p>
-        </p:txBody>
-      </p:sp>
-      <p:sp>
-        <p:nvSpPr>
-          <p:cNvPr id="8" name="">
-            <a:extLst xmlns:a="http://schemas.openxmlformats.org/drawingml/2006/main">
-              <a:ext uri="{FF2B5EF4-FFF2-40B4-BE49-F238E27FC236}">
-                <a16:creationId xmlns:a16="http://schemas.microsoft.com/office/drawing/2014/main" id="{068E0973-7AB7-44E6-9054-99D486D9BD60}"/>
-              </a:ext>
-            </a:extLst>
-          </p:cNvPr>
-          <p:cNvSpPr>
-            <a:spLocks xmlns:a="http://schemas.openxmlformats.org/drawingml/2006/main" noGrp="1"/>
-          </p:cNvSpPr>
-          <p:nvPr/>
-        </p:nvSpPr>
-        <p:spPr>
-          <a:xfrm xmlns:a="http://schemas.openxmlformats.org/drawingml/2006/main">
-            <a:off x="590550" y="3919538"/>
-            <a:ext cx="619125" cy="571500"/>
-          </a:xfrm>
-          <a:prstGeom xmlns:a="http://schemas.openxmlformats.org/drawingml/2006/main" prst="rect">
-            <a:avLst/>
-          </a:prstGeom>
-          <a:noFill xmlns:a="http://schemas.openxmlformats.org/drawingml/2006/main"/>
-          <a:ln xmlns:a="http://schemas.openxmlformats.org/drawingml/2006/main" w="0">
-            <a:noFill/>
-          </a:ln>
-        </p:spPr>
-        <p:txBody>
-          <a:bodyPr xmlns:a="http://schemas.openxmlformats.org/drawingml/2006/main">
-            <a:noAutofit/>
-          </a:bodyPr>
-          <a:lstStyle xmlns:a="http://schemas.openxmlformats.org/drawingml/2006/main">
-            <a:defPPr>
-              <a:defRPr sz="2550" b="1">
-                <a:solidFill>
-                  <a:srgbClr val="E4572E"/>
-                </a:solidFill>
-                <a:latin typeface="Calibri"/>
-                <a:ea typeface="Calibri"/>
-                <a:cs typeface="Calibri"/>
-              </a:defRPr>
-            </a:defPPr>
-            <a:lvl1pPr>
-              <a:defRPr sz="2550" b="1">
-                <a:solidFill>
-                  <a:srgbClr val="E4572E"/>
-                </a:solidFill>
-                <a:latin typeface="Calibri"/>
-                <a:ea typeface="Calibri"/>
-                <a:cs typeface="Calibri"/>
-              </a:defRPr>
-            </a:lvl1pPr>
-            <a:lvl2pPr>
-              <a:defRPr sz="2550" b="1">
-                <a:solidFill>
-                  <a:srgbClr val="E4572E"/>
-                </a:solidFill>
-                <a:latin typeface="Calibri"/>
-                <a:ea typeface="Calibri"/>
-                <a:cs typeface="Calibri"/>
-              </a:defRPr>
-            </a:lvl2pPr>
-            <a:lvl3pPr>
-              <a:defRPr sz="2550" b="1">
-                <a:solidFill>
-                  <a:srgbClr val="E4572E"/>
-                </a:solidFill>
-                <a:latin typeface="Calibri"/>
-                <a:ea typeface="Calibri"/>
-                <a:cs typeface="Calibri"/>
-              </a:defRPr>
-            </a:lvl3pPr>
-            <a:lvl4pPr>
-              <a:defRPr sz="2550" b="1">
-                <a:solidFill>
-                  <a:srgbClr val="E4572E"/>
-                </a:solidFill>
-                <a:latin typeface="Calibri"/>
-                <a:ea typeface="Calibri"/>
-                <a:cs typeface="Calibri"/>
-              </a:defRPr>
-            </a:lvl4pPr>
-            <a:lvl5pPr>
-              <a:defRPr sz="2550" b="1">
-                <a:solidFill>
-                  <a:srgbClr val="E4572E"/>
-                </a:solidFill>
-                <a:latin typeface="Calibri"/>
-                <a:ea typeface="Calibri"/>
-                <a:cs typeface="Calibri"/>
-              </a:defRPr>
-            </a:lvl5pPr>
-            <a:lvl6pPr>
-              <a:defRPr sz="2550" b="1">
-                <a:solidFill>
-                  <a:srgbClr val="E4572E"/>
-                </a:solidFill>
-                <a:latin typeface="Calibri"/>
-                <a:ea typeface="Calibri"/>
-                <a:cs typeface="Calibri"/>
-              </a:defRPr>
-            </a:lvl6pPr>
-            <a:lvl7pPr>
-              <a:defRPr sz="2550" b="1">
-                <a:solidFill>
-                  <a:srgbClr val="E4572E"/>
-                </a:solidFill>
-                <a:latin typeface="Calibri"/>
-                <a:ea typeface="Calibri"/>
-                <a:cs typeface="Calibri"/>
-              </a:defRPr>
-            </a:lvl7pPr>
-            <a:lvl8pPr>
-              <a:defRPr sz="2550" b="1">
-                <a:solidFill>
-                  <a:srgbClr val="E4572E"/>
-                </a:solidFill>
-                <a:latin typeface="Calibri"/>
-                <a:ea typeface="Calibri"/>
-                <a:cs typeface="Calibri"/>
-              </a:defRPr>
-            </a:lvl8pPr>
-            <a:lvl9pPr>
-              <a:defRPr sz="2550" b="1">
-                <a:solidFill>
-                  <a:srgbClr val="E4572E"/>
-                </a:solidFill>
-                <a:latin typeface="Calibri"/>
-                <a:ea typeface="Calibri"/>
-                <a:cs typeface="Calibri"/>
-              </a:defRPr>
-            </a:lvl9pPr>
-          </a:lstStyle>
-          <a:p xmlns:a="http://schemas.openxmlformats.org/drawingml/2006/main">
-            <a:pPr>
-              <a:defRPr sz="2550" b="1">
-                <a:solidFill>
-                  <a:srgbClr val="E4572E"/>
-                </a:solidFill>
-                <a:latin typeface="Calibri"/>
-                <a:ea typeface="Calibri"/>
-                <a:cs typeface="Calibri"/>
-              </a:defRPr>
-            </a:pPr>
-            <a:r>
-              <a:rPr sz="2550" b="1">
-                <a:solidFill>
-                  <a:srgbClr val="E4572E"/>
-                </a:solidFill>
-                <a:latin typeface="Calibri"/>
-                <a:ea typeface="Calibri"/>
-                <a:cs typeface="Calibri"/>
-              </a:rPr>
-              <a:t>03</a:t>
-            </a:r>
-          </a:p>
-        </p:txBody>
-      </p:sp>
-      <p:sp>
-        <p:nvSpPr>
-          <p:cNvPr id="9" name="">
-            <a:extLst xmlns:a="http://schemas.openxmlformats.org/drawingml/2006/main">
-              <a:ext uri="{FF2B5EF4-FFF2-40B4-BE49-F238E27FC236}">
-                <a16:creationId xmlns:a16="http://schemas.microsoft.com/office/drawing/2014/main" id="{81CDE278-17B0-4BE2-9541-BC07770E6279}"/>
-              </a:ext>
-            </a:extLst>
-          </p:cNvPr>
-          <p:cNvSpPr>
-            <a:spLocks xmlns:a="http://schemas.openxmlformats.org/drawingml/2006/main" noGrp="1"/>
-          </p:cNvSpPr>
-          <p:nvPr/>
-        </p:nvSpPr>
-        <p:spPr>
-          <a:xfrm xmlns:a="http://schemas.openxmlformats.org/drawingml/2006/main">
-            <a:off x="1381125" y="3919538"/>
-            <a:ext cx="10096500" cy="992981"/>
-          </a:xfrm>
-          <a:prstGeom xmlns:a="http://schemas.openxmlformats.org/drawingml/2006/main" prst="rect">
-            <a:avLst/>
-          </a:prstGeom>
-          <a:noFill xmlns:a="http://schemas.openxmlformats.org/drawingml/2006/main"/>
-          <a:ln xmlns:a="http://schemas.openxmlformats.org/drawingml/2006/main" w="0">
-            <a:noFill/>
-          </a:ln>
-        </p:spPr>
-        <p:txBody>
-          <a:bodyPr xmlns:a="http://schemas.openxmlformats.org/drawingml/2006/main">
-            <a:noAutofit/>
-          </a:bodyPr>
-          <a:lstStyle xmlns:a="http://schemas.openxmlformats.org/drawingml/2006/main">
-            <a:defPPr>
-              <a:defRPr sz="2250" b="0">
-                <a:solidFill>
-                  <a:srgbClr val="1C3144"/>
-                </a:solidFill>
-                <a:latin typeface="Calibri"/>
-                <a:ea typeface="Calibri"/>
-                <a:cs typeface="Calibri"/>
-              </a:defRPr>
-            </a:defPPr>
-            <a:lvl1pPr>
-              <a:defRPr sz="2250" b="0">
-                <a:solidFill>
-                  <a:srgbClr val="1C3144"/>
-                </a:solidFill>
-                <a:latin typeface="Calibri"/>
-                <a:ea typeface="Calibri"/>
-                <a:cs typeface="Calibri"/>
-              </a:defRPr>
-            </a:lvl1pPr>
-            <a:lvl2pPr>
-              <a:defRPr sz="2250" b="0">
-                <a:solidFill>
-                  <a:srgbClr val="1C3144"/>
-                </a:solidFill>
-                <a:latin typeface="Calibri"/>
-                <a:ea typeface="Calibri"/>
-                <a:cs typeface="Calibri"/>
-              </a:defRPr>
-            </a:lvl2pPr>
-            <a:lvl3pPr>
-              <a:defRPr sz="2250" b="0">
-                <a:solidFill>
-                  <a:srgbClr val="1C3144"/>
-                </a:solidFill>
-                <a:latin typeface="Calibri"/>
-                <a:ea typeface="Calibri"/>
-                <a:cs typeface="Calibri"/>
-              </a:defRPr>
-            </a:lvl3pPr>
-            <a:lvl4pPr>
-              <a:defRPr sz="2250" b="0">
-                <a:solidFill>
-                  <a:srgbClr val="1C3144"/>
-                </a:solidFill>
-                <a:latin typeface="Calibri"/>
-                <a:ea typeface="Calibri"/>
-                <a:cs typeface="Calibri"/>
-              </a:defRPr>
-            </a:lvl4pPr>
-            <a:lvl5pPr>
-              <a:defRPr sz="2250" b="0">
-                <a:solidFill>
-                  <a:srgbClr val="1C3144"/>
-                </a:solidFill>
-                <a:latin typeface="Calibri"/>
-                <a:ea typeface="Calibri"/>
-                <a:cs typeface="Calibri"/>
-              </a:defRPr>
-            </a:lvl5pPr>
-            <a:lvl6pPr>
-              <a:defRPr sz="2250" b="0">
-                <a:solidFill>
-                  <a:srgbClr val="1C3144"/>
-                </a:solidFill>
-                <a:latin typeface="Calibri"/>
-                <a:ea typeface="Calibri"/>
-                <a:cs typeface="Calibri"/>
-              </a:defRPr>
-            </a:lvl6pPr>
-            <a:lvl7pPr>
-              <a:defRPr sz="2250" b="0">
-                <a:solidFill>
-                  <a:srgbClr val="1C3144"/>
-                </a:solidFill>
-                <a:latin typeface="Calibri"/>
-                <a:ea typeface="Calibri"/>
-                <a:cs typeface="Calibri"/>
-              </a:defRPr>
-            </a:lvl7pPr>
-            <a:lvl8pPr>
-              <a:defRPr sz="2250" b="0">
-                <a:solidFill>
-                  <a:srgbClr val="1C3144"/>
-                </a:solidFill>
-                <a:latin typeface="Calibri"/>
-                <a:ea typeface="Calibri"/>
-                <a:cs typeface="Calibri"/>
-              </a:defRPr>
-            </a:lvl8pPr>
-            <a:lvl9pPr>
-              <a:defRPr sz="2250" b="0">
-                <a:solidFill>
-                  <a:srgbClr val="1C3144"/>
-                </a:solidFill>
-                <a:latin typeface="Calibri"/>
-                <a:ea typeface="Calibri"/>
-                <a:cs typeface="Calibri"/>
-              </a:defRPr>
-            </a:lvl9pPr>
-          </a:lstStyle>
-          <a:p xmlns:a="http://schemas.openxmlformats.org/drawingml/2006/main">
-            <a:pPr>
-              <a:defRPr sz="2250" b="0">
-                <a:solidFill>
-                  <a:srgbClr val="1C3144"/>
-                </a:solidFill>
-                <a:latin typeface="Calibri"/>
-                <a:ea typeface="Calibri"/>
-                <a:cs typeface="Calibri"/>
-              </a:defRPr>
-            </a:pPr>
-            <a:r>
-              <a:rPr sz="2250" b="0">
-                <a:solidFill>
-                  <a:srgbClr val="1C3144"/>
-                </a:solidFill>
-                <a:latin typeface="Calibri"/>
-                <a:ea typeface="Calibri"/>
-                <a:cs typeface="Calibri"/>
-              </a:rPr>
-              <a:t>State target units, reasons and limitations.</a:t>
-            </a:r>
-          </a:p>
-        </p:txBody>
-      </p:sp>
-      <p:sp>
-        <p:nvSpPr>
-          <p:cNvPr id="10" name="">
-            <a:extLst xmlns:a="http://schemas.openxmlformats.org/drawingml/2006/main">
-              <a:ext uri="{FF2B5EF4-FFF2-40B4-BE49-F238E27FC236}">
-                <a16:creationId xmlns:a16="http://schemas.microsoft.com/office/drawing/2014/main" id="{812396AD-61A9-4F70-8406-C674A29C9FCA}"/>
-              </a:ext>
-            </a:extLst>
-          </p:cNvPr>
-          <p:cNvSpPr>
-            <a:spLocks xmlns:a="http://schemas.openxmlformats.org/drawingml/2006/main" noGrp="1"/>
-          </p:cNvSpPr>
-          <p:nvPr/>
-        </p:nvSpPr>
-        <p:spPr>
-          <a:xfrm xmlns:a="http://schemas.openxmlformats.org/drawingml/2006/main">
-            <a:off x="590550" y="4988719"/>
-            <a:ext cx="619125" cy="571500"/>
-          </a:xfrm>
-          <a:prstGeom xmlns:a="http://schemas.openxmlformats.org/drawingml/2006/main" prst="rect">
-            <a:avLst/>
-          </a:prstGeom>
-          <a:noFill xmlns:a="http://schemas.openxmlformats.org/drawingml/2006/main"/>
-          <a:ln xmlns:a="http://schemas.openxmlformats.org/drawingml/2006/main" w="0">
-            <a:noFill/>
-          </a:ln>
-        </p:spPr>
-        <p:txBody>
-          <a:bodyPr xmlns:a="http://schemas.openxmlformats.org/drawingml/2006/main">
-            <a:noAutofit/>
-          </a:bodyPr>
-          <a:lstStyle xmlns:a="http://schemas.openxmlformats.org/drawingml/2006/main">
-            <a:defPPr>
-              <a:defRPr sz="2550" b="1">
-                <a:solidFill>
-                  <a:srgbClr val="E4572E"/>
-                </a:solidFill>
-                <a:latin typeface="Calibri"/>
-                <a:ea typeface="Calibri"/>
-                <a:cs typeface="Calibri"/>
-              </a:defRPr>
-            </a:defPPr>
-            <a:lvl1pPr>
-              <a:defRPr sz="2550" b="1">
-                <a:solidFill>
-                  <a:srgbClr val="E4572E"/>
-                </a:solidFill>
-                <a:latin typeface="Calibri"/>
-                <a:ea typeface="Calibri"/>
-                <a:cs typeface="Calibri"/>
-              </a:defRPr>
-            </a:lvl1pPr>
-            <a:lvl2pPr>
-              <a:defRPr sz="2550" b="1">
-                <a:solidFill>
-                  <a:srgbClr val="E4572E"/>
-                </a:solidFill>
-                <a:latin typeface="Calibri"/>
-                <a:ea typeface="Calibri"/>
-                <a:cs typeface="Calibri"/>
-              </a:defRPr>
-            </a:lvl2pPr>
-            <a:lvl3pPr>
-              <a:defRPr sz="2550" b="1">
-                <a:solidFill>
-                  <a:srgbClr val="E4572E"/>
-                </a:solidFill>
-                <a:latin typeface="Calibri"/>
-                <a:ea typeface="Calibri"/>
-                <a:cs typeface="Calibri"/>
-              </a:defRPr>
-            </a:lvl3pPr>
-            <a:lvl4pPr>
-              <a:defRPr sz="2550" b="1">
-                <a:solidFill>
-                  <a:srgbClr val="E4572E"/>
-                </a:solidFill>
-                <a:latin typeface="Calibri"/>
-                <a:ea typeface="Calibri"/>
-                <a:cs typeface="Calibri"/>
-              </a:defRPr>
-            </a:lvl4pPr>
-            <a:lvl5pPr>
-              <a:defRPr sz="2550" b="1">
-                <a:solidFill>
-                  <a:srgbClr val="E4572E"/>
-                </a:solidFill>
-                <a:latin typeface="Calibri"/>
-                <a:ea typeface="Calibri"/>
-                <a:cs typeface="Calibri"/>
-              </a:defRPr>
-            </a:lvl5pPr>
-            <a:lvl6pPr>
-              <a:defRPr sz="2550" b="1">
-                <a:solidFill>
-                  <a:srgbClr val="E4572E"/>
-                </a:solidFill>
-                <a:latin typeface="Calibri"/>
-                <a:ea typeface="Calibri"/>
-                <a:cs typeface="Calibri"/>
-              </a:defRPr>
-            </a:lvl6pPr>
-            <a:lvl7pPr>
-              <a:defRPr sz="2550" b="1">
-                <a:solidFill>
-                  <a:srgbClr val="E4572E"/>
-                </a:solidFill>
-                <a:latin typeface="Calibri"/>
-                <a:ea typeface="Calibri"/>
-                <a:cs typeface="Calibri"/>
-              </a:defRPr>
-            </a:lvl7pPr>
-            <a:lvl8pPr>
-              <a:defRPr sz="2550" b="1">
-                <a:solidFill>
-                  <a:srgbClr val="E4572E"/>
-                </a:solidFill>
-                <a:latin typeface="Calibri"/>
-                <a:ea typeface="Calibri"/>
-                <a:cs typeface="Calibri"/>
-              </a:defRPr>
-            </a:lvl8pPr>
-            <a:lvl9pPr>
-              <a:defRPr sz="2550" b="1">
-                <a:solidFill>
-                  <a:srgbClr val="E4572E"/>
-                </a:solidFill>
-                <a:latin typeface="Calibri"/>
-                <a:ea typeface="Calibri"/>
-                <a:cs typeface="Calibri"/>
-              </a:defRPr>
-            </a:lvl9pPr>
-          </a:lstStyle>
-          <a:p xmlns:a="http://schemas.openxmlformats.org/drawingml/2006/main">
-            <a:pPr>
-              <a:defRPr sz="2550" b="1">
-                <a:solidFill>
-                  <a:srgbClr val="E4572E"/>
-                </a:solidFill>
-                <a:latin typeface="Calibri"/>
-                <a:ea typeface="Calibri"/>
-                <a:cs typeface="Calibri"/>
-              </a:defRPr>
-            </a:pPr>
-            <a:r>
-              <a:rPr sz="2550" b="1">
-                <a:solidFill>
-                  <a:srgbClr val="E4572E"/>
-                </a:solidFill>
-                <a:latin typeface="Calibri"/>
-                <a:ea typeface="Calibri"/>
-                <a:cs typeface="Calibri"/>
-              </a:rPr>
-              <a:t>04</a:t>
-            </a:r>
-          </a:p>
-        </p:txBody>
-      </p:sp>
-      <p:sp>
-        <p:nvSpPr>
-          <p:cNvPr id="11" name="">
-            <a:extLst xmlns:a="http://schemas.openxmlformats.org/drawingml/2006/main">
-              <a:ext uri="{FF2B5EF4-FFF2-40B4-BE49-F238E27FC236}">
-                <a16:creationId xmlns:a16="http://schemas.microsoft.com/office/drawing/2014/main" id="{7E048161-E37C-45B3-97D0-DC91CE4DD333}"/>
-              </a:ext>
-            </a:extLst>
-          </p:cNvPr>
-          <p:cNvSpPr>
-            <a:spLocks xmlns:a="http://schemas.openxmlformats.org/drawingml/2006/main" noGrp="1"/>
-          </p:cNvSpPr>
-          <p:nvPr/>
-        </p:nvSpPr>
-        <p:spPr>
-          <a:xfrm xmlns:a="http://schemas.openxmlformats.org/drawingml/2006/main">
-            <a:off x="1381125" y="4988719"/>
-            <a:ext cx="10096500" cy="992981"/>
-          </a:xfrm>
-          <a:prstGeom xmlns:a="http://schemas.openxmlformats.org/drawingml/2006/main" prst="rect">
-            <a:avLst/>
-          </a:prstGeom>
-          <a:noFill xmlns:a="http://schemas.openxmlformats.org/drawingml/2006/main"/>
-          <a:ln xmlns:a="http://schemas.openxmlformats.org/drawingml/2006/main" w="0">
-            <a:noFill/>
-          </a:ln>
-        </p:spPr>
-        <p:txBody>
-          <a:bodyPr xmlns:a="http://schemas.openxmlformats.org/drawingml/2006/main">
-            <a:noAutofit/>
-          </a:bodyPr>
-          <a:lstStyle xmlns:a="http://schemas.openxmlformats.org/drawingml/2006/main">
-            <a:defPPr>
-              <a:defRPr sz="2250" b="0">
-                <a:solidFill>
-                  <a:srgbClr val="1C3144"/>
-                </a:solidFill>
-                <a:latin typeface="Calibri"/>
-                <a:ea typeface="Calibri"/>
-                <a:cs typeface="Calibri"/>
-              </a:defRPr>
-            </a:defPPr>
-            <a:lvl1pPr>
-              <a:defRPr sz="2250" b="0">
-                <a:solidFill>
-                  <a:srgbClr val="1C3144"/>
-                </a:solidFill>
-                <a:latin typeface="Calibri"/>
-                <a:ea typeface="Calibri"/>
-                <a:cs typeface="Calibri"/>
-              </a:defRPr>
-            </a:lvl1pPr>
-            <a:lvl2pPr>
-              <a:defRPr sz="2250" b="0">
-                <a:solidFill>
-                  <a:srgbClr val="1C3144"/>
-                </a:solidFill>
-                <a:latin typeface="Calibri"/>
-                <a:ea typeface="Calibri"/>
-                <a:cs typeface="Calibri"/>
-              </a:defRPr>
-            </a:lvl2pPr>
-            <a:lvl3pPr>
-              <a:defRPr sz="2250" b="0">
-                <a:solidFill>
-                  <a:srgbClr val="1C3144"/>
-                </a:solidFill>
-                <a:latin typeface="Calibri"/>
-                <a:ea typeface="Calibri"/>
-                <a:cs typeface="Calibri"/>
-              </a:defRPr>
-            </a:lvl3pPr>
-            <a:lvl4pPr>
-              <a:defRPr sz="2250" b="0">
-                <a:solidFill>
-                  <a:srgbClr val="1C3144"/>
-                </a:solidFill>
-                <a:latin typeface="Calibri"/>
-                <a:ea typeface="Calibri"/>
-                <a:cs typeface="Calibri"/>
-              </a:defRPr>
-            </a:lvl4pPr>
-            <a:lvl5pPr>
-              <a:defRPr sz="2250" b="0">
-                <a:solidFill>
-                  <a:srgbClr val="1C3144"/>
-                </a:solidFill>
-                <a:latin typeface="Calibri"/>
-                <a:ea typeface="Calibri"/>
-                <a:cs typeface="Calibri"/>
-              </a:defRPr>
-            </a:lvl5pPr>
-            <a:lvl6pPr>
-              <a:defRPr sz="2250" b="0">
-                <a:solidFill>
-                  <a:srgbClr val="1C3144"/>
-                </a:solidFill>
-                <a:latin typeface="Calibri"/>
-                <a:ea typeface="Calibri"/>
-                <a:cs typeface="Calibri"/>
-              </a:defRPr>
-            </a:lvl6pPr>
-            <a:lvl7pPr>
-              <a:defRPr sz="2250" b="0">
-                <a:solidFill>
-                  <a:srgbClr val="1C3144"/>
-                </a:solidFill>
-                <a:latin typeface="Calibri"/>
-                <a:ea typeface="Calibri"/>
-                <a:cs typeface="Calibri"/>
-              </a:defRPr>
-            </a:lvl7pPr>
-            <a:lvl8pPr>
-              <a:defRPr sz="2250" b="0">
-                <a:solidFill>
-                  <a:srgbClr val="1C3144"/>
-                </a:solidFill>
-                <a:latin typeface="Calibri"/>
-                <a:ea typeface="Calibri"/>
-                <a:cs typeface="Calibri"/>
-              </a:defRPr>
-            </a:lvl8pPr>
-            <a:lvl9pPr>
-              <a:defRPr sz="2250" b="0">
-                <a:solidFill>
-                  <a:srgbClr val="1C3144"/>
-                </a:solidFill>
-                <a:latin typeface="Calibri"/>
-                <a:ea typeface="Calibri"/>
-                <a:cs typeface="Calibri"/>
-              </a:defRPr>
-            </a:lvl9pPr>
-          </a:lstStyle>
-          <a:p xmlns:a="http://schemas.openxmlformats.org/drawingml/2006/main">
-            <a:pPr>
-              <a:defRPr sz="2250" b="0">
-                <a:solidFill>
-                  <a:srgbClr val="1C3144"/>
-                </a:solidFill>
-                <a:latin typeface="Calibri"/>
-                <a:ea typeface="Calibri"/>
-                <a:cs typeface="Calibri"/>
-              </a:defRPr>
-            </a:pPr>
-            <a:r>
-              <a:rPr sz="2250" b="0">
-                <a:solidFill>
-                  <a:srgbClr val="1C3144"/>
-                </a:solidFill>
-                <a:latin typeface="Calibri"/>
-                <a:ea typeface="Calibri"/>
-                <a:cs typeface="Calibri"/>
-              </a:rPr>
-              <a:t>Submit one complete notebook containing code and written evidence.</a:t>
-            </a:r>
-          </a:p>
-        </p:txBody>
-      </p:sp>
-      <p:sp>
-        <p:nvSpPr>
-          <p:cNvPr id="12" name="">
-            <a:extLst xmlns:a="http://schemas.openxmlformats.org/drawingml/2006/main">
-              <a:ext uri="{FF2B5EF4-FFF2-40B4-BE49-F238E27FC236}">
-                <a16:creationId xmlns:a16="http://schemas.microsoft.com/office/drawing/2014/main" id="{6066009B-7A2F-47C3-B932-99D9E8BB0615}"/>
-              </a:ext>
-            </a:extLst>
-          </p:cNvPr>
-          <p:cNvSpPr>
-            <a:spLocks xmlns:a="http://schemas.openxmlformats.org/drawingml/2006/main" noGrp="1"/>
-          </p:cNvSpPr>
-          <p:nvPr/>
-        </p:nvSpPr>
-        <p:spPr>
-          <a:xfrm xmlns:a="http://schemas.openxmlformats.org/drawingml/2006/main">
-            <a:off x="590550" y="6524625"/>
-            <a:ext cx="10810875" cy="219075"/>
-          </a:xfrm>
-          <a:prstGeom xmlns:a="http://schemas.openxmlformats.org/drawingml/2006/main" prst="rect">
-            <a:avLst/>
-          </a:prstGeom>
-          <a:noFill xmlns:a="http://schemas.openxmlformats.org/drawingml/2006/main"/>
-          <a:ln xmlns:a="http://schemas.openxmlformats.org/drawingml/2006/main" w="0">
-            <a:noFill/>
-          </a:ln>
-        </p:spPr>
-        <p:txBody>
-          <a:bodyPr xmlns:a="http://schemas.openxmlformats.org/drawingml/2006/main">
-            <a:noAutofit/>
-          </a:bodyPr>
-          <a:lstStyle xmlns:a="http://schemas.openxmlformats.org/drawingml/2006/main">
-            <a:defPPr>
-              <a:defRPr sz="1200" b="0">
-                <a:solidFill>
-                  <a:srgbClr val="6B7A8A"/>
-                </a:solidFill>
-                <a:latin typeface="Calibri"/>
-                <a:ea typeface="Calibri"/>
-                <a:cs typeface="Calibri"/>
-              </a:defRPr>
-            </a:defPPr>
-            <a:lvl1pPr>
-              <a:defRPr sz="1200" b="0">
-                <a:solidFill>
-                  <a:srgbClr val="6B7A8A"/>
-                </a:solidFill>
-                <a:latin typeface="Calibri"/>
-                <a:ea typeface="Calibri"/>
-                <a:cs typeface="Calibri"/>
-              </a:defRPr>
-            </a:lvl1pPr>
-            <a:lvl2pPr>
-              <a:defRPr sz="1200" b="0">
-                <a:solidFill>
-                  <a:srgbClr val="6B7A8A"/>
-                </a:solidFill>
-                <a:latin typeface="Calibri"/>
-                <a:ea typeface="Calibri"/>
-                <a:cs typeface="Calibri"/>
-              </a:defRPr>
-            </a:lvl2pPr>
-            <a:lvl3pPr>
-              <a:defRPr sz="1200" b="0">
-                <a:solidFill>
-                  <a:srgbClr val="6B7A8A"/>
-                </a:solidFill>
-                <a:latin typeface="Calibri"/>
-                <a:ea typeface="Calibri"/>
-                <a:cs typeface="Calibri"/>
-              </a:defRPr>
-            </a:lvl3pPr>
-            <a:lvl4pPr>
-              <a:defRPr sz="1200" b="0">
-                <a:solidFill>
-                  <a:srgbClr val="6B7A8A"/>
-                </a:solidFill>
-                <a:latin typeface="Calibri"/>
-                <a:ea typeface="Calibri"/>
-                <a:cs typeface="Calibri"/>
-              </a:defRPr>
-            </a:lvl4pPr>
-            <a:lvl5pPr>
-              <a:defRPr sz="1200" b="0">
-                <a:solidFill>
-                  <a:srgbClr val="6B7A8A"/>
-                </a:solidFill>
-                <a:latin typeface="Calibri"/>
-                <a:ea typeface="Calibri"/>
-                <a:cs typeface="Calibri"/>
-              </a:defRPr>
-            </a:lvl5pPr>
-            <a:lvl6pPr>
-              <a:defRPr sz="1200" b="0">
-                <a:solidFill>
-                  <a:srgbClr val="6B7A8A"/>
-                </a:solidFill>
-                <a:latin typeface="Calibri"/>
-                <a:ea typeface="Calibri"/>
-                <a:cs typeface="Calibri"/>
-              </a:defRPr>
-            </a:lvl6pPr>
-            <a:lvl7pPr>
-              <a:defRPr sz="1200" b="0">
-                <a:solidFill>
-                  <a:srgbClr val="6B7A8A"/>
-                </a:solidFill>
-                <a:latin typeface="Calibri"/>
-                <a:ea typeface="Calibri"/>
-                <a:cs typeface="Calibri"/>
-              </a:defRPr>
-            </a:lvl7pPr>
-            <a:lvl8pPr>
-              <a:defRPr sz="1200" b="0">
-                <a:solidFill>
-                  <a:srgbClr val="6B7A8A"/>
-                </a:solidFill>
-                <a:latin typeface="Calibri"/>
-                <a:ea typeface="Calibri"/>
-                <a:cs typeface="Calibri"/>
-              </a:defRPr>
-            </a:lvl8pPr>
-            <a:lvl9pPr>
-              <a:defRPr sz="1200" b="0">
-                <a:solidFill>
-                  <a:srgbClr val="6B7A8A"/>
-                </a:solidFill>
-                <a:latin typeface="Calibri"/>
-                <a:ea typeface="Calibri"/>
-                <a:cs typeface="Calibri"/>
-              </a:defRPr>
-            </a:lvl9pPr>
-          </a:lstStyle>
-          <a:p xmlns:a="http://schemas.openxmlformats.org/drawingml/2006/main">
-            <a:pPr>
-              <a:defRPr sz="1200" b="0">
-                <a:solidFill>
-                  <a:srgbClr val="6B7A8A"/>
-                </a:solidFill>
-                <a:latin typeface="Calibri"/>
-                <a:ea typeface="Calibri"/>
-                <a:cs typeface="Calibri"/>
-              </a:defRPr>
-            </a:pPr>
-            <a:r>
-              <a:rPr sz="1200" b="0">
-                <a:solidFill>
-                  <a:srgbClr val="6B7A8A"/>
-                </a:solidFill>
-                <a:latin typeface="Calibri"/>
-                <a:ea typeface="Calibri"/>
-                <a:cs typeface="Calibri"/>
-              </a:rPr>
-              <a:t>CML3113   Week 12   39</a:t>
-            </a:r>
-          </a:p>
-        </p:txBody>
-      </p:sp>
-    </p:spTree>
-    <p:extLst>
-      <p:ext uri="{BB962C8B-B14F-4D97-AF65-F5344CB8AC3E}">
-        <p14:creationId xmlns:p14="http://schemas.microsoft.com/office/powerpoint/2010/main" val="540007357"/>
       </p:ext>
     </p:extLst>
   </p:cSld>
@@ -38078,10 +36605,10 @@
       </p:grpSpPr>
       <p:sp>
         <p:nvSpPr>
-          <p:cNvPr id="16" name="">
+          <p:cNvPr id="13" name="">
             <a:extLst xmlns:a="http://schemas.openxmlformats.org/drawingml/2006/main">
               <a:ext uri="{FF2B5EF4-FFF2-40B4-BE49-F238E27FC236}">
-                <a16:creationId xmlns:a16="http://schemas.microsoft.com/office/drawing/2014/main" id="{936E650F-D518-403C-82E4-A904361C874B}"/>
+                <a16:creationId xmlns:a16="http://schemas.microsoft.com/office/drawing/2014/main" id="{3CD2D650-56CF-4E61-81E1-B2BDF1CD5600}"/>
               </a:ext>
             </a:extLst>
           </p:cNvPr>
@@ -38115,7 +36642,7 @@
           <p:cNvPr id="2" name="">
             <a:extLst xmlns:a="http://schemas.openxmlformats.org/drawingml/2006/main">
               <a:ext uri="{FF2B5EF4-FFF2-40B4-BE49-F238E27FC236}">
-                <a16:creationId xmlns:a16="http://schemas.microsoft.com/office/drawing/2014/main" id="{14B9C0ED-BD32-4F4F-BA03-7B43CA9EB709}"/>
+                <a16:creationId xmlns:a16="http://schemas.microsoft.com/office/drawing/2014/main" id="{A0DAE063-73E5-43B9-B150-62CC79E642D3}"/>
               </a:ext>
             </a:extLst>
           </p:cNvPr>
@@ -38263,7 +36790,7 @@
                 <a:ea typeface="Calibri"/>
                 <a:cs typeface="Calibri"/>
               </a:rPr>
-              <a:t>ASSIGNMENT SUBMISSION</a:t>
+              <a:t>BLOCK 2, PART B</a:t>
             </a:r>
           </a:p>
         </p:txBody>
@@ -38273,7 +36800,7 @@
           <p:cNvPr id="3" name="">
             <a:extLst xmlns:a="http://schemas.openxmlformats.org/drawingml/2006/main">
               <a:ext uri="{FF2B5EF4-FFF2-40B4-BE49-F238E27FC236}">
-                <a16:creationId xmlns:a16="http://schemas.microsoft.com/office/drawing/2014/main" id="{BCB7D16B-B443-4964-BB8F-F0B0834414EE}"/>
+                <a16:creationId xmlns:a16="http://schemas.microsoft.com/office/drawing/2014/main" id="{1C2168A9-5142-42CC-83DA-5BBC0E6610E3}"/>
               </a:ext>
             </a:extLst>
           </p:cNvPr>
@@ -38421,7 +36948,7 @@
                 <a:ea typeface="Calibri"/>
                 <a:cs typeface="Calibri"/>
               </a:rPr>
-              <a:t>Model recommendation submission</a:t>
+              <a:t>Written evidence</a:t>
             </a:r>
           </a:p>
         </p:txBody>
@@ -38431,7 +36958,7 @@
           <p:cNvPr id="4" name="">
             <a:extLst xmlns:a="http://schemas.openxmlformats.org/drawingml/2006/main">
               <a:ext uri="{FF2B5EF4-FFF2-40B4-BE49-F238E27FC236}">
-                <a16:creationId xmlns:a16="http://schemas.microsoft.com/office/drawing/2014/main" id="{CCA99A47-621C-4118-88A4-5375CA767E55}"/>
+                <a16:creationId xmlns:a16="http://schemas.microsoft.com/office/drawing/2014/main" id="{D39E5032-C017-48CC-84CB-E88601B4593E}"/>
               </a:ext>
             </a:extLst>
           </p:cNvPr>
@@ -38442,7 +36969,7 @@
         </p:nvSpPr>
         <p:spPr>
           <a:xfrm xmlns:a="http://schemas.openxmlformats.org/drawingml/2006/main">
-            <a:off x="590550" y="1724025"/>
+            <a:off x="590550" y="1781175"/>
             <a:ext cx="619125" cy="571500"/>
           </a:xfrm>
           <a:prstGeom xmlns:a="http://schemas.openxmlformats.org/drawingml/2006/main" prst="rect">
@@ -38589,7 +37116,7 @@
           <p:cNvPr id="5" name="">
             <a:extLst xmlns:a="http://schemas.openxmlformats.org/drawingml/2006/main">
               <a:ext uri="{FF2B5EF4-FFF2-40B4-BE49-F238E27FC236}">
-                <a16:creationId xmlns:a16="http://schemas.microsoft.com/office/drawing/2014/main" id="{E2B2A11D-F7CD-4CCA-86B3-722AAC25DC45}"/>
+                <a16:creationId xmlns:a16="http://schemas.microsoft.com/office/drawing/2014/main" id="{A0CC917D-B04B-4E13-A7F5-3F1744E4BC10}"/>
               </a:ext>
             </a:extLst>
           </p:cNvPr>
@@ -38600,8 +37127,8 @@
         </p:nvSpPr>
         <p:spPr>
           <a:xfrm xmlns:a="http://schemas.openxmlformats.org/drawingml/2006/main">
-            <a:off x="1381125" y="1724025"/>
-            <a:ext cx="10096500" cy="721519"/>
+            <a:off x="1381125" y="1781175"/>
+            <a:ext cx="10096500" cy="992981"/>
           </a:xfrm>
           <a:prstGeom xmlns:a="http://schemas.openxmlformats.org/drawingml/2006/main" prst="rect">
             <a:avLst/>
@@ -38737,7 +37264,7 @@
                 <a:ea typeface="Calibri"/>
                 <a:cs typeface="Calibri"/>
               </a:rPr>
-              <a:t>Opens: 27 Nov 2026, 08:00 Kampala</a:t>
+              <a:t>Use the cell headed “My written evidence”.</a:t>
             </a:r>
           </a:p>
         </p:txBody>
@@ -38747,7 +37274,7 @@
           <p:cNvPr id="6" name="">
             <a:extLst xmlns:a="http://schemas.openxmlformats.org/drawingml/2006/main">
               <a:ext uri="{FF2B5EF4-FFF2-40B4-BE49-F238E27FC236}">
-                <a16:creationId xmlns:a16="http://schemas.microsoft.com/office/drawing/2014/main" id="{94BF4413-2A8C-41AD-80C7-16E48CD94F37}"/>
+                <a16:creationId xmlns:a16="http://schemas.microsoft.com/office/drawing/2014/main" id="{3A9110C9-B024-4B92-8BEA-F34ED2FF0657}"/>
               </a:ext>
             </a:extLst>
           </p:cNvPr>
@@ -38758,7 +37285,7 @@
         </p:nvSpPr>
         <p:spPr>
           <a:xfrm xmlns:a="http://schemas.openxmlformats.org/drawingml/2006/main">
-            <a:off x="590550" y="2521744"/>
+            <a:off x="590550" y="2850356"/>
             <a:ext cx="619125" cy="571500"/>
           </a:xfrm>
           <a:prstGeom xmlns:a="http://schemas.openxmlformats.org/drawingml/2006/main" prst="rect">
@@ -38905,7 +37432,7 @@
           <p:cNvPr id="7" name="">
             <a:extLst xmlns:a="http://schemas.openxmlformats.org/drawingml/2006/main">
               <a:ext uri="{FF2B5EF4-FFF2-40B4-BE49-F238E27FC236}">
-                <a16:creationId xmlns:a16="http://schemas.microsoft.com/office/drawing/2014/main" id="{BB40FB38-076E-4CD3-BA55-F7EBCF0B9D21}"/>
+                <a16:creationId xmlns:a16="http://schemas.microsoft.com/office/drawing/2014/main" id="{249585C6-5793-415A-BC36-C01AF92E8F0E}"/>
               </a:ext>
             </a:extLst>
           </p:cNvPr>
@@ -38916,8 +37443,8 @@
         </p:nvSpPr>
         <p:spPr>
           <a:xfrm xmlns:a="http://schemas.openxmlformats.org/drawingml/2006/main">
-            <a:off x="1381125" y="2521744"/>
-            <a:ext cx="10096500" cy="721519"/>
+            <a:off x="1381125" y="2850356"/>
+            <a:ext cx="10096500" cy="992981"/>
           </a:xfrm>
           <a:prstGeom xmlns:a="http://schemas.openxmlformats.org/drawingml/2006/main" prst="rect">
             <a:avLst/>
@@ -39053,7 +37580,7 @@
                 <a:ea typeface="Calibri"/>
                 <a:cs typeface="Calibri"/>
               </a:rPr>
-              <a:t>Deadline: 27 Nov 2026, 11:00 Kampala</a:t>
+              <a:t>Explain the supplied scenario in your own words.</a:t>
             </a:r>
           </a:p>
         </p:txBody>
@@ -39063,7 +37590,7 @@
           <p:cNvPr id="8" name="">
             <a:extLst xmlns:a="http://schemas.openxmlformats.org/drawingml/2006/main">
               <a:ext uri="{FF2B5EF4-FFF2-40B4-BE49-F238E27FC236}">
-                <a16:creationId xmlns:a16="http://schemas.microsoft.com/office/drawing/2014/main" id="{C189E179-9AB0-4090-A5AD-CDB856A46EBC}"/>
+                <a16:creationId xmlns:a16="http://schemas.microsoft.com/office/drawing/2014/main" id="{068E0973-7AB7-44E6-9054-99D486D9BD60}"/>
               </a:ext>
             </a:extLst>
           </p:cNvPr>
@@ -39074,7 +37601,7 @@
         </p:nvSpPr>
         <p:spPr>
           <a:xfrm xmlns:a="http://schemas.openxmlformats.org/drawingml/2006/main">
-            <a:off x="590550" y="3319463"/>
+            <a:off x="590550" y="3919538"/>
             <a:ext cx="619125" cy="571500"/>
           </a:xfrm>
           <a:prstGeom xmlns:a="http://schemas.openxmlformats.org/drawingml/2006/main" prst="rect">
@@ -39221,7 +37748,7 @@
           <p:cNvPr id="9" name="">
             <a:extLst xmlns:a="http://schemas.openxmlformats.org/drawingml/2006/main">
               <a:ext uri="{FF2B5EF4-FFF2-40B4-BE49-F238E27FC236}">
-                <a16:creationId xmlns:a16="http://schemas.microsoft.com/office/drawing/2014/main" id="{0A52C0FD-88E4-4D16-8BCC-8C6078F2C99D}"/>
+                <a16:creationId xmlns:a16="http://schemas.microsoft.com/office/drawing/2014/main" id="{81CDE278-17B0-4BE2-9541-BC07770E6279}"/>
               </a:ext>
             </a:extLst>
           </p:cNvPr>
@@ -39232,8 +37759,8 @@
         </p:nvSpPr>
         <p:spPr>
           <a:xfrm xmlns:a="http://schemas.openxmlformats.org/drawingml/2006/main">
-            <a:off x="1381125" y="3319463"/>
-            <a:ext cx="10096500" cy="721519"/>
+            <a:off x="1381125" y="3919538"/>
+            <a:ext cx="10096500" cy="992981"/>
           </a:xfrm>
           <a:prstGeom xmlns:a="http://schemas.openxmlformats.org/drawingml/2006/main" prst="rect">
             <a:avLst/>
@@ -39369,7 +37896,7 @@
                 <a:ea typeface="Calibri"/>
                 <a:cs typeface="Calibri"/>
               </a:rPr>
-              <a:t>Use your full Student Registration Number in the form.</a:t>
+              <a:t>State target units, reasons and limitations.</a:t>
             </a:r>
           </a:p>
         </p:txBody>
@@ -39379,7 +37906,7 @@
           <p:cNvPr id="10" name="">
             <a:extLst xmlns:a="http://schemas.openxmlformats.org/drawingml/2006/main">
               <a:ext uri="{FF2B5EF4-FFF2-40B4-BE49-F238E27FC236}">
-                <a16:creationId xmlns:a16="http://schemas.microsoft.com/office/drawing/2014/main" id="{63C7B11C-2DC9-4265-812E-4564BAE64073}"/>
+                <a16:creationId xmlns:a16="http://schemas.microsoft.com/office/drawing/2014/main" id="{812396AD-61A9-4F70-8406-C674A29C9FCA}"/>
               </a:ext>
             </a:extLst>
           </p:cNvPr>
@@ -39390,7 +37917,7 @@
         </p:nvSpPr>
         <p:spPr>
           <a:xfrm xmlns:a="http://schemas.openxmlformats.org/drawingml/2006/main">
-            <a:off x="590550" y="4117181"/>
+            <a:off x="590550" y="4988719"/>
             <a:ext cx="619125" cy="571500"/>
           </a:xfrm>
           <a:prstGeom xmlns:a="http://schemas.openxmlformats.org/drawingml/2006/main" prst="rect">
@@ -39537,7 +38064,7 @@
           <p:cNvPr id="11" name="">
             <a:extLst xmlns:a="http://schemas.openxmlformats.org/drawingml/2006/main">
               <a:ext uri="{FF2B5EF4-FFF2-40B4-BE49-F238E27FC236}">
-                <a16:creationId xmlns:a16="http://schemas.microsoft.com/office/drawing/2014/main" id="{BEDF19C6-644A-445A-B703-10C2DE4E6A51}"/>
+                <a16:creationId xmlns:a16="http://schemas.microsoft.com/office/drawing/2014/main" id="{7E048161-E37C-45B3-97D0-DC91CE4DD333}"/>
               </a:ext>
             </a:extLst>
           </p:cNvPr>
@@ -39548,8 +38075,8 @@
         </p:nvSpPr>
         <p:spPr>
           <a:xfrm xmlns:a="http://schemas.openxmlformats.org/drawingml/2006/main">
-            <a:off x="1381125" y="4117181"/>
-            <a:ext cx="10096500" cy="721519"/>
+            <a:off x="1381125" y="4988719"/>
+            <a:ext cx="10096500" cy="992981"/>
           </a:xfrm>
           <a:prstGeom xmlns:a="http://schemas.openxmlformats.org/drawingml/2006/main" prst="rect">
             <a:avLst/>
@@ -39685,7 +38212,7 @@
                 <a:ea typeface="Calibri"/>
                 <a:cs typeface="Calibri"/>
               </a:rPr>
-              <a:t>Keep the submitted files and confirmation.</a:t>
+              <a:t>Submit one complete notebook containing code and written evidence.</a:t>
             </a:r>
           </a:p>
         </p:txBody>
@@ -39695,358 +38222,7 @@
           <p:cNvPr id="12" name="">
             <a:extLst xmlns:a="http://schemas.openxmlformats.org/drawingml/2006/main">
               <a:ext uri="{FF2B5EF4-FFF2-40B4-BE49-F238E27FC236}">
-                <a16:creationId xmlns:a16="http://schemas.microsoft.com/office/drawing/2014/main" id="{8F1050CC-D189-44D3-BCE4-3DE59604EF59}"/>
-              </a:ext>
-            </a:extLst>
-          </p:cNvPr>
-          <p:cNvSpPr>
-            <a:spLocks xmlns:a="http://schemas.openxmlformats.org/drawingml/2006/main" noGrp="1"/>
-          </p:cNvSpPr>
-          <p:nvPr/>
-        </p:nvSpPr>
-        <p:spPr>
-          <a:xfrm xmlns:a="http://schemas.openxmlformats.org/drawingml/2006/main">
-            <a:off x="590550" y="5143500"/>
-            <a:ext cx="11010900" cy="657225"/>
-          </a:xfrm>
-          <a:prstGeom xmlns:a="http://schemas.openxmlformats.org/drawingml/2006/main" prst="rect">
-            <a:avLst/>
-          </a:prstGeom>
-          <a:solidFill xmlns:a="http://schemas.openxmlformats.org/drawingml/2006/main">
-            <a:srgbClr val="E5F1EE"/>
-          </a:solidFill>
-          <a:ln xmlns:a="http://schemas.openxmlformats.org/drawingml/2006/main" w="0">
-            <a:noFill/>
-          </a:ln>
-        </p:spPr>
-        <p:txBody xmlns:a="http://schemas.openxmlformats.org/drawingml/2006/main">
-          <a:bodyPr/>
-          <a:p/>
-        </p:txBody>
-      </p:sp>
-      <p:sp>
-        <p:nvSpPr>
-          <p:cNvPr id="13" name="">
-            <a:extLst xmlns:a="http://schemas.openxmlformats.org/drawingml/2006/main">
-              <a:ext uri="{FF2B5EF4-FFF2-40B4-BE49-F238E27FC236}">
-                <a16:creationId xmlns:a16="http://schemas.microsoft.com/office/drawing/2014/main" id="{0F985771-843A-4A7A-9B2D-2A6533CCD9B9}"/>
-              </a:ext>
-            </a:extLst>
-          </p:cNvPr>
-          <p:cNvSpPr>
-            <a:spLocks xmlns:a="http://schemas.openxmlformats.org/drawingml/2006/main" noGrp="1"/>
-          </p:cNvSpPr>
-          <p:nvPr/>
-        </p:nvSpPr>
-        <p:spPr>
-          <a:xfrm xmlns:a="http://schemas.openxmlformats.org/drawingml/2006/main">
-            <a:off x="800100" y="5267325"/>
-            <a:ext cx="10572750" cy="457200"/>
-          </a:xfrm>
-          <a:prstGeom xmlns:a="http://schemas.openxmlformats.org/drawingml/2006/main" prst="rect">
-            <a:avLst/>
-          </a:prstGeom>
-          <a:noFill xmlns:a="http://schemas.openxmlformats.org/drawingml/2006/main"/>
-          <a:ln xmlns:a="http://schemas.openxmlformats.org/drawingml/2006/main" w="0">
-            <a:noFill/>
-          </a:ln>
-        </p:spPr>
-        <p:txBody>
-          <a:bodyPr xmlns:a="http://schemas.openxmlformats.org/drawingml/2006/main">
-            <a:noAutofit/>
-          </a:bodyPr>
-          <a:lstStyle xmlns:a="http://schemas.openxmlformats.org/drawingml/2006/main">
-            <a:defPPr>
-              <a:defRPr sz="2250" b="1">
-                <a:solidFill>
-                  <a:srgbClr val="2E7D6F"/>
-                </a:solidFill>
-                <a:latin typeface="Calibri"/>
-                <a:ea typeface="Calibri"/>
-                <a:cs typeface="Calibri"/>
-              </a:defRPr>
-            </a:defPPr>
-            <a:lvl1pPr>
-              <a:defRPr sz="2250" b="1">
-                <a:solidFill>
-                  <a:srgbClr val="2E7D6F"/>
-                </a:solidFill>
-                <a:latin typeface="Calibri"/>
-                <a:ea typeface="Calibri"/>
-                <a:cs typeface="Calibri"/>
-              </a:defRPr>
-            </a:lvl1pPr>
-            <a:lvl2pPr>
-              <a:defRPr sz="2250" b="1">
-                <a:solidFill>
-                  <a:srgbClr val="2E7D6F"/>
-                </a:solidFill>
-                <a:latin typeface="Calibri"/>
-                <a:ea typeface="Calibri"/>
-                <a:cs typeface="Calibri"/>
-              </a:defRPr>
-            </a:lvl2pPr>
-            <a:lvl3pPr>
-              <a:defRPr sz="2250" b="1">
-                <a:solidFill>
-                  <a:srgbClr val="2E7D6F"/>
-                </a:solidFill>
-                <a:latin typeface="Calibri"/>
-                <a:ea typeface="Calibri"/>
-                <a:cs typeface="Calibri"/>
-              </a:defRPr>
-            </a:lvl3pPr>
-            <a:lvl4pPr>
-              <a:defRPr sz="2250" b="1">
-                <a:solidFill>
-                  <a:srgbClr val="2E7D6F"/>
-                </a:solidFill>
-                <a:latin typeface="Calibri"/>
-                <a:ea typeface="Calibri"/>
-                <a:cs typeface="Calibri"/>
-              </a:defRPr>
-            </a:lvl4pPr>
-            <a:lvl5pPr>
-              <a:defRPr sz="2250" b="1">
-                <a:solidFill>
-                  <a:srgbClr val="2E7D6F"/>
-                </a:solidFill>
-                <a:latin typeface="Calibri"/>
-                <a:ea typeface="Calibri"/>
-                <a:cs typeface="Calibri"/>
-              </a:defRPr>
-            </a:lvl5pPr>
-            <a:lvl6pPr>
-              <a:defRPr sz="2250" b="1">
-                <a:solidFill>
-                  <a:srgbClr val="2E7D6F"/>
-                </a:solidFill>
-                <a:latin typeface="Calibri"/>
-                <a:ea typeface="Calibri"/>
-                <a:cs typeface="Calibri"/>
-              </a:defRPr>
-            </a:lvl6pPr>
-            <a:lvl7pPr>
-              <a:defRPr sz="2250" b="1">
-                <a:solidFill>
-                  <a:srgbClr val="2E7D6F"/>
-                </a:solidFill>
-                <a:latin typeface="Calibri"/>
-                <a:ea typeface="Calibri"/>
-                <a:cs typeface="Calibri"/>
-              </a:defRPr>
-            </a:lvl7pPr>
-            <a:lvl8pPr>
-              <a:defRPr sz="2250" b="1">
-                <a:solidFill>
-                  <a:srgbClr val="2E7D6F"/>
-                </a:solidFill>
-                <a:latin typeface="Calibri"/>
-                <a:ea typeface="Calibri"/>
-                <a:cs typeface="Calibri"/>
-              </a:defRPr>
-            </a:lvl8pPr>
-            <a:lvl9pPr>
-              <a:defRPr sz="2250" b="1">
-                <a:solidFill>
-                  <a:srgbClr val="2E7D6F"/>
-                </a:solidFill>
-                <a:latin typeface="Calibri"/>
-                <a:ea typeface="Calibri"/>
-                <a:cs typeface="Calibri"/>
-              </a:defRPr>
-            </a:lvl9pPr>
-          </a:lstStyle>
-          <a:p xmlns:a="http://schemas.openxmlformats.org/drawingml/2006/main">
-            <a:pPr>
-              <a:defRPr sz="2250" b="1">
-                <a:solidFill>
-                  <a:srgbClr val="2E7D6F"/>
-                </a:solidFill>
-                <a:latin typeface="Calibri"/>
-                <a:ea typeface="Calibri"/>
-                <a:cs typeface="Calibri"/>
-              </a:defRPr>
-            </a:pPr>
-            <a:r>
-              <a:rPr sz="2250" b="1">
-                <a:solidFill>
-                  <a:srgbClr val="2E7D6F"/>
-                </a:solidFill>
-                <a:latin typeface="Calibri"/>
-                <a:ea typeface="Calibri"/>
-                <a:cs typeface="Calibri"/>
-                <a:hlinkClick xmlns:r="http://schemas.openxmlformats.org/officeDocument/2006/relationships" r:id="Re47c8274093d48ea"/>
-              </a:rPr>
-              <a:t>Open W12 assignment form</a:t>
-            </a:r>
-          </a:p>
-        </p:txBody>
-      </p:sp>
-      <p:sp>
-        <p:nvSpPr>
-          <p:cNvPr id="14" name="">
-            <a:extLst xmlns:a="http://schemas.openxmlformats.org/drawingml/2006/main">
-              <a:ext uri="{FF2B5EF4-FFF2-40B4-BE49-F238E27FC236}">
-                <a16:creationId xmlns:a16="http://schemas.microsoft.com/office/drawing/2014/main" id="{A33F0705-9B0D-486B-A7A0-4F18E59DBF83}"/>
-              </a:ext>
-            </a:extLst>
-          </p:cNvPr>
-          <p:cNvSpPr>
-            <a:spLocks xmlns:a="http://schemas.openxmlformats.org/drawingml/2006/main" noGrp="1"/>
-          </p:cNvSpPr>
-          <p:nvPr/>
-        </p:nvSpPr>
-        <p:spPr>
-          <a:xfrm xmlns:a="http://schemas.openxmlformats.org/drawingml/2006/main">
-            <a:off x="685800" y="5972175"/>
-            <a:ext cx="10668000" cy="304800"/>
-          </a:xfrm>
-          <a:prstGeom xmlns:a="http://schemas.openxmlformats.org/drawingml/2006/main" prst="rect">
-            <a:avLst/>
-          </a:prstGeom>
-          <a:noFill xmlns:a="http://schemas.openxmlformats.org/drawingml/2006/main"/>
-          <a:ln xmlns:a="http://schemas.openxmlformats.org/drawingml/2006/main" w="0">
-            <a:noFill/>
-          </a:ln>
-        </p:spPr>
-        <p:txBody>
-          <a:bodyPr xmlns:a="http://schemas.openxmlformats.org/drawingml/2006/main">
-            <a:noAutofit/>
-          </a:bodyPr>
-          <a:lstStyle xmlns:a="http://schemas.openxmlformats.org/drawingml/2006/main">
-            <a:defPPr>
-              <a:defRPr sz="1275" b="0">
-                <a:solidFill>
-                  <a:srgbClr val="6B7A8A"/>
-                </a:solidFill>
-                <a:latin typeface="Calibri"/>
-                <a:ea typeface="Calibri"/>
-                <a:cs typeface="Calibri"/>
-              </a:defRPr>
-            </a:defPPr>
-            <a:lvl1pPr>
-              <a:defRPr sz="1275" b="0">
-                <a:solidFill>
-                  <a:srgbClr val="6B7A8A"/>
-                </a:solidFill>
-                <a:latin typeface="Calibri"/>
-                <a:ea typeface="Calibri"/>
-                <a:cs typeface="Calibri"/>
-              </a:defRPr>
-            </a:lvl1pPr>
-            <a:lvl2pPr>
-              <a:defRPr sz="1275" b="0">
-                <a:solidFill>
-                  <a:srgbClr val="6B7A8A"/>
-                </a:solidFill>
-                <a:latin typeface="Calibri"/>
-                <a:ea typeface="Calibri"/>
-                <a:cs typeface="Calibri"/>
-              </a:defRPr>
-            </a:lvl2pPr>
-            <a:lvl3pPr>
-              <a:defRPr sz="1275" b="0">
-                <a:solidFill>
-                  <a:srgbClr val="6B7A8A"/>
-                </a:solidFill>
-                <a:latin typeface="Calibri"/>
-                <a:ea typeface="Calibri"/>
-                <a:cs typeface="Calibri"/>
-              </a:defRPr>
-            </a:lvl3pPr>
-            <a:lvl4pPr>
-              <a:defRPr sz="1275" b="0">
-                <a:solidFill>
-                  <a:srgbClr val="6B7A8A"/>
-                </a:solidFill>
-                <a:latin typeface="Calibri"/>
-                <a:ea typeface="Calibri"/>
-                <a:cs typeface="Calibri"/>
-              </a:defRPr>
-            </a:lvl4pPr>
-            <a:lvl5pPr>
-              <a:defRPr sz="1275" b="0">
-                <a:solidFill>
-                  <a:srgbClr val="6B7A8A"/>
-                </a:solidFill>
-                <a:latin typeface="Calibri"/>
-                <a:ea typeface="Calibri"/>
-                <a:cs typeface="Calibri"/>
-              </a:defRPr>
-            </a:lvl5pPr>
-            <a:lvl6pPr>
-              <a:defRPr sz="1275" b="0">
-                <a:solidFill>
-                  <a:srgbClr val="6B7A8A"/>
-                </a:solidFill>
-                <a:latin typeface="Calibri"/>
-                <a:ea typeface="Calibri"/>
-                <a:cs typeface="Calibri"/>
-              </a:defRPr>
-            </a:lvl6pPr>
-            <a:lvl7pPr>
-              <a:defRPr sz="1275" b="0">
-                <a:solidFill>
-                  <a:srgbClr val="6B7A8A"/>
-                </a:solidFill>
-                <a:latin typeface="Calibri"/>
-                <a:ea typeface="Calibri"/>
-                <a:cs typeface="Calibri"/>
-              </a:defRPr>
-            </a:lvl7pPr>
-            <a:lvl8pPr>
-              <a:defRPr sz="1275" b="0">
-                <a:solidFill>
-                  <a:srgbClr val="6B7A8A"/>
-                </a:solidFill>
-                <a:latin typeface="Calibri"/>
-                <a:ea typeface="Calibri"/>
-                <a:cs typeface="Calibri"/>
-              </a:defRPr>
-            </a:lvl8pPr>
-            <a:lvl9pPr>
-              <a:defRPr sz="1275" b="0">
-                <a:solidFill>
-                  <a:srgbClr val="6B7A8A"/>
-                </a:solidFill>
-                <a:latin typeface="Calibri"/>
-                <a:ea typeface="Calibri"/>
-                <a:cs typeface="Calibri"/>
-              </a:defRPr>
-            </a:lvl9pPr>
-          </a:lstStyle>
-          <a:p xmlns:a="http://schemas.openxmlformats.org/drawingml/2006/main">
-            <a:pPr>
-              <a:defRPr sz="1275" b="0">
-                <a:solidFill>
-                  <a:srgbClr val="6B7A8A"/>
-                </a:solidFill>
-                <a:latin typeface="Calibri"/>
-                <a:ea typeface="Calibri"/>
-                <a:cs typeface="Calibri"/>
-              </a:defRPr>
-            </a:pPr>
-            <a:r>
-              <a:rPr sz="1275" b="0">
-                <a:solidFill>
-                  <a:srgbClr val="6B7A8A"/>
-                </a:solidFill>
-                <a:latin typeface="Calibri"/>
-                <a:ea typeface="Calibri"/>
-                <a:cs typeface="Calibri"/>
-              </a:rPr>
-              <a:t>https://docs.google.com/forms/d/e/1FAIpQLSfSPtMfaziLgaLKx4v0Lla4vYcA58pDDv_b_w33OfZsj0aVHA/viewform</a:t>
-            </a:r>
-          </a:p>
-        </p:txBody>
-      </p:sp>
-      <p:sp>
-        <p:nvSpPr>
-          <p:cNvPr id="15" name="">
-            <a:extLst xmlns:a="http://schemas.openxmlformats.org/drawingml/2006/main">
-              <a:ext uri="{FF2B5EF4-FFF2-40B4-BE49-F238E27FC236}">
-                <a16:creationId xmlns:a16="http://schemas.microsoft.com/office/drawing/2014/main" id="{FC8A124C-BAE5-4C10-8AC9-E247C4256598}"/>
+                <a16:creationId xmlns:a16="http://schemas.microsoft.com/office/drawing/2014/main" id="{6066009B-7A2F-47C3-B932-99D9E8BB0615}"/>
               </a:ext>
             </a:extLst>
           </p:cNvPr>
@@ -40202,7 +38378,7 @@
     </p:spTree>
     <p:extLst>
       <p:ext uri="{BB962C8B-B14F-4D97-AF65-F5344CB8AC3E}">
-        <p14:creationId xmlns:p14="http://schemas.microsoft.com/office/powerpoint/2010/main" val="150546360"/>
+        <p14:creationId xmlns:p14="http://schemas.microsoft.com/office/powerpoint/2010/main" val="540007357"/>
       </p:ext>
     </p:extLst>
   </p:cSld>
@@ -42693,201 +40869,85 @@
 </file>
 
 <file path=ppt/slides/slide43.xml><?xml version="1.0" encoding="utf-8"?>
-<p:sld xmlns:p="http://schemas.openxmlformats.org/presentationml/2006/main">
+<p:sld xmlns:a="http://schemas.openxmlformats.org/drawingml/2006/main" xmlns:p="http://schemas.openxmlformats.org/presentationml/2006/main" xmlns:r="http://schemas.openxmlformats.org/officeDocument/2006/relationships">
   <p:cSld>
-    <p:bg>
-      <p:bgPr>
-        <a:solidFill xmlns:a="http://schemas.openxmlformats.org/drawingml/2006/main">
-          <a:srgbClr val="FFFFFF"/>
-        </a:solidFill>
-      </p:bgPr>
-    </p:bg>
     <p:spTree>
       <p:nvGrpSpPr>
         <p:cNvPr id="1" name=""/>
         <p:cNvGrpSpPr/>
         <p:nvPr/>
       </p:nvGrpSpPr>
-      <p:grpSpPr>
-        <a:xfrm xmlns:a="http://schemas.openxmlformats.org/drawingml/2006/main"/>
-      </p:grpSpPr>
+      <p:grpSpPr/>
       <p:sp>
         <p:nvSpPr>
-          <p:cNvPr id="18" name="">
-            <a:extLst xmlns:a="http://schemas.openxmlformats.org/drawingml/2006/main">
-              <a:ext uri="{FF2B5EF4-FFF2-40B4-BE49-F238E27FC236}">
-                <a16:creationId xmlns:a16="http://schemas.microsoft.com/office/drawing/2014/main" id="{83FEA9A0-64D9-4B7C-BE54-9E96793AF8CC}"/>
-              </a:ext>
-            </a:extLst>
-          </p:cNvPr>
-          <p:cNvSpPr>
-            <a:spLocks xmlns:a="http://schemas.openxmlformats.org/drawingml/2006/main" noGrp="1"/>
-          </p:cNvSpPr>
+          <p:cNvPr id="2" name="Rectangle 1"/>
+          <p:cNvSpPr/>
           <p:nvPr/>
         </p:nvSpPr>
         <p:spPr>
-          <a:xfrm xmlns:a="http://schemas.openxmlformats.org/drawingml/2006/main">
+          <a:xfrm>
             <a:off x="0" y="0"/>
-            <a:ext cx="12191695" cy="1390650"/>
+            <a:ext cx="12192000" cy="1397000"/>
           </a:xfrm>
-          <a:prstGeom xmlns:a="http://schemas.openxmlformats.org/drawingml/2006/main" prst="rect">
+          <a:prstGeom prst="rect">
             <a:avLst/>
           </a:prstGeom>
-          <a:solidFill xmlns:a="http://schemas.openxmlformats.org/drawingml/2006/main">
+          <a:solidFill>
             <a:srgbClr val="1C3144"/>
           </a:solidFill>
-          <a:ln xmlns:a="http://schemas.openxmlformats.org/drawingml/2006/main" w="0">
+          <a:ln>
             <a:noFill/>
           </a:ln>
+          <a:effectLst/>
         </p:spPr>
-        <p:txBody xmlns:a="http://schemas.openxmlformats.org/drawingml/2006/main">
-          <a:bodyPr/>
-          <a:p/>
+        <p:style>
+          <a:lnRef idx="1">
+            <a:schemeClr val="accent1"/>
+          </a:lnRef>
+          <a:fillRef idx="3">
+            <a:schemeClr val="accent1"/>
+          </a:fillRef>
+          <a:effectRef idx="2">
+            <a:schemeClr val="accent1"/>
+          </a:effectRef>
+          <a:fontRef idx="minor">
+            <a:schemeClr val="lt1"/>
+          </a:fontRef>
+        </p:style>
+        <p:txBody>
+          <a:bodyPr rtlCol="0" anchor="ctr"/>
+          <a:lstStyle/>
+          <a:p>
+            <a:pPr algn="ctr"/>
+          </a:p>
         </p:txBody>
       </p:sp>
       <p:sp>
         <p:nvSpPr>
-          <p:cNvPr id="2" name="">
-            <a:extLst xmlns:a="http://schemas.openxmlformats.org/drawingml/2006/main">
-              <a:ext uri="{FF2B5EF4-FFF2-40B4-BE49-F238E27FC236}">
-                <a16:creationId xmlns:a16="http://schemas.microsoft.com/office/drawing/2014/main" id="{D78BB8FA-CD93-4151-8EA1-CA3E374C352B}"/>
-              </a:ext>
-            </a:extLst>
-          </p:cNvPr>
-          <p:cNvSpPr>
-            <a:spLocks xmlns:a="http://schemas.openxmlformats.org/drawingml/2006/main" noGrp="1"/>
-          </p:cNvSpPr>
+          <p:cNvPr id="3" name="TextBox 2"/>
+          <p:cNvSpPr txBox="1"/>
           <p:nvPr/>
         </p:nvSpPr>
         <p:spPr>
-          <a:xfrm xmlns:a="http://schemas.openxmlformats.org/drawingml/2006/main">
-            <a:off x="590550" y="180975"/>
-            <a:ext cx="11049000" cy="285750"/>
+          <a:xfrm>
+            <a:off x="584200" y="177800"/>
+            <a:ext cx="11049000" cy="279400"/>
           </a:xfrm>
-          <a:prstGeom xmlns:a="http://schemas.openxmlformats.org/drawingml/2006/main" prst="rect">
+          <a:prstGeom prst="rect">
             <a:avLst/>
           </a:prstGeom>
-          <a:noFill xmlns:a="http://schemas.openxmlformats.org/drawingml/2006/main"/>
-          <a:ln xmlns:a="http://schemas.openxmlformats.org/drawingml/2006/main" w="0">
-            <a:noFill/>
-          </a:ln>
+          <a:noFill/>
         </p:spPr>
         <p:txBody>
-          <a:bodyPr xmlns:a="http://schemas.openxmlformats.org/drawingml/2006/main">
-            <a:noAutofit/>
+          <a:bodyPr wrap="square">
+            <a:spAutoFit/>
           </a:bodyPr>
-          <a:lstStyle xmlns:a="http://schemas.openxmlformats.org/drawingml/2006/main">
-            <a:defPPr>
-              <a:defRPr sz="1500" b="1">
-                <a:solidFill>
-                  <a:srgbClr val="E4572E"/>
-                </a:solidFill>
-                <a:latin typeface="Calibri"/>
-                <a:ea typeface="Calibri"/>
-                <a:cs typeface="Calibri"/>
-              </a:defRPr>
-            </a:defPPr>
-            <a:lvl1pPr>
-              <a:defRPr sz="1500" b="1">
-                <a:solidFill>
-                  <a:srgbClr val="E4572E"/>
-                </a:solidFill>
-                <a:latin typeface="Calibri"/>
-                <a:ea typeface="Calibri"/>
-                <a:cs typeface="Calibri"/>
-              </a:defRPr>
-            </a:lvl1pPr>
-            <a:lvl2pPr>
-              <a:defRPr sz="1500" b="1">
-                <a:solidFill>
-                  <a:srgbClr val="E4572E"/>
-                </a:solidFill>
-                <a:latin typeface="Calibri"/>
-                <a:ea typeface="Calibri"/>
-                <a:cs typeface="Calibri"/>
-              </a:defRPr>
-            </a:lvl2pPr>
-            <a:lvl3pPr>
-              <a:defRPr sz="1500" b="1">
-                <a:solidFill>
-                  <a:srgbClr val="E4572E"/>
-                </a:solidFill>
-                <a:latin typeface="Calibri"/>
-                <a:ea typeface="Calibri"/>
-                <a:cs typeface="Calibri"/>
-              </a:defRPr>
-            </a:lvl3pPr>
-            <a:lvl4pPr>
-              <a:defRPr sz="1500" b="1">
-                <a:solidFill>
-                  <a:srgbClr val="E4572E"/>
-                </a:solidFill>
-                <a:latin typeface="Calibri"/>
-                <a:ea typeface="Calibri"/>
-                <a:cs typeface="Calibri"/>
-              </a:defRPr>
-            </a:lvl4pPr>
-            <a:lvl5pPr>
-              <a:defRPr sz="1500" b="1">
-                <a:solidFill>
-                  <a:srgbClr val="E4572E"/>
-                </a:solidFill>
-                <a:latin typeface="Calibri"/>
-                <a:ea typeface="Calibri"/>
-                <a:cs typeface="Calibri"/>
-              </a:defRPr>
-            </a:lvl5pPr>
-            <a:lvl6pPr>
-              <a:defRPr sz="1500" b="1">
-                <a:solidFill>
-                  <a:srgbClr val="E4572E"/>
-                </a:solidFill>
-                <a:latin typeface="Calibri"/>
-                <a:ea typeface="Calibri"/>
-                <a:cs typeface="Calibri"/>
-              </a:defRPr>
-            </a:lvl6pPr>
-            <a:lvl7pPr>
-              <a:defRPr sz="1500" b="1">
-                <a:solidFill>
-                  <a:srgbClr val="E4572E"/>
-                </a:solidFill>
-                <a:latin typeface="Calibri"/>
-                <a:ea typeface="Calibri"/>
-                <a:cs typeface="Calibri"/>
-              </a:defRPr>
-            </a:lvl7pPr>
-            <a:lvl8pPr>
-              <a:defRPr sz="1500" b="1">
-                <a:solidFill>
-                  <a:srgbClr val="E4572E"/>
-                </a:solidFill>
-                <a:latin typeface="Calibri"/>
-                <a:ea typeface="Calibri"/>
-                <a:cs typeface="Calibri"/>
-              </a:defRPr>
-            </a:lvl8pPr>
-            <a:lvl9pPr>
-              <a:defRPr sz="1500" b="1">
-                <a:solidFill>
-                  <a:srgbClr val="E4572E"/>
-                </a:solidFill>
-                <a:latin typeface="Calibri"/>
-                <a:ea typeface="Calibri"/>
-                <a:cs typeface="Calibri"/>
-              </a:defRPr>
-            </a:lvl9pPr>
-          </a:lstStyle>
-          <a:p xmlns:a="http://schemas.openxmlformats.org/drawingml/2006/main">
+          <a:lstStyle/>
+          <a:p>
             <a:pPr>
-              <a:defRPr sz="1500" b="1">
-                <a:solidFill>
-                  <a:srgbClr val="E4572E"/>
-                </a:solidFill>
-                <a:latin typeface="Calibri"/>
-                <a:ea typeface="Calibri"/>
-                <a:cs typeface="Calibri"/>
-              </a:defRPr>
+              <a:spcAft>
+                <a:spcPts val="0"/>
+              </a:spcAft>
             </a:pPr>
             <a:r>
               <a:rPr sz="1500" b="1">
@@ -42895,324 +40955,84 @@
                   <a:srgbClr val="E4572E"/>
                 </a:solidFill>
                 <a:latin typeface="Calibri"/>
-                <a:ea typeface="Calibri"/>
-                <a:cs typeface="Calibri"/>
               </a:rPr>
-              <a:t>QUIZ ACCESS</a:t>
+              <a:t>ASSIGNMENT SUBMISSION</a:t>
             </a:r>
           </a:p>
         </p:txBody>
       </p:sp>
       <p:sp>
         <p:nvSpPr>
-          <p:cNvPr id="3" name="">
-            <a:extLst xmlns:a="http://schemas.openxmlformats.org/drawingml/2006/main">
-              <a:ext uri="{FF2B5EF4-FFF2-40B4-BE49-F238E27FC236}">
-                <a16:creationId xmlns:a16="http://schemas.microsoft.com/office/drawing/2014/main" id="{319D7750-7150-4712-B21B-BE9AB1E0B3AD}"/>
-              </a:ext>
-            </a:extLst>
-          </p:cNvPr>
-          <p:cNvSpPr>
-            <a:spLocks xmlns:a="http://schemas.openxmlformats.org/drawingml/2006/main" noGrp="1"/>
-          </p:cNvSpPr>
+          <p:cNvPr id="4" name="TextBox 3"/>
+          <p:cNvSpPr txBox="1"/>
           <p:nvPr/>
         </p:nvSpPr>
         <p:spPr>
-          <a:xfrm xmlns:a="http://schemas.openxmlformats.org/drawingml/2006/main">
-            <a:off x="590550" y="523875"/>
-            <a:ext cx="11049000" cy="809625"/>
+          <a:xfrm>
+            <a:off x="584200" y="520700"/>
+            <a:ext cx="11049000" cy="812800"/>
           </a:xfrm>
-          <a:prstGeom xmlns:a="http://schemas.openxmlformats.org/drawingml/2006/main" prst="rect">
+          <a:prstGeom prst="rect">
             <a:avLst/>
           </a:prstGeom>
-          <a:noFill xmlns:a="http://schemas.openxmlformats.org/drawingml/2006/main"/>
-          <a:ln xmlns:a="http://schemas.openxmlformats.org/drawingml/2006/main" w="0">
-            <a:noFill/>
-          </a:ln>
+          <a:noFill/>
         </p:spPr>
         <p:txBody>
-          <a:bodyPr xmlns:a="http://schemas.openxmlformats.org/drawingml/2006/main">
-            <a:noAutofit/>
+          <a:bodyPr wrap="square">
+            <a:spAutoFit/>
           </a:bodyPr>
-          <a:lstStyle xmlns:a="http://schemas.openxmlformats.org/drawingml/2006/main">
-            <a:defPPr>
-              <a:defRPr sz="3150" b="1">
+          <a:lstStyle/>
+          <a:p>
+            <a:pPr>
+              <a:spcAft>
+                <a:spcPts val="0"/>
+              </a:spcAft>
+            </a:pPr>
+            <a:r>
+              <a:rPr sz="3150" b="1">
                 <a:solidFill>
                   <a:srgbClr val="FFFFFF"/>
                 </a:solidFill>
                 <a:latin typeface="Calibri"/>
-                <a:ea typeface="Calibri"/>
-                <a:cs typeface="Calibri"/>
-              </a:defRPr>
-            </a:defPPr>
-            <a:lvl1pPr>
-              <a:defRPr sz="3150" b="1">
-                <a:solidFill>
-                  <a:srgbClr val="FFFFFF"/>
-                </a:solidFill>
-                <a:latin typeface="Calibri"/>
-                <a:ea typeface="Calibri"/>
-                <a:cs typeface="Calibri"/>
-              </a:defRPr>
-            </a:lvl1pPr>
-            <a:lvl2pPr>
-              <a:defRPr sz="3150" b="1">
-                <a:solidFill>
-                  <a:srgbClr val="FFFFFF"/>
-                </a:solidFill>
-                <a:latin typeface="Calibri"/>
-                <a:ea typeface="Calibri"/>
-                <a:cs typeface="Calibri"/>
-              </a:defRPr>
-            </a:lvl2pPr>
-            <a:lvl3pPr>
-              <a:defRPr sz="3150" b="1">
-                <a:solidFill>
-                  <a:srgbClr val="FFFFFF"/>
-                </a:solidFill>
-                <a:latin typeface="Calibri"/>
-                <a:ea typeface="Calibri"/>
-                <a:cs typeface="Calibri"/>
-              </a:defRPr>
-            </a:lvl3pPr>
-            <a:lvl4pPr>
-              <a:defRPr sz="3150" b="1">
-                <a:solidFill>
-                  <a:srgbClr val="FFFFFF"/>
-                </a:solidFill>
-                <a:latin typeface="Calibri"/>
-                <a:ea typeface="Calibri"/>
-                <a:cs typeface="Calibri"/>
-              </a:defRPr>
-            </a:lvl4pPr>
-            <a:lvl5pPr>
-              <a:defRPr sz="3150" b="1">
-                <a:solidFill>
-                  <a:srgbClr val="FFFFFF"/>
-                </a:solidFill>
-                <a:latin typeface="Calibri"/>
-                <a:ea typeface="Calibri"/>
-                <a:cs typeface="Calibri"/>
-              </a:defRPr>
-            </a:lvl5pPr>
-            <a:lvl6pPr>
-              <a:defRPr sz="3150" b="1">
-                <a:solidFill>
-                  <a:srgbClr val="FFFFFF"/>
-                </a:solidFill>
-                <a:latin typeface="Calibri"/>
-                <a:ea typeface="Calibri"/>
-                <a:cs typeface="Calibri"/>
-              </a:defRPr>
-            </a:lvl6pPr>
-            <a:lvl7pPr>
-              <a:defRPr sz="3150" b="1">
-                <a:solidFill>
-                  <a:srgbClr val="FFFFFF"/>
-                </a:solidFill>
-                <a:latin typeface="Calibri"/>
-                <a:ea typeface="Calibri"/>
-                <a:cs typeface="Calibri"/>
-              </a:defRPr>
-            </a:lvl7pPr>
-            <a:lvl8pPr>
-              <a:defRPr sz="3150" b="1">
-                <a:solidFill>
-                  <a:srgbClr val="FFFFFF"/>
-                </a:solidFill>
-                <a:latin typeface="Calibri"/>
-                <a:ea typeface="Calibri"/>
-                <a:cs typeface="Calibri"/>
-              </a:defRPr>
-            </a:lvl8pPr>
-            <a:lvl9pPr>
-              <a:defRPr sz="3150" b="1">
-                <a:solidFill>
-                  <a:srgbClr val="FFFFFF"/>
-                </a:solidFill>
-                <a:latin typeface="Calibri"/>
-                <a:ea typeface="Calibri"/>
-                <a:cs typeface="Calibri"/>
-              </a:defRPr>
-            </a:lvl9pPr>
-          </a:lstStyle>
-          <a:p xmlns:a="http://schemas.openxmlformats.org/drawingml/2006/main">
-            <a:pPr>
-              <a:defRPr sz="3150" b="1">
-                <a:solidFill>
-                  <a:srgbClr val="FFFFFF"/>
-                </a:solidFill>
-                <a:latin typeface="Calibri"/>
-                <a:ea typeface="Calibri"/>
-                <a:cs typeface="Calibri"/>
-              </a:defRPr>
-            </a:pPr>
-            <a:r>
-              <a:rPr sz="3150" b="1">
-                <a:solidFill>
-                  <a:srgbClr val="FFFFFF"/>
-                </a:solidFill>
-                <a:latin typeface="Calibri"/>
-                <a:ea typeface="Calibri"/>
-                <a:cs typeface="Calibri"/>
               </a:rPr>
-              <a:t>Week 12 quiz</a:t>
+              <a:t>Submit the Block 2 assignment pack</a:t>
             </a:r>
           </a:p>
         </p:txBody>
       </p:sp>
       <p:sp>
         <p:nvSpPr>
-          <p:cNvPr id="4" name="">
-            <a:extLst xmlns:a="http://schemas.openxmlformats.org/drawingml/2006/main">
-              <a:ext uri="{FF2B5EF4-FFF2-40B4-BE49-F238E27FC236}">
-                <a16:creationId xmlns:a16="http://schemas.microsoft.com/office/drawing/2014/main" id="{ADCF2ACA-0F35-4586-8037-36E3DE7E727D}"/>
-              </a:ext>
-            </a:extLst>
-          </p:cNvPr>
-          <p:cNvSpPr>
-            <a:spLocks xmlns:a="http://schemas.openxmlformats.org/drawingml/2006/main" noGrp="1"/>
-          </p:cNvSpPr>
+          <p:cNvPr id="5" name="TextBox 4"/>
+          <p:cNvSpPr txBox="1"/>
           <p:nvPr/>
         </p:nvSpPr>
         <p:spPr>
-          <a:xfrm xmlns:a="http://schemas.openxmlformats.org/drawingml/2006/main">
-            <a:off x="590550" y="1724025"/>
-            <a:ext cx="619125" cy="571500"/>
+          <a:xfrm>
+            <a:off x="584200" y="1676400"/>
+            <a:ext cx="762000" cy="508000"/>
           </a:xfrm>
-          <a:prstGeom xmlns:a="http://schemas.openxmlformats.org/drawingml/2006/main" prst="rect">
+          <a:prstGeom prst="rect">
             <a:avLst/>
           </a:prstGeom>
-          <a:noFill xmlns:a="http://schemas.openxmlformats.org/drawingml/2006/main"/>
-          <a:ln xmlns:a="http://schemas.openxmlformats.org/drawingml/2006/main" w="0">
-            <a:noFill/>
-          </a:ln>
+          <a:noFill/>
         </p:spPr>
         <p:txBody>
-          <a:bodyPr xmlns:a="http://schemas.openxmlformats.org/drawingml/2006/main">
-            <a:noAutofit/>
+          <a:bodyPr wrap="square">
+            <a:spAutoFit/>
           </a:bodyPr>
-          <a:lstStyle xmlns:a="http://schemas.openxmlformats.org/drawingml/2006/main">
-            <a:defPPr>
-              <a:defRPr sz="2550" b="1">
-                <a:solidFill>
-                  <a:srgbClr val="E4572E"/>
-                </a:solidFill>
-                <a:latin typeface="Calibri"/>
-                <a:ea typeface="Calibri"/>
-                <a:cs typeface="Calibri"/>
-              </a:defRPr>
-            </a:defPPr>
-            <a:lvl1pPr>
-              <a:defRPr sz="2550" b="1">
-                <a:solidFill>
-                  <a:srgbClr val="E4572E"/>
-                </a:solidFill>
-                <a:latin typeface="Calibri"/>
-                <a:ea typeface="Calibri"/>
-                <a:cs typeface="Calibri"/>
-              </a:defRPr>
-            </a:lvl1pPr>
-            <a:lvl2pPr>
-              <a:defRPr sz="2550" b="1">
-                <a:solidFill>
-                  <a:srgbClr val="E4572E"/>
-                </a:solidFill>
-                <a:latin typeface="Calibri"/>
-                <a:ea typeface="Calibri"/>
-                <a:cs typeface="Calibri"/>
-              </a:defRPr>
-            </a:lvl2pPr>
-            <a:lvl3pPr>
-              <a:defRPr sz="2550" b="1">
-                <a:solidFill>
-                  <a:srgbClr val="E4572E"/>
-                </a:solidFill>
-                <a:latin typeface="Calibri"/>
-                <a:ea typeface="Calibri"/>
-                <a:cs typeface="Calibri"/>
-              </a:defRPr>
-            </a:lvl3pPr>
-            <a:lvl4pPr>
-              <a:defRPr sz="2550" b="1">
-                <a:solidFill>
-                  <a:srgbClr val="E4572E"/>
-                </a:solidFill>
-                <a:latin typeface="Calibri"/>
-                <a:ea typeface="Calibri"/>
-                <a:cs typeface="Calibri"/>
-              </a:defRPr>
-            </a:lvl4pPr>
-            <a:lvl5pPr>
-              <a:defRPr sz="2550" b="1">
-                <a:solidFill>
-                  <a:srgbClr val="E4572E"/>
-                </a:solidFill>
-                <a:latin typeface="Calibri"/>
-                <a:ea typeface="Calibri"/>
-                <a:cs typeface="Calibri"/>
-              </a:defRPr>
-            </a:lvl5pPr>
-            <a:lvl6pPr>
-              <a:defRPr sz="2550" b="1">
-                <a:solidFill>
-                  <a:srgbClr val="E4572E"/>
-                </a:solidFill>
-                <a:latin typeface="Calibri"/>
-                <a:ea typeface="Calibri"/>
-                <a:cs typeface="Calibri"/>
-              </a:defRPr>
-            </a:lvl6pPr>
-            <a:lvl7pPr>
-              <a:defRPr sz="2550" b="1">
-                <a:solidFill>
-                  <a:srgbClr val="E4572E"/>
-                </a:solidFill>
-                <a:latin typeface="Calibri"/>
-                <a:ea typeface="Calibri"/>
-                <a:cs typeface="Calibri"/>
-              </a:defRPr>
-            </a:lvl7pPr>
-            <a:lvl8pPr>
-              <a:defRPr sz="2550" b="1">
-                <a:solidFill>
-                  <a:srgbClr val="E4572E"/>
-                </a:solidFill>
-                <a:latin typeface="Calibri"/>
-                <a:ea typeface="Calibri"/>
-                <a:cs typeface="Calibri"/>
-              </a:defRPr>
-            </a:lvl8pPr>
-            <a:lvl9pPr>
-              <a:defRPr sz="2550" b="1">
-                <a:solidFill>
-                  <a:srgbClr val="E4572E"/>
-                </a:solidFill>
-                <a:latin typeface="Calibri"/>
-                <a:ea typeface="Calibri"/>
-                <a:cs typeface="Calibri"/>
-              </a:defRPr>
-            </a:lvl9pPr>
-          </a:lstStyle>
-          <a:p xmlns:a="http://schemas.openxmlformats.org/drawingml/2006/main">
+          <a:lstStyle/>
+          <a:p>
             <a:pPr>
-              <a:defRPr sz="2550" b="1">
-                <a:solidFill>
-                  <a:srgbClr val="E4572E"/>
-                </a:solidFill>
-                <a:latin typeface="Calibri"/>
-                <a:ea typeface="Calibri"/>
-                <a:cs typeface="Calibri"/>
-              </a:defRPr>
+              <a:spcAft>
+                <a:spcPts val="0"/>
+              </a:spcAft>
             </a:pPr>
             <a:r>
-              <a:rPr sz="2550" b="1">
-                <a:solidFill>
-                  <a:srgbClr val="E4572E"/>
-                </a:solidFill>
-                <a:latin typeface="Calibri"/>
-                <a:ea typeface="Calibri"/>
-                <a:cs typeface="Calibri"/>
+              <a:rPr sz="3000" b="1">
+                <a:solidFill>
+                  <a:srgbClr val="E4572E"/>
+                </a:solidFill>
+                <a:latin typeface="Calibri"/>
               </a:rPr>
               <a:t>01</a:t>
             </a:r>
@@ -43221,1799 +41041,307 @@
       </p:sp>
       <p:sp>
         <p:nvSpPr>
-          <p:cNvPr id="5" name="">
-            <a:extLst xmlns:a="http://schemas.openxmlformats.org/drawingml/2006/main">
-              <a:ext uri="{FF2B5EF4-FFF2-40B4-BE49-F238E27FC236}">
-                <a16:creationId xmlns:a16="http://schemas.microsoft.com/office/drawing/2014/main" id="{8EDDFFEB-B582-425B-835E-1A3EE2CB184D}"/>
-              </a:ext>
-            </a:extLst>
-          </p:cNvPr>
-          <p:cNvSpPr>
-            <a:spLocks xmlns:a="http://schemas.openxmlformats.org/drawingml/2006/main" noGrp="1"/>
-          </p:cNvSpPr>
+          <p:cNvPr id="6" name="TextBox 5"/>
+          <p:cNvSpPr txBox="1"/>
           <p:nvPr/>
         </p:nvSpPr>
         <p:spPr>
-          <a:xfrm xmlns:a="http://schemas.openxmlformats.org/drawingml/2006/main">
-            <a:off x="1381125" y="1724025"/>
-            <a:ext cx="7143750" cy="721519"/>
+          <a:xfrm>
+            <a:off x="1422400" y="1701800"/>
+            <a:ext cx="10160000" cy="381000"/>
           </a:xfrm>
-          <a:prstGeom xmlns:a="http://schemas.openxmlformats.org/drawingml/2006/main" prst="rect">
+          <a:prstGeom prst="rect">
             <a:avLst/>
           </a:prstGeom>
-          <a:noFill xmlns:a="http://schemas.openxmlformats.org/drawingml/2006/main"/>
-          <a:ln xmlns:a="http://schemas.openxmlformats.org/drawingml/2006/main" w="0">
-            <a:noFill/>
-          </a:ln>
+          <a:noFill/>
         </p:spPr>
         <p:txBody>
-          <a:bodyPr xmlns:a="http://schemas.openxmlformats.org/drawingml/2006/main">
-            <a:noAutofit/>
+          <a:bodyPr wrap="square">
+            <a:spAutoFit/>
           </a:bodyPr>
-          <a:lstStyle xmlns:a="http://schemas.openxmlformats.org/drawingml/2006/main">
-            <a:defPPr>
-              <a:defRPr sz="2250" b="0">
-                <a:solidFill>
-                  <a:srgbClr val="1C3144"/>
-                </a:solidFill>
-                <a:latin typeface="Calibri"/>
-                <a:ea typeface="Calibri"/>
-                <a:cs typeface="Calibri"/>
-              </a:defRPr>
-            </a:defPPr>
-            <a:lvl1pPr>
-              <a:defRPr sz="2250" b="0">
-                <a:solidFill>
-                  <a:srgbClr val="1C3144"/>
-                </a:solidFill>
-                <a:latin typeface="Calibri"/>
-                <a:ea typeface="Calibri"/>
-                <a:cs typeface="Calibri"/>
-              </a:defRPr>
-            </a:lvl1pPr>
-            <a:lvl2pPr>
-              <a:defRPr sz="2250" b="0">
-                <a:solidFill>
-                  <a:srgbClr val="1C3144"/>
-                </a:solidFill>
-                <a:latin typeface="Calibri"/>
-                <a:ea typeface="Calibri"/>
-                <a:cs typeface="Calibri"/>
-              </a:defRPr>
-            </a:lvl2pPr>
-            <a:lvl3pPr>
-              <a:defRPr sz="2250" b="0">
-                <a:solidFill>
-                  <a:srgbClr val="1C3144"/>
-                </a:solidFill>
-                <a:latin typeface="Calibri"/>
-                <a:ea typeface="Calibri"/>
-                <a:cs typeface="Calibri"/>
-              </a:defRPr>
-            </a:lvl3pPr>
-            <a:lvl4pPr>
-              <a:defRPr sz="2250" b="0">
-                <a:solidFill>
-                  <a:srgbClr val="1C3144"/>
-                </a:solidFill>
-                <a:latin typeface="Calibri"/>
-                <a:ea typeface="Calibri"/>
-                <a:cs typeface="Calibri"/>
-              </a:defRPr>
-            </a:lvl4pPr>
-            <a:lvl5pPr>
-              <a:defRPr sz="2250" b="0">
-                <a:solidFill>
-                  <a:srgbClr val="1C3144"/>
-                </a:solidFill>
-                <a:latin typeface="Calibri"/>
-                <a:ea typeface="Calibri"/>
-                <a:cs typeface="Calibri"/>
-              </a:defRPr>
-            </a:lvl5pPr>
-            <a:lvl6pPr>
-              <a:defRPr sz="2250" b="0">
-                <a:solidFill>
-                  <a:srgbClr val="1C3144"/>
-                </a:solidFill>
-                <a:latin typeface="Calibri"/>
-                <a:ea typeface="Calibri"/>
-                <a:cs typeface="Calibri"/>
-              </a:defRPr>
-            </a:lvl6pPr>
-            <a:lvl7pPr>
-              <a:defRPr sz="2250" b="0">
-                <a:solidFill>
-                  <a:srgbClr val="1C3144"/>
-                </a:solidFill>
-                <a:latin typeface="Calibri"/>
-                <a:ea typeface="Calibri"/>
-                <a:cs typeface="Calibri"/>
-              </a:defRPr>
-            </a:lvl7pPr>
-            <a:lvl8pPr>
-              <a:defRPr sz="2250" b="0">
-                <a:solidFill>
-                  <a:srgbClr val="1C3144"/>
-                </a:solidFill>
-                <a:latin typeface="Calibri"/>
-                <a:ea typeface="Calibri"/>
-                <a:cs typeface="Calibri"/>
-              </a:defRPr>
-            </a:lvl8pPr>
-            <a:lvl9pPr>
-              <a:defRPr sz="2250" b="0">
-                <a:solidFill>
-                  <a:srgbClr val="1C3144"/>
-                </a:solidFill>
-                <a:latin typeface="Calibri"/>
-                <a:ea typeface="Calibri"/>
-                <a:cs typeface="Calibri"/>
-              </a:defRPr>
-            </a:lvl9pPr>
-          </a:lstStyle>
-          <a:p xmlns:a="http://schemas.openxmlformats.org/drawingml/2006/main">
+          <a:lstStyle/>
+          <a:p>
             <a:pPr>
-              <a:defRPr sz="2250" b="0">
-                <a:solidFill>
-                  <a:srgbClr val="1C3144"/>
-                </a:solidFill>
-                <a:latin typeface="Calibri"/>
-                <a:ea typeface="Calibri"/>
-                <a:cs typeface="Calibri"/>
-              </a:defRPr>
+              <a:spcAft>
+                <a:spcPts val="0"/>
+              </a:spcAft>
             </a:pPr>
             <a:r>
-              <a:rPr sz="2250" b="0">
-                <a:solidFill>
-                  <a:srgbClr val="1C3144"/>
-                </a:solidFill>
-                <a:latin typeface="Calibri"/>
-                <a:ea typeface="Calibri"/>
-                <a:cs typeface="Calibri"/>
+              <a:rPr sz="2100" b="1">
+                <a:solidFill>
+                  <a:srgbClr val="1C3144"/>
+                </a:solidFill>
+                <a:latin typeface="Calibri"/>
               </a:rPr>
-              <a:t>Answer individually after the lecturer activates the quiz.</a:t>
+              <a:t>Part A: Features and ablation (A10, Week 11)</a:t>
             </a:r>
           </a:p>
         </p:txBody>
       </p:sp>
       <p:sp>
         <p:nvSpPr>
-          <p:cNvPr id="6" name="">
-            <a:extLst xmlns:a="http://schemas.openxmlformats.org/drawingml/2006/main">
-              <a:ext uri="{FF2B5EF4-FFF2-40B4-BE49-F238E27FC236}">
-                <a16:creationId xmlns:a16="http://schemas.microsoft.com/office/drawing/2014/main" id="{A6465FAF-B1D2-44B4-B408-1A74EDF721AD}"/>
-              </a:ext>
-            </a:extLst>
-          </p:cNvPr>
-          <p:cNvSpPr>
-            <a:spLocks xmlns:a="http://schemas.openxmlformats.org/drawingml/2006/main" noGrp="1"/>
-          </p:cNvSpPr>
+          <p:cNvPr id="7" name="TextBox 6"/>
+          <p:cNvSpPr txBox="1"/>
           <p:nvPr/>
         </p:nvSpPr>
         <p:spPr>
-          <a:xfrm xmlns:a="http://schemas.openxmlformats.org/drawingml/2006/main">
-            <a:off x="590550" y="2521744"/>
-            <a:ext cx="619125" cy="571500"/>
+          <a:xfrm>
+            <a:off x="1422400" y="2108200"/>
+            <a:ext cx="10160000" cy="381000"/>
           </a:xfrm>
-          <a:prstGeom xmlns:a="http://schemas.openxmlformats.org/drawingml/2006/main" prst="rect">
+          <a:prstGeom prst="rect">
             <a:avLst/>
           </a:prstGeom>
-          <a:noFill xmlns:a="http://schemas.openxmlformats.org/drawingml/2006/main"/>
-          <a:ln xmlns:a="http://schemas.openxmlformats.org/drawingml/2006/main" w="0">
-            <a:noFill/>
-          </a:ln>
+          <a:noFill/>
         </p:spPr>
         <p:txBody>
-          <a:bodyPr xmlns:a="http://schemas.openxmlformats.org/drawingml/2006/main">
-            <a:noAutofit/>
+          <a:bodyPr wrap="none">
+            <a:spAutoFit/>
           </a:bodyPr>
-          <a:lstStyle xmlns:a="http://schemas.openxmlformats.org/drawingml/2006/main">
-            <a:defPPr>
-              <a:defRPr sz="2550" b="1">
-                <a:solidFill>
-                  <a:srgbClr val="E4572E"/>
-                </a:solidFill>
-                <a:latin typeface="Calibri"/>
-                <a:ea typeface="Calibri"/>
-                <a:cs typeface="Calibri"/>
-              </a:defRPr>
-            </a:defPPr>
-            <a:lvl1pPr>
-              <a:defRPr sz="2550" b="1">
-                <a:solidFill>
-                  <a:srgbClr val="E4572E"/>
-                </a:solidFill>
-                <a:latin typeface="Calibri"/>
-                <a:ea typeface="Calibri"/>
-                <a:cs typeface="Calibri"/>
-              </a:defRPr>
-            </a:lvl1pPr>
-            <a:lvl2pPr>
-              <a:defRPr sz="2550" b="1">
-                <a:solidFill>
-                  <a:srgbClr val="E4572E"/>
-                </a:solidFill>
-                <a:latin typeface="Calibri"/>
-                <a:ea typeface="Calibri"/>
-                <a:cs typeface="Calibri"/>
-              </a:defRPr>
-            </a:lvl2pPr>
-            <a:lvl3pPr>
-              <a:defRPr sz="2550" b="1">
-                <a:solidFill>
-                  <a:srgbClr val="E4572E"/>
-                </a:solidFill>
-                <a:latin typeface="Calibri"/>
-                <a:ea typeface="Calibri"/>
-                <a:cs typeface="Calibri"/>
-              </a:defRPr>
-            </a:lvl3pPr>
-            <a:lvl4pPr>
-              <a:defRPr sz="2550" b="1">
-                <a:solidFill>
-                  <a:srgbClr val="E4572E"/>
-                </a:solidFill>
-                <a:latin typeface="Calibri"/>
-                <a:ea typeface="Calibri"/>
-                <a:cs typeface="Calibri"/>
-              </a:defRPr>
-            </a:lvl4pPr>
-            <a:lvl5pPr>
-              <a:defRPr sz="2550" b="1">
-                <a:solidFill>
-                  <a:srgbClr val="E4572E"/>
-                </a:solidFill>
-                <a:latin typeface="Calibri"/>
-                <a:ea typeface="Calibri"/>
-                <a:cs typeface="Calibri"/>
-              </a:defRPr>
-            </a:lvl5pPr>
-            <a:lvl6pPr>
-              <a:defRPr sz="2550" b="1">
-                <a:solidFill>
-                  <a:srgbClr val="E4572E"/>
-                </a:solidFill>
-                <a:latin typeface="Calibri"/>
-                <a:ea typeface="Calibri"/>
-                <a:cs typeface="Calibri"/>
-              </a:defRPr>
-            </a:lvl6pPr>
-            <a:lvl7pPr>
-              <a:defRPr sz="2550" b="1">
-                <a:solidFill>
-                  <a:srgbClr val="E4572E"/>
-                </a:solidFill>
-                <a:latin typeface="Calibri"/>
-                <a:ea typeface="Calibri"/>
-                <a:cs typeface="Calibri"/>
-              </a:defRPr>
-            </a:lvl7pPr>
-            <a:lvl8pPr>
-              <a:defRPr sz="2550" b="1">
-                <a:solidFill>
-                  <a:srgbClr val="E4572E"/>
-                </a:solidFill>
-                <a:latin typeface="Calibri"/>
-                <a:ea typeface="Calibri"/>
-                <a:cs typeface="Calibri"/>
-              </a:defRPr>
-            </a:lvl8pPr>
-            <a:lvl9pPr>
-              <a:defRPr sz="2550" b="1">
-                <a:solidFill>
-                  <a:srgbClr val="E4572E"/>
-                </a:solidFill>
-                <a:latin typeface="Calibri"/>
-                <a:ea typeface="Calibri"/>
-                <a:cs typeface="Calibri"/>
-              </a:defRPr>
-            </a:lvl9pPr>
-          </a:lstStyle>
-          <a:p xmlns:a="http://schemas.openxmlformats.org/drawingml/2006/main">
-            <a:pPr>
-              <a:defRPr sz="2550" b="1">
-                <a:solidFill>
-                  <a:srgbClr val="E4572E"/>
-                </a:solidFill>
-                <a:latin typeface="Calibri"/>
-                <a:ea typeface="Calibri"/>
-                <a:cs typeface="Calibri"/>
-              </a:defRPr>
-            </a:pPr>
-            <a:r>
-              <a:rPr sz="2550" b="1">
-                <a:solidFill>
-                  <a:srgbClr val="E4572E"/>
-                </a:solidFill>
-                <a:latin typeface="Calibri"/>
-                <a:ea typeface="Calibri"/>
-                <a:cs typeface="Calibri"/>
+          <a:lstStyle/>
+          <a:p>
+            <a:r>
+              <a:rPr sz="1900" u="sng">
+                <a:solidFill>
+                  <a:srgbClr val="2E7D6F"/>
+                </a:solidFill>
+                <a:latin typeface="Calibri"/>
+                <a:hlinkClick r:id="rId2"/>
               </a:rPr>
-              <a:t>02</a:t>
+              <a:t>Open the A10 form</a:t>
             </a:r>
           </a:p>
         </p:txBody>
       </p:sp>
       <p:sp>
         <p:nvSpPr>
-          <p:cNvPr id="7" name="">
-            <a:extLst xmlns:a="http://schemas.openxmlformats.org/drawingml/2006/main">
-              <a:ext uri="{FF2B5EF4-FFF2-40B4-BE49-F238E27FC236}">
-                <a16:creationId xmlns:a16="http://schemas.microsoft.com/office/drawing/2014/main" id="{47F90093-5110-4B1A-8345-87DED2C90900}"/>
-              </a:ext>
-            </a:extLst>
-          </p:cNvPr>
-          <p:cNvSpPr>
-            <a:spLocks xmlns:a="http://schemas.openxmlformats.org/drawingml/2006/main" noGrp="1"/>
-          </p:cNvSpPr>
+          <p:cNvPr id="8" name="TextBox 7"/>
+          <p:cNvSpPr txBox="1"/>
           <p:nvPr/>
         </p:nvSpPr>
         <p:spPr>
-          <a:xfrm xmlns:a="http://schemas.openxmlformats.org/drawingml/2006/main">
-            <a:off x="1381125" y="2521744"/>
-            <a:ext cx="7143750" cy="721519"/>
+          <a:xfrm>
+            <a:off x="584200" y="2794000"/>
+            <a:ext cx="762000" cy="508000"/>
           </a:xfrm>
-          <a:prstGeom xmlns:a="http://schemas.openxmlformats.org/drawingml/2006/main" prst="rect">
+          <a:prstGeom prst="rect">
             <a:avLst/>
           </a:prstGeom>
-          <a:noFill xmlns:a="http://schemas.openxmlformats.org/drawingml/2006/main"/>
-          <a:ln xmlns:a="http://schemas.openxmlformats.org/drawingml/2006/main" w="0">
-            <a:noFill/>
-          </a:ln>
+          <a:noFill/>
         </p:spPr>
         <p:txBody>
-          <a:bodyPr xmlns:a="http://schemas.openxmlformats.org/drawingml/2006/main">
-            <a:noAutofit/>
+          <a:bodyPr wrap="square">
+            <a:spAutoFit/>
           </a:bodyPr>
-          <a:lstStyle xmlns:a="http://schemas.openxmlformats.org/drawingml/2006/main">
-            <a:defPPr>
-              <a:defRPr sz="2250" b="0">
-                <a:solidFill>
-                  <a:srgbClr val="1C3144"/>
-                </a:solidFill>
-                <a:latin typeface="Calibri"/>
-                <a:ea typeface="Calibri"/>
-                <a:cs typeface="Calibri"/>
-              </a:defRPr>
-            </a:defPPr>
-            <a:lvl1pPr>
-              <a:defRPr sz="2250" b="0">
-                <a:solidFill>
-                  <a:srgbClr val="1C3144"/>
-                </a:solidFill>
-                <a:latin typeface="Calibri"/>
-                <a:ea typeface="Calibri"/>
-                <a:cs typeface="Calibri"/>
-              </a:defRPr>
-            </a:lvl1pPr>
-            <a:lvl2pPr>
-              <a:defRPr sz="2250" b="0">
-                <a:solidFill>
-                  <a:srgbClr val="1C3144"/>
-                </a:solidFill>
-                <a:latin typeface="Calibri"/>
-                <a:ea typeface="Calibri"/>
-                <a:cs typeface="Calibri"/>
-              </a:defRPr>
-            </a:lvl2pPr>
-            <a:lvl3pPr>
-              <a:defRPr sz="2250" b="0">
-                <a:solidFill>
-                  <a:srgbClr val="1C3144"/>
-                </a:solidFill>
-                <a:latin typeface="Calibri"/>
-                <a:ea typeface="Calibri"/>
-                <a:cs typeface="Calibri"/>
-              </a:defRPr>
-            </a:lvl3pPr>
-            <a:lvl4pPr>
-              <a:defRPr sz="2250" b="0">
-                <a:solidFill>
-                  <a:srgbClr val="1C3144"/>
-                </a:solidFill>
-                <a:latin typeface="Calibri"/>
-                <a:ea typeface="Calibri"/>
-                <a:cs typeface="Calibri"/>
-              </a:defRPr>
-            </a:lvl4pPr>
-            <a:lvl5pPr>
-              <a:defRPr sz="2250" b="0">
-                <a:solidFill>
-                  <a:srgbClr val="1C3144"/>
-                </a:solidFill>
-                <a:latin typeface="Calibri"/>
-                <a:ea typeface="Calibri"/>
-                <a:cs typeface="Calibri"/>
-              </a:defRPr>
-            </a:lvl5pPr>
-            <a:lvl6pPr>
-              <a:defRPr sz="2250" b="0">
-                <a:solidFill>
-                  <a:srgbClr val="1C3144"/>
-                </a:solidFill>
-                <a:latin typeface="Calibri"/>
-                <a:ea typeface="Calibri"/>
-                <a:cs typeface="Calibri"/>
-              </a:defRPr>
-            </a:lvl6pPr>
-            <a:lvl7pPr>
-              <a:defRPr sz="2250" b="0">
-                <a:solidFill>
-                  <a:srgbClr val="1C3144"/>
-                </a:solidFill>
-                <a:latin typeface="Calibri"/>
-                <a:ea typeface="Calibri"/>
-                <a:cs typeface="Calibri"/>
-              </a:defRPr>
-            </a:lvl7pPr>
-            <a:lvl8pPr>
-              <a:defRPr sz="2250" b="0">
-                <a:solidFill>
-                  <a:srgbClr val="1C3144"/>
-                </a:solidFill>
-                <a:latin typeface="Calibri"/>
-                <a:ea typeface="Calibri"/>
-                <a:cs typeface="Calibri"/>
-              </a:defRPr>
-            </a:lvl8pPr>
-            <a:lvl9pPr>
-              <a:defRPr sz="2250" b="0">
-                <a:solidFill>
-                  <a:srgbClr val="1C3144"/>
-                </a:solidFill>
-                <a:latin typeface="Calibri"/>
-                <a:ea typeface="Calibri"/>
-                <a:cs typeface="Calibri"/>
-              </a:defRPr>
-            </a:lvl9pPr>
-          </a:lstStyle>
-          <a:p xmlns:a="http://schemas.openxmlformats.org/drawingml/2006/main">
+          <a:lstStyle/>
+          <a:p>
             <a:pPr>
-              <a:defRPr sz="2250" b="0">
-                <a:solidFill>
-                  <a:srgbClr val="1C3144"/>
-                </a:solidFill>
-                <a:latin typeface="Calibri"/>
-                <a:ea typeface="Calibri"/>
-                <a:cs typeface="Calibri"/>
-              </a:defRPr>
+              <a:spcAft>
+                <a:spcPts val="0"/>
+              </a:spcAft>
             </a:pPr>
             <a:r>
-              <a:rPr sz="2250" b="0">
-                <a:solidFill>
-                  <a:srgbClr val="1C3144"/>
-                </a:solidFill>
-                <a:latin typeface="Calibri"/>
-                <a:ea typeface="Calibri"/>
-                <a:cs typeface="Calibri"/>
+              <a:rPr sz="3000" b="1">
+                <a:solidFill>
+                  <a:srgbClr val="E4572E"/>
+                </a:solidFill>
+                <a:latin typeface="Calibri"/>
               </a:rPr>
-              <a:t>Available for 24 hours from activation.</a:t>
+              <a:t>02</a:t>
             </a:r>
           </a:p>
         </p:txBody>
       </p:sp>
       <p:sp>
         <p:nvSpPr>
-          <p:cNvPr id="8" name="">
-            <a:extLst xmlns:a="http://schemas.openxmlformats.org/drawingml/2006/main">
-              <a:ext uri="{FF2B5EF4-FFF2-40B4-BE49-F238E27FC236}">
-                <a16:creationId xmlns:a16="http://schemas.microsoft.com/office/drawing/2014/main" id="{0714FBF8-BBA3-44E8-8186-3FEA2C2C2066}"/>
-              </a:ext>
-            </a:extLst>
-          </p:cNvPr>
-          <p:cNvSpPr>
-            <a:spLocks xmlns:a="http://schemas.openxmlformats.org/drawingml/2006/main" noGrp="1"/>
-          </p:cNvSpPr>
+          <p:cNvPr id="9" name="TextBox 8"/>
+          <p:cNvSpPr txBox="1"/>
           <p:nvPr/>
         </p:nvSpPr>
         <p:spPr>
-          <a:xfrm xmlns:a="http://schemas.openxmlformats.org/drawingml/2006/main">
-            <a:off x="590550" y="3319463"/>
-            <a:ext cx="619125" cy="571500"/>
+          <a:xfrm>
+            <a:off x="1422400" y="2819400"/>
+            <a:ext cx="10160000" cy="381000"/>
           </a:xfrm>
-          <a:prstGeom xmlns:a="http://schemas.openxmlformats.org/drawingml/2006/main" prst="rect">
+          <a:prstGeom prst="rect">
             <a:avLst/>
           </a:prstGeom>
-          <a:noFill xmlns:a="http://schemas.openxmlformats.org/drawingml/2006/main"/>
-          <a:ln xmlns:a="http://schemas.openxmlformats.org/drawingml/2006/main" w="0">
-            <a:noFill/>
-          </a:ln>
+          <a:noFill/>
         </p:spPr>
         <p:txBody>
-          <a:bodyPr xmlns:a="http://schemas.openxmlformats.org/drawingml/2006/main">
-            <a:noAutofit/>
+          <a:bodyPr wrap="square">
+            <a:spAutoFit/>
           </a:bodyPr>
-          <a:lstStyle xmlns:a="http://schemas.openxmlformats.org/drawingml/2006/main">
-            <a:defPPr>
-              <a:defRPr sz="2550" b="1">
-                <a:solidFill>
-                  <a:srgbClr val="E4572E"/>
-                </a:solidFill>
-                <a:latin typeface="Calibri"/>
-                <a:ea typeface="Calibri"/>
-                <a:cs typeface="Calibri"/>
-              </a:defRPr>
-            </a:defPPr>
-            <a:lvl1pPr>
-              <a:defRPr sz="2550" b="1">
-                <a:solidFill>
-                  <a:srgbClr val="E4572E"/>
-                </a:solidFill>
-                <a:latin typeface="Calibri"/>
-                <a:ea typeface="Calibri"/>
-                <a:cs typeface="Calibri"/>
-              </a:defRPr>
-            </a:lvl1pPr>
-            <a:lvl2pPr>
-              <a:defRPr sz="2550" b="1">
-                <a:solidFill>
-                  <a:srgbClr val="E4572E"/>
-                </a:solidFill>
-                <a:latin typeface="Calibri"/>
-                <a:ea typeface="Calibri"/>
-                <a:cs typeface="Calibri"/>
-              </a:defRPr>
-            </a:lvl2pPr>
-            <a:lvl3pPr>
-              <a:defRPr sz="2550" b="1">
-                <a:solidFill>
-                  <a:srgbClr val="E4572E"/>
-                </a:solidFill>
-                <a:latin typeface="Calibri"/>
-                <a:ea typeface="Calibri"/>
-                <a:cs typeface="Calibri"/>
-              </a:defRPr>
-            </a:lvl3pPr>
-            <a:lvl4pPr>
-              <a:defRPr sz="2550" b="1">
-                <a:solidFill>
-                  <a:srgbClr val="E4572E"/>
-                </a:solidFill>
-                <a:latin typeface="Calibri"/>
-                <a:ea typeface="Calibri"/>
-                <a:cs typeface="Calibri"/>
-              </a:defRPr>
-            </a:lvl4pPr>
-            <a:lvl5pPr>
-              <a:defRPr sz="2550" b="1">
-                <a:solidFill>
-                  <a:srgbClr val="E4572E"/>
-                </a:solidFill>
-                <a:latin typeface="Calibri"/>
-                <a:ea typeface="Calibri"/>
-                <a:cs typeface="Calibri"/>
-              </a:defRPr>
-            </a:lvl5pPr>
-            <a:lvl6pPr>
-              <a:defRPr sz="2550" b="1">
-                <a:solidFill>
-                  <a:srgbClr val="E4572E"/>
-                </a:solidFill>
-                <a:latin typeface="Calibri"/>
-                <a:ea typeface="Calibri"/>
-                <a:cs typeface="Calibri"/>
-              </a:defRPr>
-            </a:lvl6pPr>
-            <a:lvl7pPr>
-              <a:defRPr sz="2550" b="1">
-                <a:solidFill>
-                  <a:srgbClr val="E4572E"/>
-                </a:solidFill>
-                <a:latin typeface="Calibri"/>
-                <a:ea typeface="Calibri"/>
-                <a:cs typeface="Calibri"/>
-              </a:defRPr>
-            </a:lvl7pPr>
-            <a:lvl8pPr>
-              <a:defRPr sz="2550" b="1">
-                <a:solidFill>
-                  <a:srgbClr val="E4572E"/>
-                </a:solidFill>
-                <a:latin typeface="Calibri"/>
-                <a:ea typeface="Calibri"/>
-                <a:cs typeface="Calibri"/>
-              </a:defRPr>
-            </a:lvl8pPr>
-            <a:lvl9pPr>
-              <a:defRPr sz="2550" b="1">
-                <a:solidFill>
-                  <a:srgbClr val="E4572E"/>
-                </a:solidFill>
-                <a:latin typeface="Calibri"/>
-                <a:ea typeface="Calibri"/>
-                <a:cs typeface="Calibri"/>
-              </a:defRPr>
-            </a:lvl9pPr>
-          </a:lstStyle>
-          <a:p xmlns:a="http://schemas.openxmlformats.org/drawingml/2006/main">
+          <a:lstStyle/>
+          <a:p>
             <a:pPr>
-              <a:defRPr sz="2550" b="1">
-                <a:solidFill>
-                  <a:srgbClr val="E4572E"/>
-                </a:solidFill>
-                <a:latin typeface="Calibri"/>
-                <a:ea typeface="Calibri"/>
-                <a:cs typeface="Calibri"/>
-              </a:defRPr>
+              <a:spcAft>
+                <a:spcPts val="0"/>
+              </a:spcAft>
             </a:pPr>
             <a:r>
-              <a:rPr sz="2550" b="1">
-                <a:solidFill>
-                  <a:srgbClr val="E4572E"/>
-                </a:solidFill>
-                <a:latin typeface="Calibri"/>
-                <a:ea typeface="Calibri"/>
-                <a:cs typeface="Calibri"/>
+              <a:rPr sz="2100" b="1">
+                <a:solidFill>
+                  <a:srgbClr val="1C3144"/>
+                </a:solidFill>
+                <a:latin typeface="Calibri"/>
               </a:rPr>
-              <a:t>03</a:t>
+              <a:t>Part B: Model recommendation (A11, Week 12)</a:t>
             </a:r>
           </a:p>
         </p:txBody>
       </p:sp>
       <p:sp>
         <p:nvSpPr>
-          <p:cNvPr id="9" name="">
-            <a:extLst xmlns:a="http://schemas.openxmlformats.org/drawingml/2006/main">
-              <a:ext uri="{FF2B5EF4-FFF2-40B4-BE49-F238E27FC236}">
-                <a16:creationId xmlns:a16="http://schemas.microsoft.com/office/drawing/2014/main" id="{764C8B00-EB73-488A-ACCB-41B3236DB9E8}"/>
-              </a:ext>
-            </a:extLst>
-          </p:cNvPr>
-          <p:cNvSpPr>
-            <a:spLocks xmlns:a="http://schemas.openxmlformats.org/drawingml/2006/main" noGrp="1"/>
-          </p:cNvSpPr>
+          <p:cNvPr id="10" name="TextBox 9"/>
+          <p:cNvSpPr txBox="1"/>
           <p:nvPr/>
         </p:nvSpPr>
         <p:spPr>
-          <a:xfrm xmlns:a="http://schemas.openxmlformats.org/drawingml/2006/main">
-            <a:off x="1381125" y="3319463"/>
-            <a:ext cx="7143750" cy="721519"/>
+          <a:xfrm>
+            <a:off x="1422400" y="3225800"/>
+            <a:ext cx="10160000" cy="381000"/>
           </a:xfrm>
-          <a:prstGeom xmlns:a="http://schemas.openxmlformats.org/drawingml/2006/main" prst="rect">
+          <a:prstGeom prst="rect">
             <a:avLst/>
           </a:prstGeom>
-          <a:noFill xmlns:a="http://schemas.openxmlformats.org/drawingml/2006/main"/>
-          <a:ln xmlns:a="http://schemas.openxmlformats.org/drawingml/2006/main" w="0">
-            <a:noFill/>
-          </a:ln>
+          <a:noFill/>
         </p:spPr>
         <p:txBody>
-          <a:bodyPr xmlns:a="http://schemas.openxmlformats.org/drawingml/2006/main">
-            <a:noAutofit/>
+          <a:bodyPr wrap="none">
+            <a:spAutoFit/>
           </a:bodyPr>
-          <a:lstStyle xmlns:a="http://schemas.openxmlformats.org/drawingml/2006/main">
-            <a:defPPr>
-              <a:defRPr sz="2250" b="0">
-                <a:solidFill>
-                  <a:srgbClr val="1C3144"/>
-                </a:solidFill>
-                <a:latin typeface="Calibri"/>
-                <a:ea typeface="Calibri"/>
-                <a:cs typeface="Calibri"/>
-              </a:defRPr>
-            </a:defPPr>
-            <a:lvl1pPr>
-              <a:defRPr sz="2250" b="0">
-                <a:solidFill>
-                  <a:srgbClr val="1C3144"/>
-                </a:solidFill>
-                <a:latin typeface="Calibri"/>
-                <a:ea typeface="Calibri"/>
-                <a:cs typeface="Calibri"/>
-              </a:defRPr>
-            </a:lvl1pPr>
-            <a:lvl2pPr>
-              <a:defRPr sz="2250" b="0">
-                <a:solidFill>
-                  <a:srgbClr val="1C3144"/>
-                </a:solidFill>
-                <a:latin typeface="Calibri"/>
-                <a:ea typeface="Calibri"/>
-                <a:cs typeface="Calibri"/>
-              </a:defRPr>
-            </a:lvl2pPr>
-            <a:lvl3pPr>
-              <a:defRPr sz="2250" b="0">
-                <a:solidFill>
-                  <a:srgbClr val="1C3144"/>
-                </a:solidFill>
-                <a:latin typeface="Calibri"/>
-                <a:ea typeface="Calibri"/>
-                <a:cs typeface="Calibri"/>
-              </a:defRPr>
-            </a:lvl3pPr>
-            <a:lvl4pPr>
-              <a:defRPr sz="2250" b="0">
-                <a:solidFill>
-                  <a:srgbClr val="1C3144"/>
-                </a:solidFill>
-                <a:latin typeface="Calibri"/>
-                <a:ea typeface="Calibri"/>
-                <a:cs typeface="Calibri"/>
-              </a:defRPr>
-            </a:lvl4pPr>
-            <a:lvl5pPr>
-              <a:defRPr sz="2250" b="0">
-                <a:solidFill>
-                  <a:srgbClr val="1C3144"/>
-                </a:solidFill>
-                <a:latin typeface="Calibri"/>
-                <a:ea typeface="Calibri"/>
-                <a:cs typeface="Calibri"/>
-              </a:defRPr>
-            </a:lvl5pPr>
-            <a:lvl6pPr>
-              <a:defRPr sz="2250" b="0">
-                <a:solidFill>
-                  <a:srgbClr val="1C3144"/>
-                </a:solidFill>
-                <a:latin typeface="Calibri"/>
-                <a:ea typeface="Calibri"/>
-                <a:cs typeface="Calibri"/>
-              </a:defRPr>
-            </a:lvl6pPr>
-            <a:lvl7pPr>
-              <a:defRPr sz="2250" b="0">
-                <a:solidFill>
-                  <a:srgbClr val="1C3144"/>
-                </a:solidFill>
-                <a:latin typeface="Calibri"/>
-                <a:ea typeface="Calibri"/>
-                <a:cs typeface="Calibri"/>
-              </a:defRPr>
-            </a:lvl7pPr>
-            <a:lvl8pPr>
-              <a:defRPr sz="2250" b="0">
-                <a:solidFill>
-                  <a:srgbClr val="1C3144"/>
-                </a:solidFill>
-                <a:latin typeface="Calibri"/>
-                <a:ea typeface="Calibri"/>
-                <a:cs typeface="Calibri"/>
-              </a:defRPr>
-            </a:lvl8pPr>
-            <a:lvl9pPr>
-              <a:defRPr sz="2250" b="0">
-                <a:solidFill>
-                  <a:srgbClr val="1C3144"/>
-                </a:solidFill>
-                <a:latin typeface="Calibri"/>
-                <a:ea typeface="Calibri"/>
-                <a:cs typeface="Calibri"/>
-              </a:defRPr>
-            </a:lvl9pPr>
-          </a:lstStyle>
-          <a:p xmlns:a="http://schemas.openxmlformats.org/drawingml/2006/main">
-            <a:pPr>
-              <a:defRPr sz="2250" b="0">
-                <a:solidFill>
-                  <a:srgbClr val="1C3144"/>
-                </a:solidFill>
-                <a:latin typeface="Calibri"/>
-                <a:ea typeface="Calibri"/>
-                <a:cs typeface="Calibri"/>
-              </a:defRPr>
-            </a:pPr>
-            <a:r>
-              <a:rPr sz="2250" b="0">
-                <a:solidFill>
-                  <a:srgbClr val="1C3144"/>
-                </a:solidFill>
-                <a:latin typeface="Calibri"/>
-                <a:ea typeface="Calibri"/>
-                <a:cs typeface="Calibri"/>
+          <a:lstStyle/>
+          <a:p>
+            <a:r>
+              <a:rPr sz="1900" u="sng">
+                <a:solidFill>
+                  <a:srgbClr val="2E7D6F"/>
+                </a:solidFill>
+                <a:latin typeface="Calibri"/>
+                <a:hlinkClick r:id="rId3"/>
               </a:rPr>
-              <a:t>Use your Student Registration Number and registered account.</a:t>
+              <a:t>Open the A11 form</a:t>
             </a:r>
           </a:p>
         </p:txBody>
       </p:sp>
       <p:sp>
         <p:nvSpPr>
-          <p:cNvPr id="10" name="">
-            <a:extLst xmlns:a="http://schemas.openxmlformats.org/drawingml/2006/main">
-              <a:ext uri="{FF2B5EF4-FFF2-40B4-BE49-F238E27FC236}">
-                <a16:creationId xmlns:a16="http://schemas.microsoft.com/office/drawing/2014/main" id="{D46A2FEF-472A-41D5-B275-F4A999B0D04B}"/>
-              </a:ext>
-            </a:extLst>
-          </p:cNvPr>
-          <p:cNvSpPr>
-            <a:spLocks xmlns:a="http://schemas.openxmlformats.org/drawingml/2006/main" noGrp="1"/>
-          </p:cNvSpPr>
+          <p:cNvPr id="11" name="Rectangle 10"/>
+          <p:cNvSpPr/>
           <p:nvPr/>
         </p:nvSpPr>
         <p:spPr>
-          <a:xfrm xmlns:a="http://schemas.openxmlformats.org/drawingml/2006/main">
-            <a:off x="590550" y="4117181"/>
-            <a:ext cx="619125" cy="571500"/>
+          <a:xfrm>
+            <a:off x="0" y="5461000"/>
+            <a:ext cx="12192000" cy="939800"/>
           </a:xfrm>
-          <a:prstGeom xmlns:a="http://schemas.openxmlformats.org/drawingml/2006/main" prst="rect">
+          <a:prstGeom prst="rect">
             <a:avLst/>
           </a:prstGeom>
-          <a:noFill xmlns:a="http://schemas.openxmlformats.org/drawingml/2006/main"/>
-          <a:ln xmlns:a="http://schemas.openxmlformats.org/drawingml/2006/main" w="0">
+          <a:solidFill>
+            <a:srgbClr val="E5F1EE"/>
+          </a:solidFill>
+          <a:ln>
             <a:noFill/>
           </a:ln>
+          <a:effectLst/>
         </p:spPr>
+        <p:style>
+          <a:lnRef idx="1">
+            <a:schemeClr val="accent1"/>
+          </a:lnRef>
+          <a:fillRef idx="3">
+            <a:schemeClr val="accent1"/>
+          </a:fillRef>
+          <a:effectRef idx="2">
+            <a:schemeClr val="accent1"/>
+          </a:effectRef>
+          <a:fontRef idx="minor">
+            <a:schemeClr val="lt1"/>
+          </a:fontRef>
+        </p:style>
         <p:txBody>
-          <a:bodyPr xmlns:a="http://schemas.openxmlformats.org/drawingml/2006/main">
-            <a:noAutofit/>
-          </a:bodyPr>
-          <a:lstStyle xmlns:a="http://schemas.openxmlformats.org/drawingml/2006/main">
-            <a:defPPr>
-              <a:defRPr sz="2550" b="1">
-                <a:solidFill>
-                  <a:srgbClr val="E4572E"/>
-                </a:solidFill>
-                <a:latin typeface="Calibri"/>
-                <a:ea typeface="Calibri"/>
-                <a:cs typeface="Calibri"/>
-              </a:defRPr>
-            </a:defPPr>
-            <a:lvl1pPr>
-              <a:defRPr sz="2550" b="1">
-                <a:solidFill>
-                  <a:srgbClr val="E4572E"/>
-                </a:solidFill>
-                <a:latin typeface="Calibri"/>
-                <a:ea typeface="Calibri"/>
-                <a:cs typeface="Calibri"/>
-              </a:defRPr>
-            </a:lvl1pPr>
-            <a:lvl2pPr>
-              <a:defRPr sz="2550" b="1">
-                <a:solidFill>
-                  <a:srgbClr val="E4572E"/>
-                </a:solidFill>
-                <a:latin typeface="Calibri"/>
-                <a:ea typeface="Calibri"/>
-                <a:cs typeface="Calibri"/>
-              </a:defRPr>
-            </a:lvl2pPr>
-            <a:lvl3pPr>
-              <a:defRPr sz="2550" b="1">
-                <a:solidFill>
-                  <a:srgbClr val="E4572E"/>
-                </a:solidFill>
-                <a:latin typeface="Calibri"/>
-                <a:ea typeface="Calibri"/>
-                <a:cs typeface="Calibri"/>
-              </a:defRPr>
-            </a:lvl3pPr>
-            <a:lvl4pPr>
-              <a:defRPr sz="2550" b="1">
-                <a:solidFill>
-                  <a:srgbClr val="E4572E"/>
-                </a:solidFill>
-                <a:latin typeface="Calibri"/>
-                <a:ea typeface="Calibri"/>
-                <a:cs typeface="Calibri"/>
-              </a:defRPr>
-            </a:lvl4pPr>
-            <a:lvl5pPr>
-              <a:defRPr sz="2550" b="1">
-                <a:solidFill>
-                  <a:srgbClr val="E4572E"/>
-                </a:solidFill>
-                <a:latin typeface="Calibri"/>
-                <a:ea typeface="Calibri"/>
-                <a:cs typeface="Calibri"/>
-              </a:defRPr>
-            </a:lvl5pPr>
-            <a:lvl6pPr>
-              <a:defRPr sz="2550" b="1">
-                <a:solidFill>
-                  <a:srgbClr val="E4572E"/>
-                </a:solidFill>
-                <a:latin typeface="Calibri"/>
-                <a:ea typeface="Calibri"/>
-                <a:cs typeface="Calibri"/>
-              </a:defRPr>
-            </a:lvl6pPr>
-            <a:lvl7pPr>
-              <a:defRPr sz="2550" b="1">
-                <a:solidFill>
-                  <a:srgbClr val="E4572E"/>
-                </a:solidFill>
-                <a:latin typeface="Calibri"/>
-                <a:ea typeface="Calibri"/>
-                <a:cs typeface="Calibri"/>
-              </a:defRPr>
-            </a:lvl7pPr>
-            <a:lvl8pPr>
-              <a:defRPr sz="2550" b="1">
-                <a:solidFill>
-                  <a:srgbClr val="E4572E"/>
-                </a:solidFill>
-                <a:latin typeface="Calibri"/>
-                <a:ea typeface="Calibri"/>
-                <a:cs typeface="Calibri"/>
-              </a:defRPr>
-            </a:lvl8pPr>
-            <a:lvl9pPr>
-              <a:defRPr sz="2550" b="1">
-                <a:solidFill>
-                  <a:srgbClr val="E4572E"/>
-                </a:solidFill>
-                <a:latin typeface="Calibri"/>
-                <a:ea typeface="Calibri"/>
-                <a:cs typeface="Calibri"/>
-              </a:defRPr>
-            </a:lvl9pPr>
-          </a:lstStyle>
-          <a:p xmlns:a="http://schemas.openxmlformats.org/drawingml/2006/main">
-            <a:pPr>
-              <a:defRPr sz="2550" b="1">
-                <a:solidFill>
-                  <a:srgbClr val="E4572E"/>
-                </a:solidFill>
-                <a:latin typeface="Calibri"/>
-                <a:ea typeface="Calibri"/>
-                <a:cs typeface="Calibri"/>
-              </a:defRPr>
-            </a:pPr>
-            <a:r>
-              <a:rPr sz="2550" b="1">
-                <a:solidFill>
-                  <a:srgbClr val="E4572E"/>
-                </a:solidFill>
-                <a:latin typeface="Calibri"/>
-                <a:ea typeface="Calibri"/>
-                <a:cs typeface="Calibri"/>
-              </a:rPr>
-              <a:t>04</a:t>
-            </a:r>
+          <a:bodyPr rtlCol="0" anchor="ctr"/>
+          <a:lstStyle/>
+          <a:p>
+            <a:pPr algn="ctr"/>
           </a:p>
         </p:txBody>
       </p:sp>
       <p:sp>
         <p:nvSpPr>
-          <p:cNvPr id="11" name="">
-            <a:extLst xmlns:a="http://schemas.openxmlformats.org/drawingml/2006/main">
-              <a:ext uri="{FF2B5EF4-FFF2-40B4-BE49-F238E27FC236}">
-                <a16:creationId xmlns:a16="http://schemas.microsoft.com/office/drawing/2014/main" id="{A923C212-933E-4783-81A5-D9A511154951}"/>
-              </a:ext>
-            </a:extLst>
-          </p:cNvPr>
-          <p:cNvSpPr>
-            <a:spLocks xmlns:a="http://schemas.openxmlformats.org/drawingml/2006/main" noGrp="1"/>
-          </p:cNvSpPr>
+          <p:cNvPr id="12" name="TextBox 11"/>
+          <p:cNvSpPr txBox="1"/>
           <p:nvPr/>
         </p:nvSpPr>
         <p:spPr>
-          <a:xfrm xmlns:a="http://schemas.openxmlformats.org/drawingml/2006/main">
-            <a:off x="1381125" y="4117181"/>
-            <a:ext cx="7143750" cy="721519"/>
+          <a:xfrm>
+            <a:off x="584200" y="5562600"/>
+            <a:ext cx="11049000" cy="787400"/>
           </a:xfrm>
-          <a:prstGeom xmlns:a="http://schemas.openxmlformats.org/drawingml/2006/main" prst="rect">
+          <a:prstGeom prst="rect">
             <a:avLst/>
           </a:prstGeom>
-          <a:noFill xmlns:a="http://schemas.openxmlformats.org/drawingml/2006/main"/>
-          <a:ln xmlns:a="http://schemas.openxmlformats.org/drawingml/2006/main" w="0">
-            <a:noFill/>
-          </a:ln>
+          <a:noFill/>
         </p:spPr>
         <p:txBody>
-          <a:bodyPr xmlns:a="http://schemas.openxmlformats.org/drawingml/2006/main">
-            <a:noAutofit/>
+          <a:bodyPr wrap="square">
+            <a:spAutoFit/>
           </a:bodyPr>
-          <a:lstStyle xmlns:a="http://schemas.openxmlformats.org/drawingml/2006/main">
-            <a:defPPr>
-              <a:defRPr sz="2250" b="0">
-                <a:solidFill>
-                  <a:srgbClr val="1C3144"/>
-                </a:solidFill>
-                <a:latin typeface="Calibri"/>
-                <a:ea typeface="Calibri"/>
-                <a:cs typeface="Calibri"/>
-              </a:defRPr>
-            </a:defPPr>
-            <a:lvl1pPr>
-              <a:defRPr sz="2250" b="0">
-                <a:solidFill>
-                  <a:srgbClr val="1C3144"/>
-                </a:solidFill>
-                <a:latin typeface="Calibri"/>
-                <a:ea typeface="Calibri"/>
-                <a:cs typeface="Calibri"/>
-              </a:defRPr>
-            </a:lvl1pPr>
-            <a:lvl2pPr>
-              <a:defRPr sz="2250" b="0">
-                <a:solidFill>
-                  <a:srgbClr val="1C3144"/>
-                </a:solidFill>
-                <a:latin typeface="Calibri"/>
-                <a:ea typeface="Calibri"/>
-                <a:cs typeface="Calibri"/>
-              </a:defRPr>
-            </a:lvl2pPr>
-            <a:lvl3pPr>
-              <a:defRPr sz="2250" b="0">
-                <a:solidFill>
-                  <a:srgbClr val="1C3144"/>
-                </a:solidFill>
-                <a:latin typeface="Calibri"/>
-                <a:ea typeface="Calibri"/>
-                <a:cs typeface="Calibri"/>
-              </a:defRPr>
-            </a:lvl3pPr>
-            <a:lvl4pPr>
-              <a:defRPr sz="2250" b="0">
-                <a:solidFill>
-                  <a:srgbClr val="1C3144"/>
-                </a:solidFill>
-                <a:latin typeface="Calibri"/>
-                <a:ea typeface="Calibri"/>
-                <a:cs typeface="Calibri"/>
-              </a:defRPr>
-            </a:lvl4pPr>
-            <a:lvl5pPr>
-              <a:defRPr sz="2250" b="0">
-                <a:solidFill>
-                  <a:srgbClr val="1C3144"/>
-                </a:solidFill>
-                <a:latin typeface="Calibri"/>
-                <a:ea typeface="Calibri"/>
-                <a:cs typeface="Calibri"/>
-              </a:defRPr>
-            </a:lvl5pPr>
-            <a:lvl6pPr>
-              <a:defRPr sz="2250" b="0">
-                <a:solidFill>
-                  <a:srgbClr val="1C3144"/>
-                </a:solidFill>
-                <a:latin typeface="Calibri"/>
-                <a:ea typeface="Calibri"/>
-                <a:cs typeface="Calibri"/>
-              </a:defRPr>
-            </a:lvl6pPr>
-            <a:lvl7pPr>
-              <a:defRPr sz="2250" b="0">
-                <a:solidFill>
-                  <a:srgbClr val="1C3144"/>
-                </a:solidFill>
-                <a:latin typeface="Calibri"/>
-                <a:ea typeface="Calibri"/>
-                <a:cs typeface="Calibri"/>
-              </a:defRPr>
-            </a:lvl7pPr>
-            <a:lvl8pPr>
-              <a:defRPr sz="2250" b="0">
-                <a:solidFill>
-                  <a:srgbClr val="1C3144"/>
-                </a:solidFill>
-                <a:latin typeface="Calibri"/>
-                <a:ea typeface="Calibri"/>
-                <a:cs typeface="Calibri"/>
-              </a:defRPr>
-            </a:lvl8pPr>
-            <a:lvl9pPr>
-              <a:defRPr sz="2250" b="0">
-                <a:solidFill>
-                  <a:srgbClr val="1C3144"/>
-                </a:solidFill>
-                <a:latin typeface="Calibri"/>
-                <a:ea typeface="Calibri"/>
-                <a:cs typeface="Calibri"/>
-              </a:defRPr>
-            </a:lvl9pPr>
-          </a:lstStyle>
-          <a:p xmlns:a="http://schemas.openxmlformats.org/drawingml/2006/main">
+          <a:lstStyle/>
+          <a:p>
             <a:pPr>
-              <a:defRPr sz="2250" b="0">
-                <a:solidFill>
-                  <a:srgbClr val="1C3144"/>
-                </a:solidFill>
-                <a:latin typeface="Calibri"/>
-                <a:ea typeface="Calibri"/>
-                <a:cs typeface="Calibri"/>
-              </a:defRPr>
+              <a:spcAft>
+                <a:spcPts val="0"/>
+              </a:spcAft>
             </a:pPr>
             <a:r>
-              <a:rPr sz="2250" b="0">
-                <a:solidFill>
-                  <a:srgbClr val="1C3144"/>
-                </a:solidFill>
-                <a:latin typeface="Calibri"/>
-                <a:ea typeface="Calibri"/>
-                <a:cs typeface="Calibri"/>
+              <a:rPr sz="1800" b="1">
+                <a:solidFill>
+                  <a:srgbClr val="2E7D6F"/>
+                </a:solidFill>
+                <a:latin typeface="Calibri"/>
               </a:rPr>
-              <a:t>Check the announced quiz closing time.</a:t>
-            </a:r>
-          </a:p>
-        </p:txBody>
-      </p:sp>
-      <p:pic>
-        <p:nvPicPr>
-          <p:cNvPr id="12" name="">
-            <a:extLst xmlns:a="http://schemas.openxmlformats.org/drawingml/2006/main">
-              <a:ext uri="{FF2B5EF4-FFF2-40B4-BE49-F238E27FC236}">
-                <a16:creationId xmlns:a16="http://schemas.microsoft.com/office/drawing/2014/main" id="{2CD1EDD4-DC5D-4217-A4DF-6269E0BDEB4D}"/>
-              </a:ext>
-            </a:extLst>
-          </p:cNvPr>
-          <p:cNvPicPr>
-            <a:picLocks xmlns:a="http://schemas.openxmlformats.org/drawingml/2006/main" noChangeAspect="1"/>
-          </p:cNvPicPr>
-          <p:nvPr/>
-        </p:nvPicPr>
-        <p:blipFill>
-          <a:blip xmlns:r="http://schemas.openxmlformats.org/officeDocument/2006/relationships" xmlns:a="http://schemas.openxmlformats.org/drawingml/2006/main" r:embed="Rb129c7a220174c5c"/>
-          <a:stretch xmlns:a="http://schemas.openxmlformats.org/drawingml/2006/main"/>
-        </p:blipFill>
-        <p:spPr>
-          <a:xfrm xmlns:a="http://schemas.openxmlformats.org/drawingml/2006/main">
-            <a:off x="9134475" y="2095500"/>
-            <a:ext cx="2190750" cy="2190750"/>
-          </a:xfrm>
-          <a:prstGeom xmlns:a="http://schemas.openxmlformats.org/drawingml/2006/main" prst="rect">
-            <a:avLst/>
-          </a:prstGeom>
-        </p:spPr>
-      </p:pic>
-      <p:sp>
-        <p:nvSpPr>
-          <p:cNvPr id="13" name="">
-            <a:extLst xmlns:a="http://schemas.openxmlformats.org/drawingml/2006/main">
-              <a:ext uri="{FF2B5EF4-FFF2-40B4-BE49-F238E27FC236}">
-                <a16:creationId xmlns:a16="http://schemas.microsoft.com/office/drawing/2014/main" id="{823E6E50-BDBB-4B88-91DF-0E665CCEC0D4}"/>
-              </a:ext>
-            </a:extLst>
-          </p:cNvPr>
-          <p:cNvSpPr>
-            <a:spLocks xmlns:a="http://schemas.openxmlformats.org/drawingml/2006/main" noGrp="1"/>
-          </p:cNvSpPr>
-          <p:nvPr/>
-        </p:nvSpPr>
-        <p:spPr>
-          <a:xfrm xmlns:a="http://schemas.openxmlformats.org/drawingml/2006/main">
-            <a:off x="9239250" y="4400550"/>
-            <a:ext cx="2190750" cy="381000"/>
-          </a:xfrm>
-          <a:prstGeom xmlns:a="http://schemas.openxmlformats.org/drawingml/2006/main" prst="rect">
-            <a:avLst/>
-          </a:prstGeom>
-          <a:noFill xmlns:a="http://schemas.openxmlformats.org/drawingml/2006/main"/>
-          <a:ln xmlns:a="http://schemas.openxmlformats.org/drawingml/2006/main" w="0">
-            <a:noFill/>
-          </a:ln>
-        </p:spPr>
-        <p:txBody>
-          <a:bodyPr xmlns:a="http://schemas.openxmlformats.org/drawingml/2006/main">
-            <a:noAutofit/>
-          </a:bodyPr>
-          <a:lstStyle xmlns:a="http://schemas.openxmlformats.org/drawingml/2006/main">
-            <a:defPPr>
-              <a:defRPr sz="2100" b="1">
-                <a:solidFill>
-                  <a:srgbClr val="E4572E"/>
-                </a:solidFill>
-                <a:latin typeface="Calibri"/>
-                <a:ea typeface="Calibri"/>
-                <a:cs typeface="Calibri"/>
-              </a:defRPr>
-            </a:defPPr>
-            <a:lvl1pPr>
-              <a:defRPr sz="2100" b="1">
-                <a:solidFill>
-                  <a:srgbClr val="E4572E"/>
-                </a:solidFill>
-                <a:latin typeface="Calibri"/>
-                <a:ea typeface="Calibri"/>
-                <a:cs typeface="Calibri"/>
-              </a:defRPr>
-            </a:lvl1pPr>
-            <a:lvl2pPr>
-              <a:defRPr sz="2100" b="1">
-                <a:solidFill>
-                  <a:srgbClr val="E4572E"/>
-                </a:solidFill>
-                <a:latin typeface="Calibri"/>
-                <a:ea typeface="Calibri"/>
-                <a:cs typeface="Calibri"/>
-              </a:defRPr>
-            </a:lvl2pPr>
-            <a:lvl3pPr>
-              <a:defRPr sz="2100" b="1">
-                <a:solidFill>
-                  <a:srgbClr val="E4572E"/>
-                </a:solidFill>
-                <a:latin typeface="Calibri"/>
-                <a:ea typeface="Calibri"/>
-                <a:cs typeface="Calibri"/>
-              </a:defRPr>
-            </a:lvl3pPr>
-            <a:lvl4pPr>
-              <a:defRPr sz="2100" b="1">
-                <a:solidFill>
-                  <a:srgbClr val="E4572E"/>
-                </a:solidFill>
-                <a:latin typeface="Calibri"/>
-                <a:ea typeface="Calibri"/>
-                <a:cs typeface="Calibri"/>
-              </a:defRPr>
-            </a:lvl4pPr>
-            <a:lvl5pPr>
-              <a:defRPr sz="2100" b="1">
-                <a:solidFill>
-                  <a:srgbClr val="E4572E"/>
-                </a:solidFill>
-                <a:latin typeface="Calibri"/>
-                <a:ea typeface="Calibri"/>
-                <a:cs typeface="Calibri"/>
-              </a:defRPr>
-            </a:lvl5pPr>
-            <a:lvl6pPr>
-              <a:defRPr sz="2100" b="1">
-                <a:solidFill>
-                  <a:srgbClr val="E4572E"/>
-                </a:solidFill>
-                <a:latin typeface="Calibri"/>
-                <a:ea typeface="Calibri"/>
-                <a:cs typeface="Calibri"/>
-              </a:defRPr>
-            </a:lvl6pPr>
-            <a:lvl7pPr>
-              <a:defRPr sz="2100" b="1">
-                <a:solidFill>
-                  <a:srgbClr val="E4572E"/>
-                </a:solidFill>
-                <a:latin typeface="Calibri"/>
-                <a:ea typeface="Calibri"/>
-                <a:cs typeface="Calibri"/>
-              </a:defRPr>
-            </a:lvl7pPr>
-            <a:lvl8pPr>
-              <a:defRPr sz="2100" b="1">
-                <a:solidFill>
-                  <a:srgbClr val="E4572E"/>
-                </a:solidFill>
-                <a:latin typeface="Calibri"/>
-                <a:ea typeface="Calibri"/>
-                <a:cs typeface="Calibri"/>
-              </a:defRPr>
-            </a:lvl8pPr>
-            <a:lvl9pPr>
-              <a:defRPr sz="2100" b="1">
-                <a:solidFill>
-                  <a:srgbClr val="E4572E"/>
-                </a:solidFill>
-                <a:latin typeface="Calibri"/>
-                <a:ea typeface="Calibri"/>
-                <a:cs typeface="Calibri"/>
-              </a:defRPr>
-            </a:lvl9pPr>
-          </a:lstStyle>
-          <a:p xmlns:a="http://schemas.openxmlformats.org/drawingml/2006/main">
-            <a:pPr>
-              <a:defRPr sz="2100" b="1">
-                <a:solidFill>
-                  <a:srgbClr val="E4572E"/>
-                </a:solidFill>
-                <a:latin typeface="Calibri"/>
-                <a:ea typeface="Calibri"/>
-                <a:cs typeface="Calibri"/>
-              </a:defRPr>
-            </a:pPr>
-            <a:r>
-              <a:rPr sz="2100" b="1">
-                <a:solidFill>
-                  <a:srgbClr val="E4572E"/>
-                </a:solidFill>
-                <a:latin typeface="Calibri"/>
-                <a:ea typeface="Calibri"/>
-                <a:cs typeface="Calibri"/>
-              </a:rPr>
-              <a:t>24 HOURS</a:t>
+              <a:t>Closes Thursday 10 December 2026, 23:59 Kampala time. Submit each notebook to its own form, with your full Student Registration Number.</a:t>
             </a:r>
           </a:p>
         </p:txBody>
       </p:sp>
       <p:sp>
         <p:nvSpPr>
-          <p:cNvPr id="14" name="">
-            <a:extLst xmlns:a="http://schemas.openxmlformats.org/drawingml/2006/main">
-              <a:ext uri="{FF2B5EF4-FFF2-40B4-BE49-F238E27FC236}">
-                <a16:creationId xmlns:a16="http://schemas.microsoft.com/office/drawing/2014/main" id="{56128D27-E771-4E49-9D06-0887A5749BD2}"/>
-              </a:ext>
-            </a:extLst>
-          </p:cNvPr>
-          <p:cNvSpPr>
-            <a:spLocks xmlns:a="http://schemas.openxmlformats.org/drawingml/2006/main" noGrp="1"/>
-          </p:cNvSpPr>
+          <p:cNvPr id="13" name="TextBox 12"/>
+          <p:cNvSpPr txBox="1"/>
           <p:nvPr/>
         </p:nvSpPr>
         <p:spPr>
-          <a:xfrm xmlns:a="http://schemas.openxmlformats.org/drawingml/2006/main">
-            <a:off x="590550" y="5143500"/>
-            <a:ext cx="11010900" cy="657225"/>
+          <a:xfrm>
+            <a:off x="584200" y="6524625"/>
+            <a:ext cx="10807700" cy="215900"/>
           </a:xfrm>
-          <a:prstGeom xmlns:a="http://schemas.openxmlformats.org/drawingml/2006/main" prst="rect">
+          <a:prstGeom prst="rect">
             <a:avLst/>
           </a:prstGeom>
-          <a:solidFill xmlns:a="http://schemas.openxmlformats.org/drawingml/2006/main">
-            <a:srgbClr val="E5F1EE"/>
-          </a:solidFill>
-          <a:ln xmlns:a="http://schemas.openxmlformats.org/drawingml/2006/main" w="0">
-            <a:noFill/>
-          </a:ln>
-        </p:spPr>
-        <p:txBody xmlns:a="http://schemas.openxmlformats.org/drawingml/2006/main">
-          <a:bodyPr/>
-          <a:p/>
-        </p:txBody>
-      </p:sp>
-      <p:sp>
-        <p:nvSpPr>
-          <p:cNvPr id="15" name="">
-            <a:extLst xmlns:a="http://schemas.openxmlformats.org/drawingml/2006/main">
-              <a:ext uri="{FF2B5EF4-FFF2-40B4-BE49-F238E27FC236}">
-                <a16:creationId xmlns:a16="http://schemas.microsoft.com/office/drawing/2014/main" id="{CC095F2B-FA29-4785-A546-B89B591FAC0D}"/>
-              </a:ext>
-            </a:extLst>
-          </p:cNvPr>
-          <p:cNvSpPr>
-            <a:spLocks xmlns:a="http://schemas.openxmlformats.org/drawingml/2006/main" noGrp="1"/>
-          </p:cNvSpPr>
-          <p:nvPr/>
-        </p:nvSpPr>
-        <p:spPr>
-          <a:xfrm xmlns:a="http://schemas.openxmlformats.org/drawingml/2006/main">
-            <a:off x="800100" y="5267325"/>
-            <a:ext cx="10572750" cy="457200"/>
-          </a:xfrm>
-          <a:prstGeom xmlns:a="http://schemas.openxmlformats.org/drawingml/2006/main" prst="rect">
-            <a:avLst/>
-          </a:prstGeom>
-          <a:noFill xmlns:a="http://schemas.openxmlformats.org/drawingml/2006/main"/>
-          <a:ln xmlns:a="http://schemas.openxmlformats.org/drawingml/2006/main" w="0">
-            <a:noFill/>
-          </a:ln>
+          <a:noFill/>
         </p:spPr>
         <p:txBody>
-          <a:bodyPr xmlns:a="http://schemas.openxmlformats.org/drawingml/2006/main">
-            <a:noAutofit/>
+          <a:bodyPr wrap="square">
+            <a:spAutoFit/>
           </a:bodyPr>
-          <a:lstStyle xmlns:a="http://schemas.openxmlformats.org/drawingml/2006/main">
-            <a:defPPr>
-              <a:defRPr sz="2250" b="1">
-                <a:solidFill>
-                  <a:srgbClr val="2E7D6F"/>
-                </a:solidFill>
-                <a:latin typeface="Calibri"/>
-                <a:ea typeface="Calibri"/>
-                <a:cs typeface="Calibri"/>
-              </a:defRPr>
-            </a:defPPr>
-            <a:lvl1pPr>
-              <a:defRPr sz="2250" b="1">
-                <a:solidFill>
-                  <a:srgbClr val="2E7D6F"/>
-                </a:solidFill>
-                <a:latin typeface="Calibri"/>
-                <a:ea typeface="Calibri"/>
-                <a:cs typeface="Calibri"/>
-              </a:defRPr>
-            </a:lvl1pPr>
-            <a:lvl2pPr>
-              <a:defRPr sz="2250" b="1">
-                <a:solidFill>
-                  <a:srgbClr val="2E7D6F"/>
-                </a:solidFill>
-                <a:latin typeface="Calibri"/>
-                <a:ea typeface="Calibri"/>
-                <a:cs typeface="Calibri"/>
-              </a:defRPr>
-            </a:lvl2pPr>
-            <a:lvl3pPr>
-              <a:defRPr sz="2250" b="1">
-                <a:solidFill>
-                  <a:srgbClr val="2E7D6F"/>
-                </a:solidFill>
-                <a:latin typeface="Calibri"/>
-                <a:ea typeface="Calibri"/>
-                <a:cs typeface="Calibri"/>
-              </a:defRPr>
-            </a:lvl3pPr>
-            <a:lvl4pPr>
-              <a:defRPr sz="2250" b="1">
-                <a:solidFill>
-                  <a:srgbClr val="2E7D6F"/>
-                </a:solidFill>
-                <a:latin typeface="Calibri"/>
-                <a:ea typeface="Calibri"/>
-                <a:cs typeface="Calibri"/>
-              </a:defRPr>
-            </a:lvl4pPr>
-            <a:lvl5pPr>
-              <a:defRPr sz="2250" b="1">
-                <a:solidFill>
-                  <a:srgbClr val="2E7D6F"/>
-                </a:solidFill>
-                <a:latin typeface="Calibri"/>
-                <a:ea typeface="Calibri"/>
-                <a:cs typeface="Calibri"/>
-              </a:defRPr>
-            </a:lvl5pPr>
-            <a:lvl6pPr>
-              <a:defRPr sz="2250" b="1">
-                <a:solidFill>
-                  <a:srgbClr val="2E7D6F"/>
-                </a:solidFill>
-                <a:latin typeface="Calibri"/>
-                <a:ea typeface="Calibri"/>
-                <a:cs typeface="Calibri"/>
-              </a:defRPr>
-            </a:lvl6pPr>
-            <a:lvl7pPr>
-              <a:defRPr sz="2250" b="1">
-                <a:solidFill>
-                  <a:srgbClr val="2E7D6F"/>
-                </a:solidFill>
-                <a:latin typeface="Calibri"/>
-                <a:ea typeface="Calibri"/>
-                <a:cs typeface="Calibri"/>
-              </a:defRPr>
-            </a:lvl7pPr>
-            <a:lvl8pPr>
-              <a:defRPr sz="2250" b="1">
-                <a:solidFill>
-                  <a:srgbClr val="2E7D6F"/>
-                </a:solidFill>
-                <a:latin typeface="Calibri"/>
-                <a:ea typeface="Calibri"/>
-                <a:cs typeface="Calibri"/>
-              </a:defRPr>
-            </a:lvl8pPr>
-            <a:lvl9pPr>
-              <a:defRPr sz="2250" b="1">
-                <a:solidFill>
-                  <a:srgbClr val="2E7D6F"/>
-                </a:solidFill>
-                <a:latin typeface="Calibri"/>
-                <a:ea typeface="Calibri"/>
-                <a:cs typeface="Calibri"/>
-              </a:defRPr>
-            </a:lvl9pPr>
-          </a:lstStyle>
-          <a:p xmlns:a="http://schemas.openxmlformats.org/drawingml/2006/main">
+          <a:lstStyle/>
+          <a:p>
             <a:pPr>
-              <a:defRPr sz="2250" b="1">
-                <a:solidFill>
-                  <a:srgbClr val="2E7D6F"/>
-                </a:solidFill>
-                <a:latin typeface="Calibri"/>
-                <a:ea typeface="Calibri"/>
-                <a:cs typeface="Calibri"/>
-              </a:defRPr>
+              <a:spcAft>
+                <a:spcPts val="0"/>
+              </a:spcAft>
             </a:pPr>
             <a:r>
-              <a:rPr sz="2250" b="1">
-                <a:solidFill>
-                  <a:srgbClr val="2E7D6F"/>
-                </a:solidFill>
-                <a:latin typeface="Calibri"/>
-                <a:ea typeface="Calibri"/>
-                <a:cs typeface="Calibri"/>
-                <a:hlinkClick xmlns:r="http://schemas.openxmlformats.org/officeDocument/2006/relationships" r:id="Rad6e1f07a9b1445e"/>
-              </a:rPr>
-              <a:t>Open this week’s quiz</a:t>
-            </a:r>
-          </a:p>
-        </p:txBody>
-      </p:sp>
-      <p:sp>
-        <p:nvSpPr>
-          <p:cNvPr id="16" name="">
-            <a:extLst xmlns:a="http://schemas.openxmlformats.org/drawingml/2006/main">
-              <a:ext uri="{FF2B5EF4-FFF2-40B4-BE49-F238E27FC236}">
-                <a16:creationId xmlns:a16="http://schemas.microsoft.com/office/drawing/2014/main" id="{F8D2FAF0-4D81-4123-A97A-8EBEE976C235}"/>
-              </a:ext>
-            </a:extLst>
-          </p:cNvPr>
-          <p:cNvSpPr>
-            <a:spLocks xmlns:a="http://schemas.openxmlformats.org/drawingml/2006/main" noGrp="1"/>
-          </p:cNvSpPr>
-          <p:nvPr/>
-        </p:nvSpPr>
-        <p:spPr>
-          <a:xfrm xmlns:a="http://schemas.openxmlformats.org/drawingml/2006/main">
-            <a:off x="685800" y="5972175"/>
-            <a:ext cx="10668000" cy="304800"/>
-          </a:xfrm>
-          <a:prstGeom xmlns:a="http://schemas.openxmlformats.org/drawingml/2006/main" prst="rect">
-            <a:avLst/>
-          </a:prstGeom>
-          <a:noFill xmlns:a="http://schemas.openxmlformats.org/drawingml/2006/main"/>
-          <a:ln xmlns:a="http://schemas.openxmlformats.org/drawingml/2006/main" w="0">
-            <a:noFill/>
-          </a:ln>
-        </p:spPr>
-        <p:txBody>
-          <a:bodyPr xmlns:a="http://schemas.openxmlformats.org/drawingml/2006/main">
-            <a:noAutofit/>
-          </a:bodyPr>
-          <a:lstStyle xmlns:a="http://schemas.openxmlformats.org/drawingml/2006/main">
-            <a:defPPr>
-              <a:defRPr sz="1275" b="0">
+              <a:rPr sz="1200" b="0">
                 <a:solidFill>
                   <a:srgbClr val="6B7A8A"/>
                 </a:solidFill>
                 <a:latin typeface="Calibri"/>
-                <a:ea typeface="Calibri"/>
-                <a:cs typeface="Calibri"/>
-              </a:defRPr>
-            </a:defPPr>
-            <a:lvl1pPr>
-              <a:defRPr sz="1275" b="0">
-                <a:solidFill>
-                  <a:srgbClr val="6B7A8A"/>
-                </a:solidFill>
-                <a:latin typeface="Calibri"/>
-                <a:ea typeface="Calibri"/>
-                <a:cs typeface="Calibri"/>
-              </a:defRPr>
-            </a:lvl1pPr>
-            <a:lvl2pPr>
-              <a:defRPr sz="1275" b="0">
-                <a:solidFill>
-                  <a:srgbClr val="6B7A8A"/>
-                </a:solidFill>
-                <a:latin typeface="Calibri"/>
-                <a:ea typeface="Calibri"/>
-                <a:cs typeface="Calibri"/>
-              </a:defRPr>
-            </a:lvl2pPr>
-            <a:lvl3pPr>
-              <a:defRPr sz="1275" b="0">
-                <a:solidFill>
-                  <a:srgbClr val="6B7A8A"/>
-                </a:solidFill>
-                <a:latin typeface="Calibri"/>
-                <a:ea typeface="Calibri"/>
-                <a:cs typeface="Calibri"/>
-              </a:defRPr>
-            </a:lvl3pPr>
-            <a:lvl4pPr>
-              <a:defRPr sz="1275" b="0">
-                <a:solidFill>
-                  <a:srgbClr val="6B7A8A"/>
-                </a:solidFill>
-                <a:latin typeface="Calibri"/>
-                <a:ea typeface="Calibri"/>
-                <a:cs typeface="Calibri"/>
-              </a:defRPr>
-            </a:lvl4pPr>
-            <a:lvl5pPr>
-              <a:defRPr sz="1275" b="0">
-                <a:solidFill>
-                  <a:srgbClr val="6B7A8A"/>
-                </a:solidFill>
-                <a:latin typeface="Calibri"/>
-                <a:ea typeface="Calibri"/>
-                <a:cs typeface="Calibri"/>
-              </a:defRPr>
-            </a:lvl5pPr>
-            <a:lvl6pPr>
-              <a:defRPr sz="1275" b="0">
-                <a:solidFill>
-                  <a:srgbClr val="6B7A8A"/>
-                </a:solidFill>
-                <a:latin typeface="Calibri"/>
-                <a:ea typeface="Calibri"/>
-                <a:cs typeface="Calibri"/>
-              </a:defRPr>
-            </a:lvl6pPr>
-            <a:lvl7pPr>
-              <a:defRPr sz="1275" b="0">
-                <a:solidFill>
-                  <a:srgbClr val="6B7A8A"/>
-                </a:solidFill>
-                <a:latin typeface="Calibri"/>
-                <a:ea typeface="Calibri"/>
-                <a:cs typeface="Calibri"/>
-              </a:defRPr>
-            </a:lvl7pPr>
-            <a:lvl8pPr>
-              <a:defRPr sz="1275" b="0">
-                <a:solidFill>
-                  <a:srgbClr val="6B7A8A"/>
-                </a:solidFill>
-                <a:latin typeface="Calibri"/>
-                <a:ea typeface="Calibri"/>
-                <a:cs typeface="Calibri"/>
-              </a:defRPr>
-            </a:lvl8pPr>
-            <a:lvl9pPr>
-              <a:defRPr sz="1275" b="0">
-                <a:solidFill>
-                  <a:srgbClr val="6B7A8A"/>
-                </a:solidFill>
-                <a:latin typeface="Calibri"/>
-                <a:ea typeface="Calibri"/>
-                <a:cs typeface="Calibri"/>
-              </a:defRPr>
-            </a:lvl9pPr>
-          </a:lstStyle>
-          <a:p xmlns:a="http://schemas.openxmlformats.org/drawingml/2006/main">
-            <a:pPr>
-              <a:defRPr sz="1275" b="0">
-                <a:solidFill>
-                  <a:srgbClr val="6B7A8A"/>
-                </a:solidFill>
-                <a:latin typeface="Calibri"/>
-                <a:ea typeface="Calibri"/>
-                <a:cs typeface="Calibri"/>
-              </a:defRPr>
-            </a:pPr>
-            <a:r>
-              <a:rPr sz="1275" b="0">
-                <a:solidFill>
-                  <a:srgbClr val="6B7A8A"/>
-                </a:solidFill>
-                <a:latin typeface="Calibri"/>
-                <a:ea typeface="Calibri"/>
-                <a:cs typeface="Calibri"/>
-              </a:rPr>
-              <a:t>https://forms.gle/XFcLpe6ugzvnoL3s6</a:t>
-            </a:r>
-          </a:p>
-        </p:txBody>
-      </p:sp>
-      <p:sp>
-        <p:nvSpPr>
-          <p:cNvPr id="17" name="">
-            <a:extLst xmlns:a="http://schemas.openxmlformats.org/drawingml/2006/main">
-              <a:ext uri="{FF2B5EF4-FFF2-40B4-BE49-F238E27FC236}">
-                <a16:creationId xmlns:a16="http://schemas.microsoft.com/office/drawing/2014/main" id="{6D7963A1-8278-48FE-9491-807F88C5FCAF}"/>
-              </a:ext>
-            </a:extLst>
-          </p:cNvPr>
-          <p:cNvSpPr>
-            <a:spLocks xmlns:a="http://schemas.openxmlformats.org/drawingml/2006/main" noGrp="1"/>
-          </p:cNvSpPr>
-          <p:nvPr/>
-        </p:nvSpPr>
-        <p:spPr>
-          <a:xfrm xmlns:a="http://schemas.openxmlformats.org/drawingml/2006/main">
-            <a:off x="590550" y="6524625"/>
-            <a:ext cx="10810875" cy="219075"/>
-          </a:xfrm>
-          <a:prstGeom xmlns:a="http://schemas.openxmlformats.org/drawingml/2006/main" prst="rect">
-            <a:avLst/>
-          </a:prstGeom>
-          <a:noFill xmlns:a="http://schemas.openxmlformats.org/drawingml/2006/main"/>
-          <a:ln xmlns:a="http://schemas.openxmlformats.org/drawingml/2006/main" w="0">
-            <a:noFill/>
-          </a:ln>
-        </p:spPr>
-        <p:txBody>
-          <a:bodyPr xmlns:a="http://schemas.openxmlformats.org/drawingml/2006/main">
-            <a:noAutofit/>
-          </a:bodyPr>
-          <a:lstStyle xmlns:a="http://schemas.openxmlformats.org/drawingml/2006/main">
-            <a:defPPr>
-              <a:defRPr sz="1200" b="0">
-                <a:solidFill>
-                  <a:srgbClr val="6B7A8A"/>
-                </a:solidFill>
-                <a:latin typeface="Calibri"/>
-                <a:ea typeface="Calibri"/>
-                <a:cs typeface="Calibri"/>
-              </a:defRPr>
-            </a:defPPr>
-            <a:lvl1pPr>
-              <a:defRPr sz="1200" b="0">
-                <a:solidFill>
-                  <a:srgbClr val="6B7A8A"/>
-                </a:solidFill>
-                <a:latin typeface="Calibri"/>
-                <a:ea typeface="Calibri"/>
-                <a:cs typeface="Calibri"/>
-              </a:defRPr>
-            </a:lvl1pPr>
-            <a:lvl2pPr>
-              <a:defRPr sz="1200" b="0">
-                <a:solidFill>
-                  <a:srgbClr val="6B7A8A"/>
-                </a:solidFill>
-                <a:latin typeface="Calibri"/>
-                <a:ea typeface="Calibri"/>
-                <a:cs typeface="Calibri"/>
-              </a:defRPr>
-            </a:lvl2pPr>
-            <a:lvl3pPr>
-              <a:defRPr sz="1200" b="0">
-                <a:solidFill>
-                  <a:srgbClr val="6B7A8A"/>
-                </a:solidFill>
-                <a:latin typeface="Calibri"/>
-                <a:ea typeface="Calibri"/>
-                <a:cs typeface="Calibri"/>
-              </a:defRPr>
-            </a:lvl3pPr>
-            <a:lvl4pPr>
-              <a:defRPr sz="1200" b="0">
-                <a:solidFill>
-                  <a:srgbClr val="6B7A8A"/>
-                </a:solidFill>
-                <a:latin typeface="Calibri"/>
-                <a:ea typeface="Calibri"/>
-                <a:cs typeface="Calibri"/>
-              </a:defRPr>
-            </a:lvl4pPr>
-            <a:lvl5pPr>
-              <a:defRPr sz="1200" b="0">
-                <a:solidFill>
-                  <a:srgbClr val="6B7A8A"/>
-                </a:solidFill>
-                <a:latin typeface="Calibri"/>
-                <a:ea typeface="Calibri"/>
-                <a:cs typeface="Calibri"/>
-              </a:defRPr>
-            </a:lvl5pPr>
-            <a:lvl6pPr>
-              <a:defRPr sz="1200" b="0">
-                <a:solidFill>
-                  <a:srgbClr val="6B7A8A"/>
-                </a:solidFill>
-                <a:latin typeface="Calibri"/>
-                <a:ea typeface="Calibri"/>
-                <a:cs typeface="Calibri"/>
-              </a:defRPr>
-            </a:lvl6pPr>
-            <a:lvl7pPr>
-              <a:defRPr sz="1200" b="0">
-                <a:solidFill>
-                  <a:srgbClr val="6B7A8A"/>
-                </a:solidFill>
-                <a:latin typeface="Calibri"/>
-                <a:ea typeface="Calibri"/>
-                <a:cs typeface="Calibri"/>
-              </a:defRPr>
-            </a:lvl7pPr>
-            <a:lvl8pPr>
-              <a:defRPr sz="1200" b="0">
-                <a:solidFill>
-                  <a:srgbClr val="6B7A8A"/>
-                </a:solidFill>
-                <a:latin typeface="Calibri"/>
-                <a:ea typeface="Calibri"/>
-                <a:cs typeface="Calibri"/>
-              </a:defRPr>
-            </a:lvl8pPr>
-            <a:lvl9pPr>
-              <a:defRPr sz="1200" b="0">
-                <a:solidFill>
-                  <a:srgbClr val="6B7A8A"/>
-                </a:solidFill>
-                <a:latin typeface="Calibri"/>
-                <a:ea typeface="Calibri"/>
-                <a:cs typeface="Calibri"/>
-              </a:defRPr>
-            </a:lvl9pPr>
-          </a:lstStyle>
-          <a:p xmlns:a="http://schemas.openxmlformats.org/drawingml/2006/main">
-            <a:pPr>
-              <a:defRPr sz="1200" b="0">
-                <a:solidFill>
-                  <a:srgbClr val="6B7A8A"/>
-                </a:solidFill>
-                <a:latin typeface="Calibri"/>
-                <a:ea typeface="Calibri"/>
-                <a:cs typeface="Calibri"/>
-              </a:defRPr>
-            </a:pPr>
-            <a:r>
-              <a:rPr sz="1200" b="0">
-                <a:solidFill>
-                  <a:srgbClr val="6B7A8A"/>
-                </a:solidFill>
-                <a:latin typeface="Calibri"/>
-                <a:ea typeface="Calibri"/>
-                <a:cs typeface="Calibri"/>
               </a:rPr>
               <a:t>CML3113   Week 12   43</a:t>
             </a:r>
@@ -45021,12 +41349,10 @@
         </p:txBody>
       </p:sp>
     </p:spTree>
-    <p:extLst>
-      <p:ext uri="{BB962C8B-B14F-4D97-AF65-F5344CB8AC3E}">
-        <p14:creationId xmlns:p14="http://schemas.microsoft.com/office/powerpoint/2010/main" val="450971119"/>
-      </p:ext>
-    </p:extLst>
   </p:cSld>
+  <p:clrMapOvr>
+    <a:masterClrMapping/>
+  </p:clrMapOvr>
 </p:sld>
 </file>
 
@@ -45681,6 +42007,7 @@
           </a:p>
           <a:p xmlns:a="http://schemas.openxmlformats.org/drawingml/2006/main">
             <a:r>
+              <a:rPr/>
               <a:t/>
             </a:r>
           </a:p>
@@ -45704,7 +42031,7 @@
                 <a:ea typeface="Calibri"/>
                 <a:cs typeface="Calibri"/>
               </a:rPr>
-              <a:t>Keep raw data unchanged. Restart and run all cells before submitting the required assignment notebook.</a:t>
+              <a:t>Keep raw data unchanged. Restart and run all cells before you hand in your Block 2 notebooks.</a:t>
             </a:r>
           </a:p>
         </p:txBody>
@@ -47054,7 +43381,7 @@
                 <a:ea typeface="Calibri"/>
                 <a:cs typeface="Calibri"/>
               </a:rPr>
-              <a:t>Machine Learning Fundamentals Cross Validation</a:t>
+              <a:t>Machine Learning Fundamentals: Bias and Variance</a:t>
             </a:r>
           </a:p>
         </p:txBody>
@@ -47686,7 +44013,7 @@
                 <a:ea typeface="Calibri"/>
                 <a:cs typeface="Calibri"/>
               </a:rPr>
-              <a:t>Listening question: Why evaluate using observations not used to fit that particular model?</a:t>
+              <a:t>Listening question: What goes wrong with a model that is too simple, and with one that is too flexible?</a:t>
             </a:r>
           </a:p>
         </p:txBody>
@@ -47877,7 +44204,7 @@
                 <a:latin typeface="Calibri"/>
                 <a:ea typeface="Calibri"/>
                 <a:cs typeface="Calibri"/>
-                <a:hlinkClick xmlns:r="http://schemas.openxmlformats.org/officeDocument/2006/relationships" r:id="R511bfaf5c5d34287"/>
+                <a:hlinkClick xmlns:ns0="http://schemas.openxmlformats.org/officeDocument/2006/relationships" ns0:id="rId3"/>
               </a:rPr>
               <a:t>Open explainer video</a:t>
             </a:r>
@@ -51283,6 +47610,7 @@
           </a:p>
           <a:p xmlns:a="http://schemas.openxmlformats.org/drawingml/2006/main">
             <a:r>
+              <a:rPr/>
               <a:t/>
             </a:r>
           </a:p>

--- a/IUEA_Teaching_Plan/decks/CML3113_Week12_Mining_Petroleum.pptx
+++ b/IUEA_Teaching_Plan/decks/CML3113_Week12_Mining_Petroleum.pptx
@@ -725,7 +725,7 @@
           <a:lstStyle/>
           <a:p>
             <a:r>
-              <a:t>Choosing a model means comparing candidates fairly. We score three of them on the same validation rows, so the comparison is fair. The average guess has an error of 2.71 kWh/t. The straight line has 0.67. The tree has 1.18.</a:t>
+              <a:t>Choosing a model means comparing candidates fairly. We score three of them on the same validation rows, so the comparison is fair. The average guess has an error of 2.71 kWh/t. The straight line has 0.67. The tree has 1.20.</a:t>
             </a:r>
           </a:p>
           <a:p/>
@@ -10925,7 +10925,7 @@
                           </a:solidFill>
                           <a:latin typeface="Calibri"/>
                         </a:rPr>
-                        <a:t>1.18</a:t>
+                        <a:t>1.20</a:t>
                       </a:r>
                     </a:p>
                   </a:txBody>
@@ -19225,7 +19225,7 @@
                           </a:solidFill>
                           <a:latin typeface="Calibri"/>
                         </a:rPr>
-                        <a:t>1.18</a:t>
+                        <a:t>1.20</a:t>
                       </a:r>
                     </a:p>
                   </a:txBody>
